--- a/deliverables/interim/TZ_Review_interim.pptx
+++ b/deliverables/interim/TZ_Review_interim.pptx
@@ -3727,10 +3727,10 @@
                 <a:tableStyleId>{5C22544A-7EE6-4342-B048-85BDC9FD1C3A}</a:tableStyleId>
               </a:tblPr>
               <a:tblGrid>
-                <a:gridCol w="2560320"/>
-                <a:gridCol w="2377440"/>
-                <a:gridCol w="4297680"/>
+                <a:gridCol w="2743200"/>
                 <a:gridCol w="1828800"/>
+                <a:gridCol w="4846320"/>
+                <a:gridCol w="1645920"/>
               </a:tblGrid>
               <a:tr h="365760">
                 <a:tc>
@@ -3804,52 +3804,52 @@
                         <a:defRPr sz="1300"/>
                       </a:pPr>
                       <a:r>
-                        <a:t>…</a:t>
-                      </a:r>
-                    </a:p>
-                  </a:txBody>
-                  <a:tcPr/>
-                </a:tc>
-                <a:tc>
-                  <a:txBody>
-                    <a:bodyPr/>
-                    <a:lstStyle/>
-                    <a:p>
-                      <a:pPr>
-                        <a:defRPr sz="1300"/>
-                      </a:pPr>
-                      <a:r>
-                        <a:t>…</a:t>
-                      </a:r>
-                    </a:p>
-                  </a:txBody>
-                  <a:tcPr/>
-                </a:tc>
-                <a:tc>
-                  <a:txBody>
-                    <a:bodyPr/>
-                    <a:lstStyle/>
-                    <a:p>
-                      <a:pPr>
-                        <a:defRPr sz="1300"/>
-                      </a:pPr>
-                      <a:r>
-                        <a:t>…</a:t>
-                      </a:r>
-                    </a:p>
-                  </a:txBody>
-                  <a:tcPr/>
-                </a:tc>
-                <a:tc>
-                  <a:txBody>
-                    <a:bodyPr/>
-                    <a:lstStyle/>
-                    <a:p>
-                      <a:pPr>
-                        <a:defRPr sz="1300"/>
-                      </a:pPr>
-                      <a:r>
-                        <a:t>…</a:t>
+                        <a:t>Коротков Леонид (@fDAFX)</a:t>
+                      </a:r>
+                    </a:p>
+                  </a:txBody>
+                  <a:tcPr/>
+                </a:tc>
+                <a:tc>
+                  <a:txBody>
+                    <a:bodyPr/>
+                    <a:lstStyle/>
+                    <a:p>
+                      <a:pPr>
+                        <a:defRPr sz="1300"/>
+                      </a:pPr>
+                      <a:r>
+                        <a:t>AI Engineer, лид</a:t>
+                      </a:r>
+                    </a:p>
+                  </a:txBody>
+                  <a:tcPr/>
+                </a:tc>
+                <a:tc>
+                  <a:txBody>
+                    <a:bodyPr/>
+                    <a:lstStyle/>
+                    <a:p>
+                      <a:pPr>
+                        <a:defRPr sz="1300"/>
+                      </a:pPr>
+                      <a:r>
+                        <a:t>архитектура и конвейер ревью, эксперименты и оценка, self-hosted модель, инфраструктура (compose, очередь, история, мониторинг), описание и презентация</a:t>
+                      </a:r>
+                    </a:p>
+                  </a:txBody>
+                  <a:tcPr/>
+                </a:tc>
+                <a:tc>
+                  <a:txBody>
+                    <a:bodyPr/>
+                    <a:lstStyle/>
+                    <a:p>
+                      <a:pPr>
+                        <a:defRPr sz="1300"/>
+                      </a:pPr>
+                      <a:r>
+                        <a:t>ведущая (≈70%)</a:t>
                       </a:r>
                     </a:p>
                   </a:txBody>
@@ -3866,52 +3866,52 @@
                         <a:defRPr sz="1300"/>
                       </a:pPr>
                       <a:r>
-                        <a:t>…</a:t>
-                      </a:r>
-                    </a:p>
-                  </a:txBody>
-                  <a:tcPr/>
-                </a:tc>
-                <a:tc>
-                  <a:txBody>
-                    <a:bodyPr/>
-                    <a:lstStyle/>
-                    <a:p>
-                      <a:pPr>
-                        <a:defRPr sz="1300"/>
-                      </a:pPr>
-                      <a:r>
-                        <a:t>…</a:t>
-                      </a:r>
-                    </a:p>
-                  </a:txBody>
-                  <a:tcPr/>
-                </a:tc>
-                <a:tc>
-                  <a:txBody>
-                    <a:bodyPr/>
-                    <a:lstStyle/>
-                    <a:p>
-                      <a:pPr>
-                        <a:defRPr sz="1300"/>
-                      </a:pPr>
-                      <a:r>
-                        <a:t>…</a:t>
-                      </a:r>
-                    </a:p>
-                  </a:txBody>
-                  <a:tcPr/>
-                </a:tc>
-                <a:tc>
-                  <a:txBody>
-                    <a:bodyPr/>
-                    <a:lstStyle/>
-                    <a:p>
-                      <a:pPr>
-                        <a:defRPr sz="1300"/>
-                      </a:pPr>
-                      <a:r>
-                        <a:t>…</a:t>
+                        <a:t>Сокол Тимофей (@xcmgg)</a:t>
+                      </a:r>
+                    </a:p>
+                  </a:txBody>
+                  <a:tcPr/>
+                </a:tc>
+                <a:tc>
+                  <a:txBody>
+                    <a:bodyPr/>
+                    <a:lstStyle/>
+                    <a:p>
+                      <a:pPr>
+                        <a:defRPr sz="1300"/>
+                      </a:pPr>
+                      <a:r>
+                        <a:t>AI Product</a:t>
+                      </a:r>
+                    </a:p>
+                  </a:txBody>
+                  <a:tcPr/>
+                </a:tc>
+                <a:tc>
+                  <a:txBody>
+                    <a:bodyPr/>
+                    <a:lstStyle/>
+                    <a:p>
+                      <a:pPr>
+                        <a:defRPr sz="1300"/>
+                      </a:pPr>
+                      <a:r>
+                        <a:t>пользователь и гипотеза, границы MVP, критерии успеха и риски; фронтенд аналитика (интеграция с API к финалу)</a:t>
+                      </a:r>
+                    </a:p>
+                  </a:txBody>
+                  <a:tcPr/>
+                </a:tc>
+                <a:tc>
+                  <a:txBody>
+                    <a:bodyPr/>
+                    <a:lstStyle/>
+                    <a:p>
+                      <a:pPr>
+                        <a:defRPr sz="1300"/>
+                      </a:pPr>
+                      <a:r>
+                        <a:t>≈20%</a:t>
                       </a:r>
                     </a:p>
                   </a:txBody>
@@ -3928,52 +3928,52 @@
                         <a:defRPr sz="1300"/>
                       </a:pPr>
                       <a:r>
-                        <a:t>…</a:t>
-                      </a:r>
-                    </a:p>
-                  </a:txBody>
-                  <a:tcPr/>
-                </a:tc>
-                <a:tc>
-                  <a:txBody>
-                    <a:bodyPr/>
-                    <a:lstStyle/>
-                    <a:p>
-                      <a:pPr>
-                        <a:defRPr sz="1300"/>
-                      </a:pPr>
-                      <a:r>
-                        <a:t>…</a:t>
-                      </a:r>
-                    </a:p>
-                  </a:txBody>
-                  <a:tcPr/>
-                </a:tc>
-                <a:tc>
-                  <a:txBody>
-                    <a:bodyPr/>
-                    <a:lstStyle/>
-                    <a:p>
-                      <a:pPr>
-                        <a:defRPr sz="1300"/>
-                      </a:pPr>
-                      <a:r>
-                        <a:t>…</a:t>
-                      </a:r>
-                    </a:p>
-                  </a:txBody>
-                  <a:tcPr/>
-                </a:tc>
-                <a:tc>
-                  <a:txBody>
-                    <a:bodyPr/>
-                    <a:lstStyle/>
-                    <a:p>
-                      <a:pPr>
-                        <a:defRPr sz="1300"/>
-                      </a:pPr>
-                      <a:r>
-                        <a:t>…</a:t>
+                        <a:t>Рыженко Виктор (@RyzhenkoViktor)</a:t>
+                      </a:r>
+                    </a:p>
+                  </a:txBody>
+                  <a:tcPr/>
+                </a:tc>
+                <a:tc>
+                  <a:txBody>
+                    <a:bodyPr/>
+                    <a:lstStyle/>
+                    <a:p>
+                      <a:pPr>
+                        <a:defRPr sz="1300"/>
+                      </a:pPr>
+                      <a:r>
+                        <a:t>AI Engineer</a:t>
+                      </a:r>
+                    </a:p>
+                  </a:txBody>
+                  <a:tcPr/>
+                </a:tc>
+                <a:tc>
+                  <a:txBody>
+                    <a:bodyPr/>
+                    <a:lstStyle/>
+                    <a:p>
+                      <a:pPr>
+                        <a:defRPr sz="1300"/>
+                      </a:pPr>
+                      <a:r>
+                        <a:t>вычитка документов МТС и разметка дефектов (второй размётчик), проверка демо-сценария</a:t>
+                      </a:r>
+                    </a:p>
+                  </a:txBody>
+                  <a:tcPr/>
+                </a:tc>
+                <a:tc>
+                  <a:txBody>
+                    <a:bodyPr/>
+                    <a:lstStyle/>
+                    <a:p>
+                      <a:pPr>
+                        <a:defRPr sz="1300"/>
+                      </a:pPr>
+                      <a:r>
+                        <a:t>≈10%</a:t>
                       </a:r>
                     </a:p>
                   </a:txBody>
@@ -4014,7 +4014,7 @@
               </a:defRPr>
             </a:pPr>
             <a:r>
-              <a:t>Заполняется командой до сдачи.</a:t>
+              <a:t>Степени участия — оценка на 04.09; в финальной версии уточняются по фактическому вкладу.</a:t>
             </a:r>
           </a:p>
         </p:txBody>

--- a/deliverables/interim/TZ_Review_interim.pptx
+++ b/deliverables/interim/TZ_Review_interim.pptx
@@ -3819,37 +3819,37 @@
                         <a:defRPr sz="1300"/>
                       </a:pPr>
                       <a:r>
-                        <a:t>AI Engineer, лид</a:t>
-                      </a:r>
-                    </a:p>
-                  </a:txBody>
-                  <a:tcPr/>
-                </a:tc>
-                <a:tc>
-                  <a:txBody>
-                    <a:bodyPr/>
-                    <a:lstStyle/>
-                    <a:p>
-                      <a:pPr>
-                        <a:defRPr sz="1300"/>
-                      </a:pPr>
-                      <a:r>
-                        <a:t>архитектура и конвейер ревью, эксперименты и оценка, self-hosted модель, инфраструктура (compose, очередь, история, мониторинг), описание и презентация</a:t>
-                      </a:r>
-                    </a:p>
-                  </a:txBody>
-                  <a:tcPr/>
-                </a:tc>
-                <a:tc>
-                  <a:txBody>
-                    <a:bodyPr/>
-                    <a:lstStyle/>
-                    <a:p>
-                      <a:pPr>
-                        <a:defRPr sz="1300"/>
-                      </a:pPr>
-                      <a:r>
-                        <a:t>ведущая (≈70%)</a:t>
+                        <a:t>AI Engineer — исследование и направление</a:t>
+                      </a:r>
+                    </a:p>
+                  </a:txBody>
+                  <a:tcPr/>
+                </a:tc>
+                <a:tc>
+                  <a:txBody>
+                    <a:bodyPr/>
+                    <a:lstStyle/>
+                    <a:p>
+                      <a:pPr>
+                        <a:defRPr sz="1300"/>
+                      </a:pPr>
+                      <a:r>
+                        <a:t>генерация и отбор идей: гипотезы, архитектурные решения, план экспериментов, выбор моделей и метрик; методология оценки</a:t>
+                      </a:r>
+                    </a:p>
+                  </a:txBody>
+                  <a:tcPr/>
+                </a:tc>
+                <a:tc>
+                  <a:txBody>
+                    <a:bodyPr/>
+                    <a:lstStyle/>
+                    <a:p>
+                      <a:pPr>
+                        <a:defRPr sz="1300"/>
+                      </a:pPr>
+                      <a:r>
+                        <a:t>≈40%</a:t>
                       </a:r>
                     </a:p>
                   </a:txBody>
@@ -3866,52 +3866,52 @@
                         <a:defRPr sz="1300"/>
                       </a:pPr>
                       <a:r>
-                        <a:t>Сокол Тимофей (@xcmgg)</a:t>
-                      </a:r>
-                    </a:p>
-                  </a:txBody>
-                  <a:tcPr/>
-                </a:tc>
-                <a:tc>
-                  <a:txBody>
-                    <a:bodyPr/>
-                    <a:lstStyle/>
-                    <a:p>
-                      <a:pPr>
-                        <a:defRPr sz="1300"/>
-                      </a:pPr>
-                      <a:r>
-                        <a:t>AI Product</a:t>
-                      </a:r>
-                    </a:p>
-                  </a:txBody>
-                  <a:tcPr/>
-                </a:tc>
-                <a:tc>
-                  <a:txBody>
-                    <a:bodyPr/>
-                    <a:lstStyle/>
-                    <a:p>
-                      <a:pPr>
-                        <a:defRPr sz="1300"/>
-                      </a:pPr>
-                      <a:r>
-                        <a:t>пользователь и гипотеза, границы MVP, критерии успеха и риски; фронтенд аналитика (интеграция с API к финалу)</a:t>
-                      </a:r>
-                    </a:p>
-                  </a:txBody>
-                  <a:tcPr/>
-                </a:tc>
-                <a:tc>
-                  <a:txBody>
-                    <a:bodyPr/>
-                    <a:lstStyle/>
-                    <a:p>
-                      <a:pPr>
-                        <a:defRPr sz="1300"/>
-                      </a:pPr>
-                      <a:r>
-                        <a:t>≈20%</a:t>
+                        <a:t>Рыженко Виктор (@RyzhenkoViktor)</a:t>
+                      </a:r>
+                    </a:p>
+                  </a:txBody>
+                  <a:tcPr/>
+                </a:tc>
+                <a:tc>
+                  <a:txBody>
+                    <a:bodyPr/>
+                    <a:lstStyle/>
+                    <a:p>
+                      <a:pPr>
+                        <a:defRPr sz="1300"/>
+                      </a:pPr>
+                      <a:r>
+                        <a:t>AI Engineer — реализация</a:t>
+                      </a:r>
+                    </a:p>
+                  </a:txBody>
+                  <a:tcPr/>
+                </a:tc>
+                <a:tc>
+                  <a:txBody>
+                    <a:bodyPr/>
+                    <a:lstStyle/>
+                    <a:p>
+                      <a:pPr>
+                        <a:defRPr sz="1300"/>
+                      </a:pPr>
+                      <a:r>
+                        <a:t>код и инфраструктура: конвейер ревью и тесты, бенч и фабрика синтетики, compose-контур, интеграция self-hosted модели</a:t>
+                      </a:r>
+                    </a:p>
+                  </a:txBody>
+                  <a:tcPr/>
+                </a:tc>
+                <a:tc>
+                  <a:txBody>
+                    <a:bodyPr/>
+                    <a:lstStyle/>
+                    <a:p>
+                      <a:pPr>
+                        <a:defRPr sz="1300"/>
+                      </a:pPr>
+                      <a:r>
+                        <a:t>≈35%</a:t>
                       </a:r>
                     </a:p>
                   </a:txBody>
@@ -3928,52 +3928,52 @@
                         <a:defRPr sz="1300"/>
                       </a:pPr>
                       <a:r>
-                        <a:t>Рыженко Виктор (@RyzhenkoViktor)</a:t>
-                      </a:r>
-                    </a:p>
-                  </a:txBody>
-                  <a:tcPr/>
-                </a:tc>
-                <a:tc>
-                  <a:txBody>
-                    <a:bodyPr/>
-                    <a:lstStyle/>
-                    <a:p>
-                      <a:pPr>
-                        <a:defRPr sz="1300"/>
-                      </a:pPr>
-                      <a:r>
-                        <a:t>AI Engineer</a:t>
-                      </a:r>
-                    </a:p>
-                  </a:txBody>
-                  <a:tcPr/>
-                </a:tc>
-                <a:tc>
-                  <a:txBody>
-                    <a:bodyPr/>
-                    <a:lstStyle/>
-                    <a:p>
-                      <a:pPr>
-                        <a:defRPr sz="1300"/>
-                      </a:pPr>
-                      <a:r>
-                        <a:t>вычитка документов МТС и разметка дефектов (второй размётчик), проверка демо-сценария</a:t>
-                      </a:r>
-                    </a:p>
-                  </a:txBody>
-                  <a:tcPr/>
-                </a:tc>
-                <a:tc>
-                  <a:txBody>
-                    <a:bodyPr/>
-                    <a:lstStyle/>
-                    <a:p>
-                      <a:pPr>
-                        <a:defRPr sz="1300"/>
-                      </a:pPr>
-                      <a:r>
-                        <a:t>≈10%</a:t>
+                        <a:t>Сокол Тимофей (@xcmgg)</a:t>
+                      </a:r>
+                    </a:p>
+                  </a:txBody>
+                  <a:tcPr/>
+                </a:tc>
+                <a:tc>
+                  <a:txBody>
+                    <a:bodyPr/>
+                    <a:lstStyle/>
+                    <a:p>
+                      <a:pPr>
+                        <a:defRPr sz="1300"/>
+                      </a:pPr>
+                      <a:r>
+                        <a:t>AI Product — процессы и продукт</a:t>
+                      </a:r>
+                    </a:p>
+                  </a:txBody>
+                  <a:tcPr/>
+                </a:tc>
+                <a:tc>
+                  <a:txBody>
+                    <a:bodyPr/>
+                    <a:lstStyle/>
+                    <a:p>
+                      <a:pPr>
+                        <a:defRPr sz="1300"/>
+                      </a:pPr>
+                      <a:r>
+                        <a:t>процесс команды и курс развития, продуктовая проработка (гипотеза, MVP, критерии, риски), фронтенд аналитика, участие в коде</a:t>
+                      </a:r>
+                    </a:p>
+                  </a:txBody>
+                  <a:tcPr/>
+                </a:tc>
+                <a:tc>
+                  <a:txBody>
+                    <a:bodyPr/>
+                    <a:lstStyle/>
+                    <a:p>
+                      <a:pPr>
+                        <a:defRPr sz="1300"/>
+                      </a:pPr>
+                      <a:r>
+                        <a:t>≈25%</a:t>
                       </a:r>
                     </a:p>
                   </a:txBody>

--- a/deliverables/interim/TZ_Review_interim.pptx
+++ b/deliverables/interim/TZ_Review_interim.pptx
@@ -3849,7 +3849,7 @@
                         <a:defRPr sz="1300"/>
                       </a:pPr>
                       <a:r>
-                        <a:t>≈40%</a:t>
+                        <a:t>ведущая, постоянно</a:t>
                       </a:r>
                     </a:p>
                   </a:txBody>
@@ -3911,7 +3911,7 @@
                         <a:defRPr sz="1300"/>
                       </a:pPr>
                       <a:r>
-                        <a:t>≈35%</a:t>
+                        <a:t>частичная, по задачам реализации</a:t>
                       </a:r>
                     </a:p>
                   </a:txBody>
@@ -3973,7 +3973,7 @@
                         <a:defRPr sz="1300"/>
                       </a:pPr>
                       <a:r>
-                        <a:t>≈25%</a:t>
+                        <a:t>высокая, постоянно</a:t>
                       </a:r>
                     </a:p>
                   </a:txBody>
@@ -4014,7 +4014,7 @@
               </a:defRPr>
             </a:pPr>
             <a:r>
-              <a:t>Степени участия — оценка на 04.09; в финальной версии уточняются по фактическому вкладу.</a:t>
+              <a:t>Степень участия — на 04.09; в финальной версии уточняется по фактическому вкладу.</a:t>
             </a:r>
           </a:p>
         </p:txBody>

--- a/deliverables/interim/TZ_Review_interim.pptx
+++ b/deliverables/interim/TZ_Review_interim.pptx
@@ -17,6 +17,16 @@
     <p:sldId id="265" r:id="rId16"/>
     <p:sldId id="266" r:id="rId17"/>
     <p:sldId id="267" r:id="rId18"/>
+    <p:sldId id="268" r:id="rId19"/>
+    <p:sldId id="269" r:id="rId20"/>
+    <p:sldId id="270" r:id="rId21"/>
+    <p:sldId id="271" r:id="rId22"/>
+    <p:sldId id="272" r:id="rId23"/>
+    <p:sldId id="273" r:id="rId24"/>
+    <p:sldId id="274" r:id="rId25"/>
+    <p:sldId id="275" r:id="rId26"/>
+    <p:sldId id="276" r:id="rId27"/>
+    <p:sldId id="277" r:id="rId28"/>
   </p:sldIdLst>
   <p:sldSz cx="12191695" cy="6858000" type="screen4x3"/>
   <p:notesSz cx="6858000" cy="9144000"/>
@@ -3116,47 +3126,47 @@
           <a:noFill/>
         </p:spPr>
         <p:txBody>
-          <a:bodyPr wrap="none">
-            <a:spAutoFit/>
-          </a:bodyPr>
-          <a:lstStyle/>
-          <a:p>
-            <a:pPr>
-              <a:defRPr sz="4000" b="1">
-                <a:solidFill>
-                  <a:srgbClr val="1F2328"/>
-                </a:solidFill>
-              </a:defRPr>
-            </a:pPr>
-            <a:r>
-              <a:t>TZ Review — предварительное ревью ТЗ на потоки и витрины данных</a:t>
-            </a:r>
-          </a:p>
-        </p:txBody>
-      </p:sp>
-      <p:sp>
-        <p:nvSpPr>
-          <p:cNvPr id="3" name="TextBox 2"/>
-          <p:cNvSpPr txBox="1"/>
-          <p:nvPr/>
-        </p:nvSpPr>
-        <p:spPr>
-          <a:xfrm>
-            <a:off x="640080" y="3383280"/>
-            <a:ext cx="10881360" cy="1463040"/>
-          </a:xfrm>
-          <a:prstGeom prst="rect">
-            <a:avLst/>
-          </a:prstGeom>
-          <a:noFill/>
-        </p:spPr>
-        <p:txBody>
           <a:bodyPr wrap="square">
             <a:spAutoFit/>
           </a:bodyPr>
           <a:lstStyle/>
           <a:p>
             <a:pPr>
+              <a:defRPr sz="3800" b="1">
+                <a:solidFill>
+                  <a:srgbClr val="1F2328"/>
+                </a:solidFill>
+              </a:defRPr>
+            </a:pPr>
+            <a:r>
+              <a:t>TZ Review — предварительное ревью ТЗ на потоки и витрины данных</a:t>
+            </a:r>
+          </a:p>
+        </p:txBody>
+      </p:sp>
+      <p:sp>
+        <p:nvSpPr>
+          <p:cNvPr id="3" name="TextBox 2"/>
+          <p:cNvSpPr txBox="1"/>
+          <p:nvPr/>
+        </p:nvSpPr>
+        <p:spPr>
+          <a:xfrm>
+            <a:off x="640080" y="3566160"/>
+            <a:ext cx="10881360" cy="1463040"/>
+          </a:xfrm>
+          <a:prstGeom prst="rect">
+            <a:avLst/>
+          </a:prstGeom>
+          <a:noFill/>
+        </p:spPr>
+        <p:txBody>
+          <a:bodyPr wrap="square">
+            <a:spAutoFit/>
+          </a:bodyPr>
+          <a:lstStyle/>
+          <a:p>
+            <a:pPr>
               <a:defRPr sz="1800">
                 <a:solidFill>
                   <a:srgbClr val="6B7280"/>
@@ -3164,7 +3174,11 @@
               </a:defRPr>
             </a:pPr>
             <a:r>
-              <a:t>Кейс МТС NET · промежуточная версия · 04.09.2026 · github.com/FD-AX/MWS</a:t>
+              <a:t>Кейс МТС NET · промежуточная версия 04.09.2026 · github.com/FD-AX/MWS</a:t>
+            </a:r>
+            <a:br/>
+            <a:r>
+              <a:t>Что уже есть: конвейер с доказанными этапами, self-hosted модель, контур с историей и мониторингом, демо на документах МТС</a:t>
             </a:r>
           </a:p>
         </p:txBody>
@@ -3195,8 +3209,8 @@
         </p:nvSpPr>
         <p:spPr>
           <a:xfrm>
-            <a:off x="548640" y="320040"/>
-            <a:ext cx="10972800" cy="822960"/>
+            <a:off x="548640" y="274320"/>
+            <a:ext cx="11155680" cy="822960"/>
           </a:xfrm>
           <a:prstGeom prst="rect">
             <a:avLst/>
@@ -3210,14 +3224,3135 @@
           <a:lstStyle/>
           <a:p>
             <a:pPr>
-              <a:defRPr sz="2800" b="1">
-                <a:solidFill>
-                  <a:srgbClr val="1F2328"/>
-                </a:solidFill>
-              </a:defRPr>
-            </a:pPr>
-            <a:r>
-              <a:t>Риски и как их закрываем</a:t>
+              <a:defRPr sz="2600" b="1">
+                <a:solidFill>
+                  <a:srgbClr val="1F2328"/>
+                </a:solidFill>
+              </a:defRPr>
+            </a:pPr>
+            <a:r>
+              <a:t>Этап 3. Чеклист полноты: 27 слотов</a:t>
+            </a:r>
+          </a:p>
+        </p:txBody>
+      </p:sp>
+      <p:sp>
+        <p:nvSpPr>
+          <p:cNvPr id="3" name="TextBox 2"/>
+          <p:cNvSpPr txBox="1"/>
+          <p:nvPr/>
+        </p:nvSpPr>
+        <p:spPr>
+          <a:xfrm>
+            <a:off x="548640" y="1143000"/>
+            <a:ext cx="3566160" cy="365760"/>
+          </a:xfrm>
+          <a:prstGeom prst="rect">
+            <a:avLst/>
+          </a:prstGeom>
+          <a:noFill/>
+        </p:spPr>
+        <p:txBody>
+          <a:bodyPr wrap="none">
+            <a:spAutoFit/>
+          </a:bodyPr>
+          <a:lstStyle/>
+          <a:p>
+            <a:pPr>
+              <a:defRPr sz="1400" b="1">
+                <a:solidFill>
+                  <a:srgbClr val="2563EB"/>
+                </a:solidFill>
+              </a:defRPr>
+            </a:pPr>
+            <a:r>
+              <a:t>Что делает</a:t>
+            </a:r>
+          </a:p>
+        </p:txBody>
+      </p:sp>
+      <p:sp>
+        <p:nvSpPr>
+          <p:cNvPr id="4" name="TextBox 3"/>
+          <p:cNvSpPr txBox="1"/>
+          <p:nvPr/>
+        </p:nvSpPr>
+        <p:spPr>
+          <a:xfrm>
+            <a:off x="548640" y="1508760"/>
+            <a:ext cx="3566160" cy="2926080"/>
+          </a:xfrm>
+          <a:prstGeom prst="rect">
+            <a:avLst/>
+          </a:prstGeom>
+          <a:noFill/>
+        </p:spPr>
+        <p:txBody>
+          <a:bodyPr wrap="square">
+            <a:spAutoFit/>
+          </a:bodyPr>
+          <a:lstStyle/>
+          <a:p>
+            <a:pPr>
+              <a:spcAft>
+                <a:spcPts val="500"/>
+              </a:spcAft>
+              <a:defRPr sz="1300">
+                <a:solidFill>
+                  <a:srgbClr val="1F2328"/>
+                </a:solidFill>
+              </a:defRPr>
+            </a:pPr>
+            <a:r>
+              <a:t>• Бинарные вопросы по домену DWH: инкремент, late-arriving, NULL, дедупликация, ключи, SLA, сбои, объёмы</a:t>
+            </a:r>
+          </a:p>
+          <a:p>
+            <a:pPr>
+              <a:spcAft>
+                <a:spcPts val="500"/>
+              </a:spcAft>
+              <a:defRPr sz="1300">
+                <a:solidFill>
+                  <a:srgbClr val="1F2328"/>
+                </a:solidFill>
+              </a:defRPr>
+            </a:pPr>
+            <a:r>
+              <a:t>• 8 «Основных моментов» МТС — отдельные слоты (SER, CAT, NUL-03, FIL-02, LOC-02/03, REF, KEY-02)</a:t>
+            </a:r>
+          </a:p>
+          <a:p>
+            <a:pPr>
+              <a:spcAft>
+                <a:spcPts val="500"/>
+              </a:spcAft>
+              <a:defRPr sz="1300">
+                <a:solidFill>
+                  <a:srgbClr val="1F2328"/>
+                </a:solidFill>
+              </a:defRPr>
+            </a:pPr>
+            <a:r>
+              <a:t>• Исходы OK (с цитатой) / MISSING / UNCLEAR / NA («не применимо»); батчи по 5, добор неотвеченных</a:t>
+            </a:r>
+          </a:p>
+        </p:txBody>
+      </p:sp>
+      <p:sp>
+        <p:nvSpPr>
+          <p:cNvPr id="5" name="TextBox 4"/>
+          <p:cNvSpPr txBox="1"/>
+          <p:nvPr/>
+        </p:nvSpPr>
+        <p:spPr>
+          <a:xfrm>
+            <a:off x="4297680" y="1143000"/>
+            <a:ext cx="3566160" cy="365760"/>
+          </a:xfrm>
+          <a:prstGeom prst="rect">
+            <a:avLst/>
+          </a:prstGeom>
+          <a:noFill/>
+        </p:spPr>
+        <p:txBody>
+          <a:bodyPr wrap="none">
+            <a:spAutoFit/>
+          </a:bodyPr>
+          <a:lstStyle/>
+          <a:p>
+            <a:pPr>
+              <a:defRPr sz="1400" b="1">
+                <a:solidFill>
+                  <a:srgbClr val="2563EB"/>
+                </a:solidFill>
+              </a:defRPr>
+            </a:pPr>
+            <a:r>
+              <a:t>Зачем</a:t>
+            </a:r>
+          </a:p>
+        </p:txBody>
+      </p:sp>
+      <p:sp>
+        <p:nvSpPr>
+          <p:cNvPr id="6" name="TextBox 5"/>
+          <p:cNvSpPr txBox="1"/>
+          <p:nvPr/>
+        </p:nvSpPr>
+        <p:spPr>
+          <a:xfrm>
+            <a:off x="4297680" y="1508760"/>
+            <a:ext cx="3566160" cy="2926080"/>
+          </a:xfrm>
+          <a:prstGeom prst="rect">
+            <a:avLst/>
+          </a:prstGeom>
+          <a:noFill/>
+        </p:spPr>
+        <p:txBody>
+          <a:bodyPr wrap="square">
+            <a:spAutoFit/>
+          </a:bodyPr>
+          <a:lstStyle/>
+          <a:p>
+            <a:pPr>
+              <a:spcAft>
+                <a:spcPts val="500"/>
+              </a:spcAft>
+              <a:defRPr sz="1300">
+                <a:solidFill>
+                  <a:srgbClr val="1F2328"/>
+                </a:solidFill>
+              </a:defRPr>
+            </a:pPr>
+            <a:r>
+              <a:t>• «Оцени качество» не работает; «есть ли X, покажи цитату» — работает (PR-Agent)</a:t>
+            </a:r>
+          </a:p>
+          <a:p>
+            <a:pPr>
+              <a:spcAft>
+                <a:spcPts val="500"/>
+              </a:spcAft>
+              <a:defRPr sz="1300">
+                <a:solidFill>
+                  <a:srgbClr val="1F2328"/>
+                </a:solidFill>
+              </a:defRPr>
+            </a:pPr>
+            <a:r>
+              <a:t>• Требования кейсодателя проверяются каждый раз, не по настроению модели</a:t>
+            </a:r>
+          </a:p>
+          <a:p>
+            <a:pPr>
+              <a:spcAft>
+                <a:spcPts val="500"/>
+              </a:spcAft>
+              <a:defRPr sz="1300">
+                <a:solidFill>
+                  <a:srgbClr val="1F2328"/>
+                </a:solidFill>
+              </a:defRPr>
+            </a:pPr>
+            <a:r>
+              <a:t>• NA убирает ложные пробелы: нет Kafka — вопрос о кластере Kafka не пробел</a:t>
+            </a:r>
+          </a:p>
+        </p:txBody>
+      </p:sp>
+      <p:sp>
+        <p:nvSpPr>
+          <p:cNvPr id="7" name="TextBox 6"/>
+          <p:cNvSpPr txBox="1"/>
+          <p:nvPr/>
+        </p:nvSpPr>
+        <p:spPr>
+          <a:xfrm>
+            <a:off x="8046720" y="1143000"/>
+            <a:ext cx="3566160" cy="365760"/>
+          </a:xfrm>
+          <a:prstGeom prst="rect">
+            <a:avLst/>
+          </a:prstGeom>
+          <a:noFill/>
+        </p:spPr>
+        <p:txBody>
+          <a:bodyPr wrap="none">
+            <a:spAutoFit/>
+          </a:bodyPr>
+          <a:lstStyle/>
+          <a:p>
+            <a:pPr>
+              <a:defRPr sz="1400" b="1">
+                <a:solidFill>
+                  <a:srgbClr val="2563EB"/>
+                </a:solidFill>
+              </a:defRPr>
+            </a:pPr>
+            <a:r>
+              <a:t>Чем доказано</a:t>
+            </a:r>
+          </a:p>
+        </p:txBody>
+      </p:sp>
+      <p:sp>
+        <p:nvSpPr>
+          <p:cNvPr id="8" name="TextBox 7"/>
+          <p:cNvSpPr txBox="1"/>
+          <p:nvPr/>
+        </p:nvSpPr>
+        <p:spPr>
+          <a:xfrm>
+            <a:off x="8046720" y="1508760"/>
+            <a:ext cx="3566160" cy="2926080"/>
+          </a:xfrm>
+          <a:prstGeom prst="rect">
+            <a:avLst/>
+          </a:prstGeom>
+          <a:noFill/>
+        </p:spPr>
+        <p:txBody>
+          <a:bodyPr wrap="square">
+            <a:spAutoFit/>
+          </a:bodyPr>
+          <a:lstStyle/>
+          <a:p>
+            <a:pPr>
+              <a:spcAft>
+                <a:spcPts val="500"/>
+              </a:spcAft>
+              <a:defRPr sz="1300">
+                <a:solidFill>
+                  <a:srgbClr val="1F2328"/>
+                </a:solidFill>
+              </a:defRPr>
+            </a:pPr>
+            <a:r>
+              <a:t>• EXP-13 → EXP-14: пункты МТС 3/7 → 7/7 после защиты от критика</a:t>
+            </a:r>
+          </a:p>
+          <a:p>
+            <a:pPr>
+              <a:spcAft>
+                <a:spcPts val="500"/>
+              </a:spcAft>
+              <a:defRPr sz="1300">
+                <a:solidFill>
+                  <a:srgbClr val="1F2328"/>
+                </a:solidFill>
+              </a:defRPr>
+            </a:pPr>
+            <a:r>
+              <a:t>• Схема ответа теряла OK-статусы (10/27 UNKNOWN) → 0 после фикса; зонды получили свои слоты</a:t>
+            </a:r>
+          </a:p>
+          <a:p>
+            <a:pPr>
+              <a:spcAft>
+                <a:spcPts val="500"/>
+              </a:spcAft>
+              <a:defRPr sz="1300">
+                <a:solidFill>
+                  <a:srgbClr val="1F2328"/>
+                </a:solidFill>
+              </a:defRPr>
+            </a:pPr>
+            <a:r>
+              <a:t>• EXP-16: NA — шум 120b 11 → 7 без потери пунктов</a:t>
+            </a:r>
+          </a:p>
+        </p:txBody>
+      </p:sp>
+      <p:sp>
+        <p:nvSpPr>
+          <p:cNvPr id="9" name="TextBox 8"/>
+          <p:cNvSpPr txBox="1"/>
+          <p:nvPr/>
+        </p:nvSpPr>
+        <p:spPr>
+          <a:xfrm>
+            <a:off x="548640" y="4526280"/>
+            <a:ext cx="11064240" cy="1600200"/>
+          </a:xfrm>
+          <a:prstGeom prst="rect">
+            <a:avLst/>
+          </a:prstGeom>
+          <a:noFill/>
+        </p:spPr>
+        <p:txBody>
+          <a:bodyPr wrap="square">
+            <a:spAutoFit/>
+          </a:bodyPr>
+          <a:lstStyle/>
+          <a:p>
+            <a:pPr>
+              <a:defRPr sz="1300" b="1">
+                <a:solidFill>
+                  <a:srgbClr val="2563EB"/>
+                </a:solidFill>
+              </a:defRPr>
+            </a:pPr>
+            <a:r>
+              <a:t>Пример находки на документах МТС</a:t>
+            </a:r>
+          </a:p>
+          <a:p>
+            <a:pPr>
+              <a:spcAft>
+                <a:spcPts val="300"/>
+              </a:spcAft>
+              <a:defRPr sz="1250">
+                <a:solidFill>
+                  <a:srgbClr val="1F2328"/>
+                </a:solidFill>
+              </a:defRPr>
+            </a:pPr>
+            <a:r>
+              <a:t>checklist:NUL-03 (doc3, high): в структуре витрины перечислены поля, типы и описания, но ни для одного поля не указан признак NOT NULL / NULLABLE (пункт МТС №3). Что уточнить: для каждого поля витрины — обязательность.</a:t>
+            </a:r>
+          </a:p>
+        </p:txBody>
+      </p:sp>
+    </p:spTree>
+  </p:cSld>
+  <p:clrMapOvr>
+    <a:masterClrMapping/>
+  </p:clrMapOvr>
+</p:sld>
+</file>
+
+<file path=ppt/slides/slide11.xml><?xml version="1.0" encoding="utf-8"?>
+<p:sld xmlns:a="http://schemas.openxmlformats.org/drawingml/2006/main" xmlns:p="http://schemas.openxmlformats.org/presentationml/2006/main" xmlns:r="http://schemas.openxmlformats.org/officeDocument/2006/relationships">
+  <p:cSld>
+    <p:spTree>
+      <p:nvGrpSpPr>
+        <p:cNvPr id="1" name=""/>
+        <p:cNvGrpSpPr/>
+        <p:nvPr/>
+      </p:nvGrpSpPr>
+      <p:grpSpPr/>
+      <p:sp>
+        <p:nvSpPr>
+          <p:cNvPr id="2" name="TextBox 1"/>
+          <p:cNvSpPr txBox="1"/>
+          <p:nvPr/>
+        </p:nvSpPr>
+        <p:spPr>
+          <a:xfrm>
+            <a:off x="548640" y="274320"/>
+            <a:ext cx="11155680" cy="822960"/>
+          </a:xfrm>
+          <a:prstGeom prst="rect">
+            <a:avLst/>
+          </a:prstGeom>
+          <a:noFill/>
+        </p:spPr>
+        <p:txBody>
+          <a:bodyPr wrap="none">
+            <a:spAutoFit/>
+          </a:bodyPr>
+          <a:lstStyle/>
+          <a:p>
+            <a:pPr>
+              <a:defRPr sz="2600" b="1">
+                <a:solidFill>
+                  <a:srgbClr val="1F2328"/>
+                </a:solidFill>
+              </a:defRPr>
+            </a:pPr>
+            <a:r>
+              <a:t>Этап 4. Согласованность разделов</a:t>
+            </a:r>
+          </a:p>
+        </p:txBody>
+      </p:sp>
+      <p:sp>
+        <p:nvSpPr>
+          <p:cNvPr id="3" name="TextBox 2"/>
+          <p:cNvSpPr txBox="1"/>
+          <p:nvPr/>
+        </p:nvSpPr>
+        <p:spPr>
+          <a:xfrm>
+            <a:off x="548640" y="1143000"/>
+            <a:ext cx="3566160" cy="365760"/>
+          </a:xfrm>
+          <a:prstGeom prst="rect">
+            <a:avLst/>
+          </a:prstGeom>
+          <a:noFill/>
+        </p:spPr>
+        <p:txBody>
+          <a:bodyPr wrap="none">
+            <a:spAutoFit/>
+          </a:bodyPr>
+          <a:lstStyle/>
+          <a:p>
+            <a:pPr>
+              <a:defRPr sz="1400" b="1">
+                <a:solidFill>
+                  <a:srgbClr val="2563EB"/>
+                </a:solidFill>
+              </a:defRPr>
+            </a:pPr>
+            <a:r>
+              <a:t>Что делает</a:t>
+            </a:r>
+          </a:p>
+        </p:txBody>
+      </p:sp>
+      <p:sp>
+        <p:nvSpPr>
+          <p:cNvPr id="4" name="TextBox 3"/>
+          <p:cNvSpPr txBox="1"/>
+          <p:nvPr/>
+        </p:nvSpPr>
+        <p:spPr>
+          <a:xfrm>
+            <a:off x="548640" y="1508760"/>
+            <a:ext cx="3566160" cy="2926080"/>
+          </a:xfrm>
+          <a:prstGeom prst="rect">
+            <a:avLst/>
+          </a:prstGeom>
+          <a:noFill/>
+        </p:spPr>
+        <p:txBody>
+          <a:bodyPr wrap="square">
+            <a:spAutoFit/>
+          </a:bodyPr>
+          <a:lstStyle/>
+          <a:p>
+            <a:pPr>
+              <a:spcAft>
+                <a:spcPts val="500"/>
+              </a:spcAft>
+              <a:defRPr sz="1300">
+                <a:solidFill>
+                  <a:srgbClr val="1F2328"/>
+                </a:solidFill>
+              </a:defRPr>
+            </a:pPr>
+            <a:r>
+              <a:t>• Межсекционная проверка: поле без источника, дрейф термина, противоречие разделов</a:t>
+            </a:r>
+          </a:p>
+          <a:p>
+            <a:pPr>
+              <a:spcAft>
+                <a:spcPts val="500"/>
+              </a:spcAft>
+              <a:defRPr sz="1300">
+                <a:solidFill>
+                  <a:srgbClr val="1F2328"/>
+                </a:solidFill>
+              </a:defRPr>
+            </a:pPr>
+            <a:r>
+              <a:t>• Смотрит на документ целиком, а не на слот</a:t>
+            </a:r>
+          </a:p>
+          <a:p>
+            <a:pPr>
+              <a:spcAft>
+                <a:spcPts val="500"/>
+              </a:spcAft>
+              <a:defRPr sz="1300">
+                <a:solidFill>
+                  <a:srgbClr val="1F2328"/>
+                </a:solidFill>
+              </a:defRPr>
+            </a:pPr>
+            <a:r>
+              <a:t>• Категории: doc:contradiction, doc:terminology, doc:completeness</a:t>
+            </a:r>
+          </a:p>
+        </p:txBody>
+      </p:sp>
+      <p:sp>
+        <p:nvSpPr>
+          <p:cNvPr id="5" name="TextBox 4"/>
+          <p:cNvSpPr txBox="1"/>
+          <p:nvPr/>
+        </p:nvSpPr>
+        <p:spPr>
+          <a:xfrm>
+            <a:off x="4297680" y="1143000"/>
+            <a:ext cx="3566160" cy="365760"/>
+          </a:xfrm>
+          <a:prstGeom prst="rect">
+            <a:avLst/>
+          </a:prstGeom>
+          <a:noFill/>
+        </p:spPr>
+        <p:txBody>
+          <a:bodyPr wrap="none">
+            <a:spAutoFit/>
+          </a:bodyPr>
+          <a:lstStyle/>
+          <a:p>
+            <a:pPr>
+              <a:defRPr sz="1400" b="1">
+                <a:solidFill>
+                  <a:srgbClr val="2563EB"/>
+                </a:solidFill>
+              </a:defRPr>
+            </a:pPr>
+            <a:r>
+              <a:t>Зачем</a:t>
+            </a:r>
+          </a:p>
+        </p:txBody>
+      </p:sp>
+      <p:sp>
+        <p:nvSpPr>
+          <p:cNvPr id="6" name="TextBox 5"/>
+          <p:cNvSpPr txBox="1"/>
+          <p:nvPr/>
+        </p:nvSpPr>
+        <p:spPr>
+          <a:xfrm>
+            <a:off x="4297680" y="1508760"/>
+            <a:ext cx="3566160" cy="2926080"/>
+          </a:xfrm>
+          <a:prstGeom prst="rect">
+            <a:avLst/>
+          </a:prstGeom>
+          <a:noFill/>
+        </p:spPr>
+        <p:txBody>
+          <a:bodyPr wrap="square">
+            <a:spAutoFit/>
+          </a:bodyPr>
+          <a:lstStyle/>
+          <a:p>
+            <a:pPr>
+              <a:spcAft>
+                <a:spcPts val="500"/>
+              </a:spcAft>
+              <a:defRPr sz="1300">
+                <a:solidFill>
+                  <a:srgbClr val="1F2328"/>
+                </a:solidFill>
+              </a:defRPr>
+            </a:pPr>
+            <a:r>
+              <a:t>• Противоречия — то, что хуже всего видит человек, читающий по разделам</a:t>
+            </a:r>
+          </a:p>
+          <a:p>
+            <a:pPr>
+              <a:spcAft>
+                <a:spcPts val="500"/>
+              </a:spcAft>
+              <a:defRPr sz="1300">
+                <a:solidFill>
+                  <a:srgbClr val="1F2328"/>
+                </a:solidFill>
+              </a:defRPr>
+            </a:pPr>
+            <a:r>
+              <a:t>• Чеклист слот за слотом их не найдёт: каждый раздел по отдельности «в порядке»</a:t>
+            </a:r>
+          </a:p>
+          <a:p>
+            <a:pPr>
+              <a:spcAft>
+                <a:spcPts val="500"/>
+              </a:spcAft>
+              <a:defRPr sz="1300">
+                <a:solidFill>
+                  <a:srgbClr val="1F2328"/>
+                </a:solidFill>
+              </a:defRPr>
+            </a:pPr>
+            <a:r>
+              <a:t>• Класс D в голде МТС — 15 дефектов из 69</a:t>
+            </a:r>
+          </a:p>
+        </p:txBody>
+      </p:sp>
+      <p:sp>
+        <p:nvSpPr>
+          <p:cNvPr id="7" name="TextBox 6"/>
+          <p:cNvSpPr txBox="1"/>
+          <p:nvPr/>
+        </p:nvSpPr>
+        <p:spPr>
+          <a:xfrm>
+            <a:off x="8046720" y="1143000"/>
+            <a:ext cx="3566160" cy="365760"/>
+          </a:xfrm>
+          <a:prstGeom prst="rect">
+            <a:avLst/>
+          </a:prstGeom>
+          <a:noFill/>
+        </p:spPr>
+        <p:txBody>
+          <a:bodyPr wrap="none">
+            <a:spAutoFit/>
+          </a:bodyPr>
+          <a:lstStyle/>
+          <a:p>
+            <a:pPr>
+              <a:defRPr sz="1400" b="1">
+                <a:solidFill>
+                  <a:srgbClr val="2563EB"/>
+                </a:solidFill>
+              </a:defRPr>
+            </a:pPr>
+            <a:r>
+              <a:t>Чем доказано</a:t>
+            </a:r>
+          </a:p>
+        </p:txBody>
+      </p:sp>
+      <p:sp>
+        <p:nvSpPr>
+          <p:cNvPr id="8" name="TextBox 7"/>
+          <p:cNvSpPr txBox="1"/>
+          <p:nvPr/>
+        </p:nvSpPr>
+        <p:spPr>
+          <a:xfrm>
+            <a:off x="8046720" y="1508760"/>
+            <a:ext cx="3566160" cy="2926080"/>
+          </a:xfrm>
+          <a:prstGeom prst="rect">
+            <a:avLst/>
+          </a:prstGeom>
+          <a:noFill/>
+        </p:spPr>
+        <p:txBody>
+          <a:bodyPr wrap="square">
+            <a:spAutoFit/>
+          </a:bodyPr>
+          <a:lstStyle/>
+          <a:p>
+            <a:pPr>
+              <a:spcAft>
+                <a:spcPts val="500"/>
+              </a:spcAft>
+              <a:defRPr sz="1300">
+                <a:solidFill>
+                  <a:srgbClr val="1F2328"/>
+                </a:solidFill>
+              </a:defRPr>
+            </a:pPr>
+            <a:r>
+              <a:t>• EXP-14: D-класс 10/11 у v2e, 14/15 в EXP-13 у v2g</a:t>
+            </a:r>
+          </a:p>
+          <a:p>
+            <a:pPr>
+              <a:spcAft>
+                <a:spcPts val="500"/>
+              </a:spcAft>
+              <a:defRPr sz="1300">
+                <a:solidFill>
+                  <a:srgbClr val="1F2328"/>
+                </a:solidFill>
+              </a:defRPr>
+            </a:pPr>
+            <a:r>
+              <a:t>• Ловит G3-1 (инкремент vs полная перезагрузка), G1-1 (задержка &lt;1 мин vs ≈0 сек)</a:t>
+            </a:r>
+          </a:p>
+          <a:p>
+            <a:pPr>
+              <a:spcAft>
+                <a:spcPts val="500"/>
+              </a:spcAft>
+              <a:defRPr sz="1300">
+                <a:solidFill>
+                  <a:srgbClr val="1F2328"/>
+                </a:solidFill>
+              </a:defRPr>
+            </a:pPr>
+            <a:r>
+              <a:t>• Уникальный вклад в EXP-10: G2-5 (часы vs минуты в сдвигах поясов)</a:t>
+            </a:r>
+          </a:p>
+        </p:txBody>
+      </p:sp>
+      <p:sp>
+        <p:nvSpPr>
+          <p:cNvPr id="9" name="TextBox 8"/>
+          <p:cNvSpPr txBox="1"/>
+          <p:nvPr/>
+        </p:nvSpPr>
+        <p:spPr>
+          <a:xfrm>
+            <a:off x="548640" y="4526280"/>
+            <a:ext cx="11064240" cy="1600200"/>
+          </a:xfrm>
+          <a:prstGeom prst="rect">
+            <a:avLst/>
+          </a:prstGeom>
+          <a:noFill/>
+        </p:spPr>
+        <p:txBody>
+          <a:bodyPr wrap="square">
+            <a:spAutoFit/>
+          </a:bodyPr>
+          <a:lstStyle/>
+          <a:p>
+            <a:pPr>
+              <a:defRPr sz="1300" b="1">
+                <a:solidFill>
+                  <a:srgbClr val="2563EB"/>
+                </a:solidFill>
+              </a:defRPr>
+            </a:pPr>
+            <a:r>
+              <a:t>Пример находки на документах МТС</a:t>
+            </a:r>
+          </a:p>
+          <a:p>
+            <a:pPr>
+              <a:spcAft>
+                <a:spcPts val="300"/>
+              </a:spcAft>
+              <a:defRPr sz="1250">
+                <a:solidFill>
+                  <a:srgbClr val="1F2328"/>
+                </a:solidFill>
+              </a:defRPr>
+            </a:pPr>
+            <a:r>
+              <a:t>doc:contradiction (doc3, critical): «Способ загрузки: Инкремент», а в требованиях к агрегату «Обновление: только полная перезагрузка месяца (без upsert)». Что уточнить: инкремент или полная перезапись партиции?</a:t>
+            </a:r>
+          </a:p>
+        </p:txBody>
+      </p:sp>
+    </p:spTree>
+  </p:cSld>
+  <p:clrMapOvr>
+    <a:masterClrMapping/>
+  </p:clrMapOvr>
+</p:sld>
+</file>
+
+<file path=ppt/slides/slide12.xml><?xml version="1.0" encoding="utf-8"?>
+<p:sld xmlns:a="http://schemas.openxmlformats.org/drawingml/2006/main" xmlns:p="http://schemas.openxmlformats.org/presentationml/2006/main" xmlns:r="http://schemas.openxmlformats.org/officeDocument/2006/relationships">
+  <p:cSld>
+    <p:spTree>
+      <p:nvGrpSpPr>
+        <p:cNvPr id="1" name=""/>
+        <p:cNvGrpSpPr/>
+        <p:nvPr/>
+      </p:nvGrpSpPr>
+      <p:grpSpPr/>
+      <p:sp>
+        <p:nvSpPr>
+          <p:cNvPr id="2" name="TextBox 1"/>
+          <p:cNvSpPr txBox="1"/>
+          <p:nvPr/>
+        </p:nvSpPr>
+        <p:spPr>
+          <a:xfrm>
+            <a:off x="548640" y="274320"/>
+            <a:ext cx="11155680" cy="822960"/>
+          </a:xfrm>
+          <a:prstGeom prst="rect">
+            <a:avLst/>
+          </a:prstGeom>
+          <a:noFill/>
+        </p:spPr>
+        <p:txBody>
+          <a:bodyPr wrap="none">
+            <a:spAutoFit/>
+          </a:bodyPr>
+          <a:lstStyle/>
+          <a:p>
+            <a:pPr>
+              <a:defRPr sz="2600" b="1">
+                <a:solidFill>
+                  <a:srgbClr val="1F2328"/>
+                </a:solidFill>
+              </a:defRPr>
+            </a:pPr>
+            <a:r>
+              <a:t>Этап 5. Взгляд разработчика</a:t>
+            </a:r>
+          </a:p>
+        </p:txBody>
+      </p:sp>
+      <p:sp>
+        <p:nvSpPr>
+          <p:cNvPr id="3" name="TextBox 2"/>
+          <p:cNvSpPr txBox="1"/>
+          <p:nvPr/>
+        </p:nvSpPr>
+        <p:spPr>
+          <a:xfrm>
+            <a:off x="548640" y="1143000"/>
+            <a:ext cx="3566160" cy="365760"/>
+          </a:xfrm>
+          <a:prstGeom prst="rect">
+            <a:avLst/>
+          </a:prstGeom>
+          <a:noFill/>
+        </p:spPr>
+        <p:txBody>
+          <a:bodyPr wrap="none">
+            <a:spAutoFit/>
+          </a:bodyPr>
+          <a:lstStyle/>
+          <a:p>
+            <a:pPr>
+              <a:defRPr sz="1400" b="1">
+                <a:solidFill>
+                  <a:srgbClr val="2563EB"/>
+                </a:solidFill>
+              </a:defRPr>
+            </a:pPr>
+            <a:r>
+              <a:t>Что делает</a:t>
+            </a:r>
+          </a:p>
+        </p:txBody>
+      </p:sp>
+      <p:sp>
+        <p:nvSpPr>
+          <p:cNvPr id="4" name="TextBox 3"/>
+          <p:cNvSpPr txBox="1"/>
+          <p:nvPr/>
+        </p:nvSpPr>
+        <p:spPr>
+          <a:xfrm>
+            <a:off x="548640" y="1508760"/>
+            <a:ext cx="3566160" cy="2926080"/>
+          </a:xfrm>
+          <a:prstGeom prst="rect">
+            <a:avLst/>
+          </a:prstGeom>
+          <a:noFill/>
+        </p:spPr>
+        <p:txBody>
+          <a:bodyPr wrap="square">
+            <a:spAutoFit/>
+          </a:bodyPr>
+          <a:lstStyle/>
+          <a:p>
+            <a:pPr>
+              <a:spcAft>
+                <a:spcPts val="500"/>
+              </a:spcAft>
+              <a:defRPr sz="1300">
+                <a:solidFill>
+                  <a:srgbClr val="1F2328"/>
+                </a:solidFill>
+              </a:defRPr>
+            </a:pPr>
+            <a:r>
+              <a:t>• Персона: «ты должен начать реализацию сегодня — где придётся угадывать?»</a:t>
+            </a:r>
+          </a:p>
+          <a:p>
+            <a:pPr>
+              <a:spcAft>
+                <a:spcPts val="500"/>
+              </a:spcAft>
+              <a:defRPr sz="1300">
+                <a:solidFill>
+                  <a:srgbClr val="1F2328"/>
+                </a:solidFill>
+              </a:defRPr>
+            </a:pPr>
+            <a:r>
+              <a:t>• Вопросы, блокирующие код, с ценой ошибки (why); максимум 8, без общих советов</a:t>
+            </a:r>
+          </a:p>
+          <a:p>
+            <a:pPr>
+              <a:spcAft>
+                <a:spcPts val="500"/>
+              </a:spcAft>
+              <a:defRPr sz="1300">
+                <a:solidFill>
+                  <a:srgbClr val="1F2328"/>
+                </a:solidFill>
+              </a:defRPr>
+            </a:pPr>
+            <a:r>
+              <a:t>• Запрещены вопросы о настоящих именах заглушек</a:t>
+            </a:r>
+          </a:p>
+        </p:txBody>
+      </p:sp>
+      <p:sp>
+        <p:nvSpPr>
+          <p:cNvPr id="5" name="TextBox 4"/>
+          <p:cNvSpPr txBox="1"/>
+          <p:nvPr/>
+        </p:nvSpPr>
+        <p:spPr>
+          <a:xfrm>
+            <a:off x="4297680" y="1143000"/>
+            <a:ext cx="3566160" cy="365760"/>
+          </a:xfrm>
+          <a:prstGeom prst="rect">
+            <a:avLst/>
+          </a:prstGeom>
+          <a:noFill/>
+        </p:spPr>
+        <p:txBody>
+          <a:bodyPr wrap="none">
+            <a:spAutoFit/>
+          </a:bodyPr>
+          <a:lstStyle/>
+          <a:p>
+            <a:pPr>
+              <a:defRPr sz="1400" b="1">
+                <a:solidFill>
+                  <a:srgbClr val="2563EB"/>
+                </a:solidFill>
+              </a:defRPr>
+            </a:pPr>
+            <a:r>
+              <a:t>Зачем</a:t>
+            </a:r>
+          </a:p>
+        </p:txBody>
+      </p:sp>
+      <p:sp>
+        <p:nvSpPr>
+          <p:cNvPr id="6" name="TextBox 5"/>
+          <p:cNvSpPr txBox="1"/>
+          <p:nvPr/>
+        </p:nvSpPr>
+        <p:spPr>
+          <a:xfrm>
+            <a:off x="4297680" y="1508760"/>
+            <a:ext cx="3566160" cy="2926080"/>
+          </a:xfrm>
+          <a:prstGeom prst="rect">
+            <a:avLst/>
+          </a:prstGeom>
+          <a:noFill/>
+        </p:spPr>
+        <p:txBody>
+          <a:bodyPr wrap="square">
+            <a:spAutoFit/>
+          </a:bodyPr>
+          <a:lstStyle/>
+          <a:p>
+            <a:pPr>
+              <a:spcAft>
+                <a:spcPts val="500"/>
+              </a:spcAft>
+              <a:defRPr sz="1300">
+                <a:solidFill>
+                  <a:srgbClr val="1F2328"/>
+                </a:solidFill>
+              </a:defRPr>
+            </a:pPr>
+            <a:r>
+              <a:t>• Это ровно та ситуация, которую кейс называет болью: разработчик угадывает</a:t>
+            </a:r>
+          </a:p>
+          <a:p>
+            <a:pPr>
+              <a:spcAft>
+                <a:spcPts val="500"/>
+              </a:spcAft>
+              <a:defRPr sz="1300">
+                <a:solidFill>
+                  <a:srgbClr val="1F2328"/>
+                </a:solidFill>
+              </a:defRPr>
+            </a:pPr>
+            <a:r>
+              <a:t>• Даёт дефекты вне рубрики — краевые случаи логики (A3, B9), которых нет в чеклисте</a:t>
+            </a:r>
+          </a:p>
+          <a:p>
+            <a:pPr>
+              <a:spcAft>
+                <a:spcPts val="500"/>
+              </a:spcAft>
+              <a:defRPr sz="1300">
+                <a:solidFill>
+                  <a:srgbClr val="1F2328"/>
+                </a:solidFill>
+              </a:defRPr>
+            </a:pPr>
+            <a:r>
+              <a:t>• Формулирует вопрос так, как его задали бы аналитику</a:t>
+            </a:r>
+          </a:p>
+        </p:txBody>
+      </p:sp>
+      <p:sp>
+        <p:nvSpPr>
+          <p:cNvPr id="7" name="TextBox 6"/>
+          <p:cNvSpPr txBox="1"/>
+          <p:nvPr/>
+        </p:nvSpPr>
+        <p:spPr>
+          <a:xfrm>
+            <a:off x="8046720" y="1143000"/>
+            <a:ext cx="3566160" cy="365760"/>
+          </a:xfrm>
+          <a:prstGeom prst="rect">
+            <a:avLst/>
+          </a:prstGeom>
+          <a:noFill/>
+        </p:spPr>
+        <p:txBody>
+          <a:bodyPr wrap="none">
+            <a:spAutoFit/>
+          </a:bodyPr>
+          <a:lstStyle/>
+          <a:p>
+            <a:pPr>
+              <a:defRPr sz="1400" b="1">
+                <a:solidFill>
+                  <a:srgbClr val="2563EB"/>
+                </a:solidFill>
+              </a:defRPr>
+            </a:pPr>
+            <a:r>
+              <a:t>Чем доказано</a:t>
+            </a:r>
+          </a:p>
+        </p:txBody>
+      </p:sp>
+      <p:sp>
+        <p:nvSpPr>
+          <p:cNvPr id="8" name="TextBox 7"/>
+          <p:cNvSpPr txBox="1"/>
+          <p:nvPr/>
+        </p:nvSpPr>
+        <p:spPr>
+          <a:xfrm>
+            <a:off x="8046720" y="1508760"/>
+            <a:ext cx="3566160" cy="2926080"/>
+          </a:xfrm>
+          <a:prstGeom prst="rect">
+            <a:avLst/>
+          </a:prstGeom>
+          <a:noFill/>
+        </p:spPr>
+        <p:txBody>
+          <a:bodyPr wrap="square">
+            <a:spAutoFit/>
+          </a:bodyPr>
+          <a:lstStyle/>
+          <a:p>
+            <a:pPr>
+              <a:spcAft>
+                <a:spcPts val="500"/>
+              </a:spcAft>
+              <a:defRPr sz="1300">
+                <a:solidFill>
+                  <a:srgbClr val="1F2328"/>
+                </a:solidFill>
+              </a:defRPr>
+            </a:pPr>
+            <a:r>
+              <a:t>• Уникальные находки класса A3/B9 на doc3: TAC не найден → vendor?, «последний по времени» — по какому полю</a:t>
+            </a:r>
+          </a:p>
+          <a:p>
+            <a:pPr>
+              <a:spcAft>
+                <a:spcPts val="500"/>
+              </a:spcAft>
+              <a:defRPr sz="1300">
+                <a:solidFill>
+                  <a:srgbClr val="1F2328"/>
+                </a:solidFill>
+              </a:defRPr>
+            </a:pPr>
+            <a:r>
+              <a:t>• EXP-02: без таксономии и правила обезличивания — generic-каша (шум 17)</a:t>
+            </a:r>
+          </a:p>
+          <a:p>
+            <a:pPr>
+              <a:spcAft>
+                <a:spcPts val="500"/>
+              </a:spcAft>
+              <a:defRPr sz="1300">
+                <a:solidFill>
+                  <a:srgbClr val="1F2328"/>
+                </a:solidFill>
+              </a:defRPr>
+            </a:pPr>
+            <a:r>
+              <a:t>• EXP-16: правило заглушек убрало «как называется столбец FIELD_IMSI»</a:t>
+            </a:r>
+          </a:p>
+        </p:txBody>
+      </p:sp>
+      <p:sp>
+        <p:nvSpPr>
+          <p:cNvPr id="9" name="TextBox 8"/>
+          <p:cNvSpPr txBox="1"/>
+          <p:nvPr/>
+        </p:nvSpPr>
+        <p:spPr>
+          <a:xfrm>
+            <a:off x="548640" y="4526280"/>
+            <a:ext cx="11064240" cy="1600200"/>
+          </a:xfrm>
+          <a:prstGeom prst="rect">
+            <a:avLst/>
+          </a:prstGeom>
+          <a:noFill/>
+        </p:spPr>
+        <p:txBody>
+          <a:bodyPr wrap="square">
+            <a:spAutoFit/>
+          </a:bodyPr>
+          <a:lstStyle/>
+          <a:p>
+            <a:pPr>
+              <a:defRPr sz="1300" b="1">
+                <a:solidFill>
+                  <a:srgbClr val="2563EB"/>
+                </a:solidFill>
+              </a:defRPr>
+            </a:pPr>
+            <a:r>
+              <a:t>Пример находки на документах МТС</a:t>
+            </a:r>
+          </a:p>
+          <a:p>
+            <a:pPr>
+              <a:spcAft>
+                <a:spcPts val="300"/>
+              </a:spcAft>
+              <a:defRPr sz="1250">
+                <a:solidFill>
+                  <a:srgbClr val="1F2328"/>
+                </a:solidFill>
+              </a:defRPr>
+            </a:pPr>
+            <a:r>
+              <a:t>dev_question (doc3, medium, score 5): «substring(imei,1,8) = tac → vendor_name». Что делать, если полученный TAC отсутствует в TABLE_DEVICE_REF: NULL, «UNKNOWN» или иной fallback? Неправильный выбор исказит агрегат и контроль качества.</a:t>
+            </a:r>
+          </a:p>
+        </p:txBody>
+      </p:sp>
+    </p:spTree>
+  </p:cSld>
+  <p:clrMapOvr>
+    <a:masterClrMapping/>
+  </p:clrMapOvr>
+</p:sld>
+</file>
+
+<file path=ppt/slides/slide13.xml><?xml version="1.0" encoding="utf-8"?>
+<p:sld xmlns:a="http://schemas.openxmlformats.org/drawingml/2006/main" xmlns:p="http://schemas.openxmlformats.org/presentationml/2006/main" xmlns:r="http://schemas.openxmlformats.org/officeDocument/2006/relationships">
+  <p:cSld>
+    <p:spTree>
+      <p:nvGrpSpPr>
+        <p:cNvPr id="1" name=""/>
+        <p:cNvGrpSpPr/>
+        <p:nvPr/>
+      </p:nvGrpSpPr>
+      <p:grpSpPr/>
+      <p:sp>
+        <p:nvSpPr>
+          <p:cNvPr id="2" name="TextBox 1"/>
+          <p:cNvSpPr txBox="1"/>
+          <p:nvPr/>
+        </p:nvSpPr>
+        <p:spPr>
+          <a:xfrm>
+            <a:off x="548640" y="274320"/>
+            <a:ext cx="11155680" cy="822960"/>
+          </a:xfrm>
+          <a:prstGeom prst="rect">
+            <a:avLst/>
+          </a:prstGeom>
+          <a:noFill/>
+        </p:spPr>
+        <p:txBody>
+          <a:bodyPr wrap="none">
+            <a:spAutoFit/>
+          </a:bodyPr>
+          <a:lstStyle/>
+          <a:p>
+            <a:pPr>
+              <a:defRPr sz="2600" b="1">
+                <a:solidFill>
+                  <a:srgbClr val="1F2328"/>
+                </a:solidFill>
+              </a:defRPr>
+            </a:pPr>
+            <a:r>
+              <a:t>Этап 6. Неоднозначность как число: энтропия и логит-зонд</a:t>
+            </a:r>
+          </a:p>
+        </p:txBody>
+      </p:sp>
+      <p:sp>
+        <p:nvSpPr>
+          <p:cNvPr id="3" name="TextBox 2"/>
+          <p:cNvSpPr txBox="1"/>
+          <p:nvPr/>
+        </p:nvSpPr>
+        <p:spPr>
+          <a:xfrm>
+            <a:off x="548640" y="1143000"/>
+            <a:ext cx="3566160" cy="365760"/>
+          </a:xfrm>
+          <a:prstGeom prst="rect">
+            <a:avLst/>
+          </a:prstGeom>
+          <a:noFill/>
+        </p:spPr>
+        <p:txBody>
+          <a:bodyPr wrap="none">
+            <a:spAutoFit/>
+          </a:bodyPr>
+          <a:lstStyle/>
+          <a:p>
+            <a:pPr>
+              <a:defRPr sz="1400" b="1">
+                <a:solidFill>
+                  <a:srgbClr val="2563EB"/>
+                </a:solidFill>
+              </a:defRPr>
+            </a:pPr>
+            <a:r>
+              <a:t>Что делает</a:t>
+            </a:r>
+          </a:p>
+        </p:txBody>
+      </p:sp>
+      <p:sp>
+        <p:nvSpPr>
+          <p:cNvPr id="4" name="TextBox 3"/>
+          <p:cNvSpPr txBox="1"/>
+          <p:nvPr/>
+        </p:nvSpPr>
+        <p:spPr>
+          <a:xfrm>
+            <a:off x="548640" y="1508760"/>
+            <a:ext cx="3566160" cy="2926080"/>
+          </a:xfrm>
+          <a:prstGeom prst="rect">
+            <a:avLst/>
+          </a:prstGeom>
+          <a:noFill/>
+        </p:spPr>
+        <p:txBody>
+          <a:bodyPr wrap="square">
+            <a:spAutoFit/>
+          </a:bodyPr>
+          <a:lstStyle/>
+          <a:p>
+            <a:pPr>
+              <a:spcAft>
+                <a:spcPts val="500"/>
+              </a:spcAft>
+              <a:defRPr sz="1300">
+                <a:solidFill>
+                  <a:srgbClr val="1F2328"/>
+                </a:solidFill>
+              </a:defRPr>
+            </a:pPr>
+            <a:r>
+              <a:t>• Слоты со статусом OK перечитываются: 5 сэмплов с температурой → кластеры ответов → энтропия (v2e)</a:t>
+            </a:r>
+          </a:p>
+          <a:p>
+            <a:pPr>
+              <a:spcAft>
+                <a:spcPts val="500"/>
+              </a:spcAft>
+              <a:defRPr sz="1300">
+                <a:solidFill>
+                  <a:srgbClr val="1F2328"/>
+                </a:solidFill>
+              </a:defRPr>
+            </a:pPr>
+            <a:r>
+              <a:t>• Или один вызов на слот: P(YES)/P(NO) из top-logprobs, бинарная энтропия (v2l, H10)</a:t>
+            </a:r>
+          </a:p>
+          <a:p>
+            <a:pPr>
+              <a:spcAft>
+                <a:spcPts val="500"/>
+              </a:spcAft>
+              <a:defRPr sz="1300">
+                <a:solidFill>
+                  <a:srgbClr val="1F2328"/>
+                </a:solidFill>
+              </a:defRPr>
+            </a:pPr>
+            <a:r>
+              <a:t>• Расходятся ответы = документ читается по-разному</a:t>
+            </a:r>
+          </a:p>
+        </p:txBody>
+      </p:sp>
+      <p:sp>
+        <p:nvSpPr>
+          <p:cNvPr id="5" name="TextBox 4"/>
+          <p:cNvSpPr txBox="1"/>
+          <p:nvPr/>
+        </p:nvSpPr>
+        <p:spPr>
+          <a:xfrm>
+            <a:off x="4297680" y="1143000"/>
+            <a:ext cx="3566160" cy="365760"/>
+          </a:xfrm>
+          <a:prstGeom prst="rect">
+            <a:avLst/>
+          </a:prstGeom>
+          <a:noFill/>
+        </p:spPr>
+        <p:txBody>
+          <a:bodyPr wrap="none">
+            <a:spAutoFit/>
+          </a:bodyPr>
+          <a:lstStyle/>
+          <a:p>
+            <a:pPr>
+              <a:defRPr sz="1400" b="1">
+                <a:solidFill>
+                  <a:srgbClr val="2563EB"/>
+                </a:solidFill>
+              </a:defRPr>
+            </a:pPr>
+            <a:r>
+              <a:t>Зачем</a:t>
+            </a:r>
+          </a:p>
+        </p:txBody>
+      </p:sp>
+      <p:sp>
+        <p:nvSpPr>
+          <p:cNvPr id="6" name="TextBox 5"/>
+          <p:cNvSpPr txBox="1"/>
+          <p:nvPr/>
+        </p:nvSpPr>
+        <p:spPr>
+          <a:xfrm>
+            <a:off x="4297680" y="1508760"/>
+            <a:ext cx="3566160" cy="2926080"/>
+          </a:xfrm>
+          <a:prstGeom prst="rect">
+            <a:avLst/>
+          </a:prstGeom>
+          <a:noFill/>
+        </p:spPr>
+        <p:txBody>
+          <a:bodyPr wrap="square">
+            <a:spAutoFit/>
+          </a:bodyPr>
+          <a:lstStyle/>
+          <a:p>
+            <a:pPr>
+              <a:spcAft>
+                <a:spcPts val="500"/>
+              </a:spcAft>
+              <a:defRPr sz="1300">
+                <a:solidFill>
+                  <a:srgbClr val="1F2328"/>
+                </a:solidFill>
+              </a:defRPr>
+            </a:pPr>
+            <a:r>
+              <a:t>• Чеклист говорит «есть», а два разработчика прочитают по-разному — это класс B</a:t>
+            </a:r>
+          </a:p>
+          <a:p>
+            <a:pPr>
+              <a:spcAft>
+                <a:spcPts val="500"/>
+              </a:spcAft>
+              <a:defRPr sz="1300">
+                <a:solidFill>
+                  <a:srgbClr val="1F2328"/>
+                </a:solidFill>
+              </a:defRPr>
+            </a:pPr>
+            <a:r>
+              <a:t>• Измерение вместо мнения: порог калибруется по голду, воспроизводимо</a:t>
+            </a:r>
+          </a:p>
+          <a:p>
+            <a:pPr>
+              <a:spcAft>
+                <a:spcPts val="500"/>
+              </a:spcAft>
+              <a:defRPr sz="1300">
+                <a:solidFill>
+                  <a:srgbClr val="1F2328"/>
+                </a:solidFill>
+              </a:defRPr>
+            </a:pPr>
+            <a:r>
+              <a:t>• Логиты в 10 раз дешевле сэмплирования и детерминированы</a:t>
+            </a:r>
+          </a:p>
+        </p:txBody>
+      </p:sp>
+      <p:sp>
+        <p:nvSpPr>
+          <p:cNvPr id="7" name="TextBox 6"/>
+          <p:cNvSpPr txBox="1"/>
+          <p:nvPr/>
+        </p:nvSpPr>
+        <p:spPr>
+          <a:xfrm>
+            <a:off x="8046720" y="1143000"/>
+            <a:ext cx="3566160" cy="365760"/>
+          </a:xfrm>
+          <a:prstGeom prst="rect">
+            <a:avLst/>
+          </a:prstGeom>
+          <a:noFill/>
+        </p:spPr>
+        <p:txBody>
+          <a:bodyPr wrap="none">
+            <a:spAutoFit/>
+          </a:bodyPr>
+          <a:lstStyle/>
+          <a:p>
+            <a:pPr>
+              <a:defRPr sz="1400" b="1">
+                <a:solidFill>
+                  <a:srgbClr val="2563EB"/>
+                </a:solidFill>
+              </a:defRPr>
+            </a:pPr>
+            <a:r>
+              <a:t>Чем доказано</a:t>
+            </a:r>
+          </a:p>
+        </p:txBody>
+      </p:sp>
+      <p:sp>
+        <p:nvSpPr>
+          <p:cNvPr id="8" name="TextBox 7"/>
+          <p:cNvSpPr txBox="1"/>
+          <p:nvPr/>
+        </p:nvSpPr>
+        <p:spPr>
+          <a:xfrm>
+            <a:off x="8046720" y="1508760"/>
+            <a:ext cx="3566160" cy="2926080"/>
+          </a:xfrm>
+          <a:prstGeom prst="rect">
+            <a:avLst/>
+          </a:prstGeom>
+          <a:noFill/>
+        </p:spPr>
+        <p:txBody>
+          <a:bodyPr wrap="square">
+            <a:spAutoFit/>
+          </a:bodyPr>
+          <a:lstStyle/>
+          <a:p>
+            <a:pPr>
+              <a:spcAft>
+                <a:spcPts val="500"/>
+              </a:spcAft>
+              <a:defRPr sz="1300">
+                <a:solidFill>
+                  <a:srgbClr val="1F2328"/>
+                </a:solidFill>
+              </a:defRPr>
+            </a:pPr>
+            <a:r>
+              <a:t>• EXP-09: doc3 7/13 → 11/13 (+4) при шуме 10 → 7</a:t>
+            </a:r>
+          </a:p>
+          <a:p>
+            <a:pPr>
+              <a:spcAft>
+                <a:spcPts val="500"/>
+              </a:spcAft>
+              <a:defRPr sz="1300">
+                <a:solidFill>
+                  <a:srgbClr val="1F2328"/>
+                </a:solidFill>
+              </a:defRPr>
+            </a:pPr>
+            <a:r>
+              <a:t>• EXP-13/14: логит-зонд единственный ловил анафору «Он определяется…»; B-класс 9/9</a:t>
+            </a:r>
+          </a:p>
+          <a:p>
+            <a:pPr>
+              <a:spcAft>
+                <a:spcPts val="500"/>
+              </a:spcAft>
+              <a:defRPr sz="1300">
+                <a:solidFill>
+                  <a:srgbClr val="1F2328"/>
+                </a:solidFill>
+              </a:defRPr>
+            </a:pPr>
+            <a:r>
+              <a:t>• EXP-14: v2e и v2l — doc3 16/16, anchoring 96–100%</a:t>
+            </a:r>
+          </a:p>
+        </p:txBody>
+      </p:sp>
+      <p:sp>
+        <p:nvSpPr>
+          <p:cNvPr id="9" name="TextBox 8"/>
+          <p:cNvSpPr txBox="1"/>
+          <p:nvPr/>
+        </p:nvSpPr>
+        <p:spPr>
+          <a:xfrm>
+            <a:off x="548640" y="4526280"/>
+            <a:ext cx="11064240" cy="1600200"/>
+          </a:xfrm>
+          <a:prstGeom prst="rect">
+            <a:avLst/>
+          </a:prstGeom>
+          <a:noFill/>
+        </p:spPr>
+        <p:txBody>
+          <a:bodyPr wrap="square">
+            <a:spAutoFit/>
+          </a:bodyPr>
+          <a:lstStyle/>
+          <a:p>
+            <a:pPr>
+              <a:defRPr sz="1300" b="1">
+                <a:solidFill>
+                  <a:srgbClr val="2563EB"/>
+                </a:solidFill>
+              </a:defRPr>
+            </a:pPr>
+            <a:r>
+              <a:t>Пример находки на документах МТС</a:t>
+            </a:r>
+          </a:p>
+          <a:p>
+            <a:pPr>
+              <a:spcAft>
+                <a:spcPts val="300"/>
+              </a:spcAft>
+              <a:defRPr sz="1250">
+                <a:solidFill>
+                  <a:srgbClr val="1F2328"/>
+                </a:solidFill>
+              </a:defRPr>
+            </a:pPr>
+            <a:r>
+              <a:t>uncertainty (doc3): слот SLA-01 «расписание задано?» — чеклист ответил OK по «Ежемесячно (1 раз в месяц)», сэмплы разошлись (время запуска? какой DAG?) → находка G3-9: нет времени запуска и SLA, оркестрация не описана.</a:t>
+            </a:r>
+          </a:p>
+        </p:txBody>
+      </p:sp>
+      <p:sp>
+        <p:nvSpPr>
+          <p:cNvPr id="10" name="TextBox 9"/>
+          <p:cNvSpPr txBox="1"/>
+          <p:nvPr/>
+        </p:nvSpPr>
+        <p:spPr>
+          <a:xfrm>
+            <a:off x="548640" y="6263640"/>
+            <a:ext cx="11155680" cy="457200"/>
+          </a:xfrm>
+          <a:prstGeom prst="rect">
+            <a:avLst/>
+          </a:prstGeom>
+          <a:noFill/>
+        </p:spPr>
+        <p:txBody>
+          <a:bodyPr wrap="square">
+            <a:spAutoFit/>
+          </a:bodyPr>
+          <a:lstStyle/>
+          <a:p>
+            <a:pPr>
+              <a:defRPr sz="1100">
+                <a:solidFill>
+                  <a:srgbClr val="6B7280"/>
+                </a:solidFill>
+              </a:defRPr>
+            </a:pPr>
+            <a:r>
+              <a:t>Требует logprobs у модели: GPT-4.1 / vLLM — да, ollama — нет → план: vLLM для gpt-oss-120b.</a:t>
+            </a:r>
+          </a:p>
+        </p:txBody>
+      </p:sp>
+    </p:spTree>
+  </p:cSld>
+  <p:clrMapOvr>
+    <a:masterClrMapping/>
+  </p:clrMapOvr>
+</p:sld>
+</file>
+
+<file path=ppt/slides/slide14.xml><?xml version="1.0" encoding="utf-8"?>
+<p:sld xmlns:a="http://schemas.openxmlformats.org/drawingml/2006/main" xmlns:p="http://schemas.openxmlformats.org/presentationml/2006/main" xmlns:r="http://schemas.openxmlformats.org/officeDocument/2006/relationships">
+  <p:cSld>
+    <p:spTree>
+      <p:nvGrpSpPr>
+        <p:cNvPr id="1" name=""/>
+        <p:cNvGrpSpPr/>
+        <p:nvPr/>
+      </p:nvGrpSpPr>
+      <p:grpSpPr/>
+      <p:sp>
+        <p:nvSpPr>
+          <p:cNvPr id="2" name="TextBox 1"/>
+          <p:cNvSpPr txBox="1"/>
+          <p:nvPr/>
+        </p:nvSpPr>
+        <p:spPr>
+          <a:xfrm>
+            <a:off x="548640" y="274320"/>
+            <a:ext cx="11155680" cy="822960"/>
+          </a:xfrm>
+          <a:prstGeom prst="rect">
+            <a:avLst/>
+          </a:prstGeom>
+          <a:noFill/>
+        </p:spPr>
+        <p:txBody>
+          <a:bodyPr wrap="none">
+            <a:spAutoFit/>
+          </a:bodyPr>
+          <a:lstStyle/>
+          <a:p>
+            <a:pPr>
+              <a:defRPr sz="2600" b="1">
+                <a:solidFill>
+                  <a:srgbClr val="1F2328"/>
+                </a:solidFill>
+              </a:defRPr>
+            </a:pPr>
+            <a:r>
+              <a:t>Этап 7. Верификация цитат</a:t>
+            </a:r>
+          </a:p>
+        </p:txBody>
+      </p:sp>
+      <p:sp>
+        <p:nvSpPr>
+          <p:cNvPr id="3" name="TextBox 2"/>
+          <p:cNvSpPr txBox="1"/>
+          <p:nvPr/>
+        </p:nvSpPr>
+        <p:spPr>
+          <a:xfrm>
+            <a:off x="548640" y="1143000"/>
+            <a:ext cx="3566160" cy="365760"/>
+          </a:xfrm>
+          <a:prstGeom prst="rect">
+            <a:avLst/>
+          </a:prstGeom>
+          <a:noFill/>
+        </p:spPr>
+        <p:txBody>
+          <a:bodyPr wrap="none">
+            <a:spAutoFit/>
+          </a:bodyPr>
+          <a:lstStyle/>
+          <a:p>
+            <a:pPr>
+              <a:defRPr sz="1400" b="1">
+                <a:solidFill>
+                  <a:srgbClr val="2563EB"/>
+                </a:solidFill>
+              </a:defRPr>
+            </a:pPr>
+            <a:r>
+              <a:t>Что делает</a:t>
+            </a:r>
+          </a:p>
+        </p:txBody>
+      </p:sp>
+      <p:sp>
+        <p:nvSpPr>
+          <p:cNvPr id="4" name="TextBox 3"/>
+          <p:cNvSpPr txBox="1"/>
+          <p:nvPr/>
+        </p:nvSpPr>
+        <p:spPr>
+          <a:xfrm>
+            <a:off x="548640" y="1508760"/>
+            <a:ext cx="3566160" cy="2926080"/>
+          </a:xfrm>
+          <a:prstGeom prst="rect">
+            <a:avLst/>
+          </a:prstGeom>
+          <a:noFill/>
+        </p:spPr>
+        <p:txBody>
+          <a:bodyPr wrap="square">
+            <a:spAutoFit/>
+          </a:bodyPr>
+          <a:lstStyle/>
+          <a:p>
+            <a:pPr>
+              <a:spcAft>
+                <a:spcPts val="500"/>
+              </a:spcAft>
+              <a:defRPr sz="1300">
+                <a:solidFill>
+                  <a:srgbClr val="1F2328"/>
+                </a:solidFill>
+              </a:defRPr>
+            </a:pPr>
+            <a:r>
+              <a:t>• Цитата обязана быть подстрокой документа (после нормализации); не нашлась — находка отбрасывается</a:t>
+            </a:r>
+          </a:p>
+          <a:p>
+            <a:pPr>
+              <a:spcAft>
+                <a:spcPts val="500"/>
+              </a:spcAft>
+              <a:defRPr sz="1300">
+                <a:solidFill>
+                  <a:srgbClr val="1F2328"/>
+                </a:solidFill>
+              </a:defRPr>
+            </a:pPr>
+            <a:r>
+              <a:t>• Нашлась в другом разделе — переанкоривается</a:t>
+            </a:r>
+          </a:p>
+          <a:p>
+            <a:pPr>
+              <a:spcAft>
+                <a:spcPts val="500"/>
+              </a:spcAft>
+              <a:defRPr sz="1300">
+                <a:solidFill>
+                  <a:srgbClr val="1F2328"/>
+                </a:solidFill>
+              </a:defRPr>
+            </a:pPr>
+            <a:r>
+              <a:t>• Вторая ступень для табличных цитат без «|» и с другими переносами</a:t>
+            </a:r>
+          </a:p>
+        </p:txBody>
+      </p:sp>
+      <p:sp>
+        <p:nvSpPr>
+          <p:cNvPr id="5" name="TextBox 4"/>
+          <p:cNvSpPr txBox="1"/>
+          <p:nvPr/>
+        </p:nvSpPr>
+        <p:spPr>
+          <a:xfrm>
+            <a:off x="4297680" y="1143000"/>
+            <a:ext cx="3566160" cy="365760"/>
+          </a:xfrm>
+          <a:prstGeom prst="rect">
+            <a:avLst/>
+          </a:prstGeom>
+          <a:noFill/>
+        </p:spPr>
+        <p:txBody>
+          <a:bodyPr wrap="none">
+            <a:spAutoFit/>
+          </a:bodyPr>
+          <a:lstStyle/>
+          <a:p>
+            <a:pPr>
+              <a:defRPr sz="1400" b="1">
+                <a:solidFill>
+                  <a:srgbClr val="2563EB"/>
+                </a:solidFill>
+              </a:defRPr>
+            </a:pPr>
+            <a:r>
+              <a:t>Зачем</a:t>
+            </a:r>
+          </a:p>
+        </p:txBody>
+      </p:sp>
+      <p:sp>
+        <p:nvSpPr>
+          <p:cNvPr id="6" name="TextBox 5"/>
+          <p:cNvSpPr txBox="1"/>
+          <p:nvPr/>
+        </p:nvSpPr>
+        <p:spPr>
+          <a:xfrm>
+            <a:off x="4297680" y="1508760"/>
+            <a:ext cx="3566160" cy="2926080"/>
+          </a:xfrm>
+          <a:prstGeom prst="rect">
+            <a:avLst/>
+          </a:prstGeom>
+          <a:noFill/>
+        </p:spPr>
+        <p:txBody>
+          <a:bodyPr wrap="square">
+            <a:spAutoFit/>
+          </a:bodyPr>
+          <a:lstStyle/>
+          <a:p>
+            <a:pPr>
+              <a:spcAft>
+                <a:spcPts val="500"/>
+              </a:spcAft>
+              <a:defRPr sz="1300">
+                <a:solidFill>
+                  <a:srgbClr val="1F2328"/>
+                </a:solidFill>
+              </a:defRPr>
+            </a:pPr>
+            <a:r>
+              <a:t>• Галлюцинированная цитата — главный способ потерять доверие аналитика</a:t>
+            </a:r>
+          </a:p>
+          <a:p>
+            <a:pPr>
+              <a:spcAft>
+                <a:spcPts val="500"/>
+              </a:spcAft>
+              <a:defRPr sz="1300">
+                <a:solidFill>
+                  <a:srgbClr val="1F2328"/>
+                </a:solidFill>
+              </a:defRPr>
+            </a:pPr>
+            <a:r>
+              <a:t>• Даёт метрику anchoring: доля находок, которым можно верить дословно</a:t>
+            </a:r>
+          </a:p>
+          <a:p>
+            <a:pPr>
+              <a:spcAft>
+                <a:spcPts val="500"/>
+              </a:spcAft>
+              <a:defRPr sz="1300">
+                <a:solidFill>
+                  <a:srgbClr val="1F2328"/>
+                </a:solidFill>
+              </a:defRPr>
+            </a:pPr>
+            <a:r>
+              <a:t>• Единственная защита, когда модель деградирует на длинных документах</a:t>
+            </a:r>
+          </a:p>
+        </p:txBody>
+      </p:sp>
+      <p:sp>
+        <p:nvSpPr>
+          <p:cNvPr id="7" name="TextBox 6"/>
+          <p:cNvSpPr txBox="1"/>
+          <p:nvPr/>
+        </p:nvSpPr>
+        <p:spPr>
+          <a:xfrm>
+            <a:off x="8046720" y="1143000"/>
+            <a:ext cx="3566160" cy="365760"/>
+          </a:xfrm>
+          <a:prstGeom prst="rect">
+            <a:avLst/>
+          </a:prstGeom>
+          <a:noFill/>
+        </p:spPr>
+        <p:txBody>
+          <a:bodyPr wrap="none">
+            <a:spAutoFit/>
+          </a:bodyPr>
+          <a:lstStyle/>
+          <a:p>
+            <a:pPr>
+              <a:defRPr sz="1400" b="1">
+                <a:solidFill>
+                  <a:srgbClr val="2563EB"/>
+                </a:solidFill>
+              </a:defRPr>
+            </a:pPr>
+            <a:r>
+              <a:t>Чем доказано</a:t>
+            </a:r>
+          </a:p>
+        </p:txBody>
+      </p:sp>
+      <p:sp>
+        <p:nvSpPr>
+          <p:cNvPr id="8" name="TextBox 7"/>
+          <p:cNvSpPr txBox="1"/>
+          <p:nvPr/>
+        </p:nvSpPr>
+        <p:spPr>
+          <a:xfrm>
+            <a:off x="8046720" y="1508760"/>
+            <a:ext cx="3566160" cy="2926080"/>
+          </a:xfrm>
+          <a:prstGeom prst="rect">
+            <a:avLst/>
+          </a:prstGeom>
+          <a:noFill/>
+        </p:spPr>
+        <p:txBody>
+          <a:bodyPr wrap="square">
+            <a:spAutoFit/>
+          </a:bodyPr>
+          <a:lstStyle/>
+          <a:p>
+            <a:pPr>
+              <a:spcAft>
+                <a:spcPts val="500"/>
+              </a:spcAft>
+              <a:defRPr sz="1300">
+                <a:solidFill>
+                  <a:srgbClr val="1F2328"/>
+                </a:solidFill>
+              </a:defRPr>
+            </a:pPr>
+            <a:r>
+              <a:t>• EXP-03: на 28k символов anchoring 100% → 47% — verify срезал галлюцинации</a:t>
+            </a:r>
+          </a:p>
+          <a:p>
+            <a:pPr>
+              <a:spcAft>
+                <a:spcPts val="500"/>
+              </a:spcAft>
+              <a:defRPr sz="1300">
+                <a:solidFill>
+                  <a:srgbClr val="1F2328"/>
+                </a:solidFill>
+              </a:defRPr>
+            </a:pPr>
+            <a:r>
+              <a:t>• EXP-13: 5 из 21 находок отброшены из-за табличных цитат → вторая ступень</a:t>
+            </a:r>
+          </a:p>
+          <a:p>
+            <a:pPr>
+              <a:spcAft>
+                <a:spcPts val="500"/>
+              </a:spcAft>
+              <a:defRPr sz="1300">
+                <a:solidFill>
+                  <a:srgbClr val="1F2328"/>
+                </a:solidFill>
+              </a:defRPr>
+            </a:pPr>
+            <a:r>
+              <a:t>• EXP-14: anchoring 96–100% у прод-вариантов на doc3</a:t>
+            </a:r>
+          </a:p>
+        </p:txBody>
+      </p:sp>
+      <p:sp>
+        <p:nvSpPr>
+          <p:cNvPr id="9" name="TextBox 8"/>
+          <p:cNvSpPr txBox="1"/>
+          <p:nvPr/>
+        </p:nvSpPr>
+        <p:spPr>
+          <a:xfrm>
+            <a:off x="548640" y="4526280"/>
+            <a:ext cx="11064240" cy="1600200"/>
+          </a:xfrm>
+          <a:prstGeom prst="rect">
+            <a:avLst/>
+          </a:prstGeom>
+          <a:noFill/>
+        </p:spPr>
+        <p:txBody>
+          <a:bodyPr wrap="square">
+            <a:spAutoFit/>
+          </a:bodyPr>
+          <a:lstStyle/>
+          <a:p>
+            <a:pPr>
+              <a:defRPr sz="1300" b="1">
+                <a:solidFill>
+                  <a:srgbClr val="2563EB"/>
+                </a:solidFill>
+              </a:defRPr>
+            </a:pPr>
+            <a:r>
+              <a:t>Пример находки на документах МТС</a:t>
+            </a:r>
+          </a:p>
+          <a:p>
+            <a:pPr>
+              <a:spcAft>
+                <a:spcPts val="300"/>
+              </a:spcAft>
+              <a:defRPr sz="1250">
+                <a:solidFill>
+                  <a:srgbClr val="1F2328"/>
+                </a:solidFill>
+              </a:defRPr>
+            </a:pPr>
+            <a:r>
+              <a:t>dropped (doc3 v2, 120b): «FIELD_USERS_CNT является результатом агрегирования… включать его в группировку противоречит SQL» — цитата не найдена в документе → находка не показана аналитику (в отчёте видна как «отброшено верификацией»).</a:t>
+            </a:r>
+          </a:p>
+        </p:txBody>
+      </p:sp>
+    </p:spTree>
+  </p:cSld>
+  <p:clrMapOvr>
+    <a:masterClrMapping/>
+  </p:clrMapOvr>
+</p:sld>
+</file>
+
+<file path=ppt/slides/slide15.xml><?xml version="1.0" encoding="utf-8"?>
+<p:sld xmlns:a="http://schemas.openxmlformats.org/drawingml/2006/main" xmlns:p="http://schemas.openxmlformats.org/presentationml/2006/main" xmlns:r="http://schemas.openxmlformats.org/officeDocument/2006/relationships">
+  <p:cSld>
+    <p:spTree>
+      <p:nvGrpSpPr>
+        <p:cNvPr id="1" name=""/>
+        <p:cNvGrpSpPr/>
+        <p:nvPr/>
+      </p:nvGrpSpPr>
+      <p:grpSpPr/>
+      <p:sp>
+        <p:nvSpPr>
+          <p:cNvPr id="2" name="TextBox 1"/>
+          <p:cNvSpPr txBox="1"/>
+          <p:nvPr/>
+        </p:nvSpPr>
+        <p:spPr>
+          <a:xfrm>
+            <a:off x="548640" y="274320"/>
+            <a:ext cx="11155680" cy="822960"/>
+          </a:xfrm>
+          <a:prstGeom prst="rect">
+            <a:avLst/>
+          </a:prstGeom>
+          <a:noFill/>
+        </p:spPr>
+        <p:txBody>
+          <a:bodyPr wrap="none">
+            <a:spAutoFit/>
+          </a:bodyPr>
+          <a:lstStyle/>
+          <a:p>
+            <a:pPr>
+              <a:defRPr sz="2600" b="1">
+                <a:solidFill>
+                  <a:srgbClr val="1F2328"/>
+                </a:solidFill>
+              </a:defRPr>
+            </a:pPr>
+            <a:r>
+              <a:t>Этап 8. Критик</a:t>
+            </a:r>
+          </a:p>
+        </p:txBody>
+      </p:sp>
+      <p:sp>
+        <p:nvSpPr>
+          <p:cNvPr id="3" name="TextBox 2"/>
+          <p:cNvSpPr txBox="1"/>
+          <p:nvPr/>
+        </p:nvSpPr>
+        <p:spPr>
+          <a:xfrm>
+            <a:off x="548640" y="1143000"/>
+            <a:ext cx="3566160" cy="365760"/>
+          </a:xfrm>
+          <a:prstGeom prst="rect">
+            <a:avLst/>
+          </a:prstGeom>
+          <a:noFill/>
+        </p:spPr>
+        <p:txBody>
+          <a:bodyPr wrap="none">
+            <a:spAutoFit/>
+          </a:bodyPr>
+          <a:lstStyle/>
+          <a:p>
+            <a:pPr>
+              <a:defRPr sz="1400" b="1">
+                <a:solidFill>
+                  <a:srgbClr val="2563EB"/>
+                </a:solidFill>
+              </a:defRPr>
+            </a:pPr>
+            <a:r>
+              <a:t>Что делает</a:t>
+            </a:r>
+          </a:p>
+        </p:txBody>
+      </p:sp>
+      <p:sp>
+        <p:nvSpPr>
+          <p:cNvPr id="4" name="TextBox 3"/>
+          <p:cNvSpPr txBox="1"/>
+          <p:nvPr/>
+        </p:nvSpPr>
+        <p:spPr>
+          <a:xfrm>
+            <a:off x="548640" y="1508760"/>
+            <a:ext cx="3566160" cy="2926080"/>
+          </a:xfrm>
+          <a:prstGeom prst="rect">
+            <a:avLst/>
+          </a:prstGeom>
+          <a:noFill/>
+        </p:spPr>
+        <p:txBody>
+          <a:bodyPr wrap="square">
+            <a:spAutoFit/>
+          </a:bodyPr>
+          <a:lstStyle/>
+          <a:p>
+            <a:pPr>
+              <a:spcAft>
+                <a:spcPts val="500"/>
+              </a:spcAft>
+              <a:defRPr sz="1300">
+                <a:solidFill>
+                  <a:srgbClr val="1F2328"/>
+                </a:solidFill>
+              </a:defRPr>
+            </a:pPr>
+            <a:r>
+              <a:t>• Судья видит все находки разом (Greptile), ставит score 0–10 сравнительно, группирует дубли</a:t>
+            </a:r>
+          </a:p>
+          <a:p>
+            <a:pPr>
+              <a:spcAft>
+                <a:spcPts val="500"/>
+              </a:spcAft>
+              <a:defRPr sz="1300">
+                <a:solidFill>
+                  <a:srgbClr val="1F2328"/>
+                </a:solidFill>
+              </a:defRPr>
+            </a:pPr>
+            <a:r>
+              <a:t>• Порог θ=4 по свипу; официальные пункты МТС и детерминированные проходы порогу не подлежат</a:t>
+            </a:r>
+          </a:p>
+          <a:p>
+            <a:pPr>
+              <a:spcAft>
+                <a:spcPts val="500"/>
+              </a:spcAft>
+              <a:defRPr sz="1300">
+                <a:solidFill>
+                  <a:srgbClr val="1F2328"/>
+                </a:solidFill>
+              </a:defRPr>
+            </a:pPr>
+            <a:r>
+              <a:t>• Score 0 за вопросы о настоящих именах заглушек и за «информация уже есть в документе»</a:t>
+            </a:r>
+          </a:p>
+        </p:txBody>
+      </p:sp>
+      <p:sp>
+        <p:nvSpPr>
+          <p:cNvPr id="5" name="TextBox 4"/>
+          <p:cNvSpPr txBox="1"/>
+          <p:nvPr/>
+        </p:nvSpPr>
+        <p:spPr>
+          <a:xfrm>
+            <a:off x="4297680" y="1143000"/>
+            <a:ext cx="3566160" cy="365760"/>
+          </a:xfrm>
+          <a:prstGeom prst="rect">
+            <a:avLst/>
+          </a:prstGeom>
+          <a:noFill/>
+        </p:spPr>
+        <p:txBody>
+          <a:bodyPr wrap="none">
+            <a:spAutoFit/>
+          </a:bodyPr>
+          <a:lstStyle/>
+          <a:p>
+            <a:pPr>
+              <a:defRPr sz="1400" b="1">
+                <a:solidFill>
+                  <a:srgbClr val="2563EB"/>
+                </a:solidFill>
+              </a:defRPr>
+            </a:pPr>
+            <a:r>
+              <a:t>Зачем</a:t>
+            </a:r>
+          </a:p>
+        </p:txBody>
+      </p:sp>
+      <p:sp>
+        <p:nvSpPr>
+          <p:cNvPr id="6" name="TextBox 5"/>
+          <p:cNvSpPr txBox="1"/>
+          <p:nvPr/>
+        </p:nvSpPr>
+        <p:spPr>
+          <a:xfrm>
+            <a:off x="4297680" y="1508760"/>
+            <a:ext cx="3566160" cy="2926080"/>
+          </a:xfrm>
+          <a:prstGeom prst="rect">
+            <a:avLst/>
+          </a:prstGeom>
+          <a:noFill/>
+        </p:spPr>
+        <p:txBody>
+          <a:bodyPr wrap="square">
+            <a:spAutoFit/>
+          </a:bodyPr>
+          <a:lstStyle/>
+          <a:p>
+            <a:pPr>
+              <a:spcAft>
+                <a:spcPts val="500"/>
+              </a:spcAft>
+              <a:defRPr sz="1300">
+                <a:solidFill>
+                  <a:srgbClr val="1F2328"/>
+                </a:solidFill>
+              </a:defRPr>
+            </a:pPr>
+            <a:r>
+              <a:t>• Генерация даёт кандидатов, фильтрация — ответственность отдельного шага</a:t>
+            </a:r>
+          </a:p>
+          <a:p>
+            <a:pPr>
+              <a:spcAft>
+                <a:spcPts val="500"/>
+              </a:spcAft>
+              <a:defRPr sz="1300">
+                <a:solidFill>
+                  <a:srgbClr val="1F2328"/>
+                </a:solidFill>
+              </a:defRPr>
+            </a:pPr>
+            <a:r>
+              <a:t>• Аналитику нужны 5 точных находок, а не 15 «на всякий случай»</a:t>
+            </a:r>
+          </a:p>
+          <a:p>
+            <a:pPr>
+              <a:spcAft>
+                <a:spcPts val="500"/>
+              </a:spcAft>
+              <a:defRPr sz="1300">
+                <a:solidFill>
+                  <a:srgbClr val="1F2328"/>
+                </a:solidFill>
+              </a:defRPr>
+            </a:pPr>
+            <a:r>
+              <a:t>• Но фильтр не вправе спорить с требованиями кейсодателя</a:t>
+            </a:r>
+          </a:p>
+        </p:txBody>
+      </p:sp>
+      <p:sp>
+        <p:nvSpPr>
+          <p:cNvPr id="7" name="TextBox 6"/>
+          <p:cNvSpPr txBox="1"/>
+          <p:nvPr/>
+        </p:nvSpPr>
+        <p:spPr>
+          <a:xfrm>
+            <a:off x="8046720" y="1143000"/>
+            <a:ext cx="3566160" cy="365760"/>
+          </a:xfrm>
+          <a:prstGeom prst="rect">
+            <a:avLst/>
+          </a:prstGeom>
+          <a:noFill/>
+        </p:spPr>
+        <p:txBody>
+          <a:bodyPr wrap="none">
+            <a:spAutoFit/>
+          </a:bodyPr>
+          <a:lstStyle/>
+          <a:p>
+            <a:pPr>
+              <a:defRPr sz="1400" b="1">
+                <a:solidFill>
+                  <a:srgbClr val="2563EB"/>
+                </a:solidFill>
+              </a:defRPr>
+            </a:pPr>
+            <a:r>
+              <a:t>Чем доказано</a:t>
+            </a:r>
+          </a:p>
+        </p:txBody>
+      </p:sp>
+      <p:sp>
+        <p:nvSpPr>
+          <p:cNvPr id="8" name="TextBox 7"/>
+          <p:cNvSpPr txBox="1"/>
+          <p:nvPr/>
+        </p:nvSpPr>
+        <p:spPr>
+          <a:xfrm>
+            <a:off x="8046720" y="1508760"/>
+            <a:ext cx="3566160" cy="2926080"/>
+          </a:xfrm>
+          <a:prstGeom prst="rect">
+            <a:avLst/>
+          </a:prstGeom>
+          <a:noFill/>
+        </p:spPr>
+        <p:txBody>
+          <a:bodyPr wrap="square">
+            <a:spAutoFit/>
+          </a:bodyPr>
+          <a:lstStyle/>
+          <a:p>
+            <a:pPr>
+              <a:spcAft>
+                <a:spcPts val="500"/>
+              </a:spcAft>
+              <a:defRPr sz="1300">
+                <a:solidFill>
+                  <a:srgbClr val="1F2328"/>
+                </a:solidFill>
+              </a:defRPr>
+            </a:pPr>
+            <a:r>
+              <a:t>• EXP-07: θ=4 — хвост находок −40% (60 → 36), recall doc3 12/13 держится</a:t>
+            </a:r>
+          </a:p>
+          <a:p>
+            <a:pPr>
+              <a:spcAft>
+                <a:spcPts val="500"/>
+              </a:spcAft>
+              <a:defRPr sz="1300">
+                <a:solidFill>
+                  <a:srgbClr val="1F2328"/>
+                </a:solidFill>
+              </a:defRPr>
+            </a:pPr>
+            <a:r>
+              <a:t>• EXP-13: критик ставил 0.0 верным MISSING по Data Catalog, Kafka, фильтрам → защита слотов</a:t>
+            </a:r>
+          </a:p>
+          <a:p>
+            <a:pPr>
+              <a:spcAft>
+                <a:spcPts val="500"/>
+              </a:spcAft>
+              <a:defRPr sz="1300">
+                <a:solidFill>
+                  <a:srgbClr val="1F2328"/>
+                </a:solidFill>
+              </a:defRPr>
+            </a:pPr>
+            <a:r>
+              <a:t>• EXP-14: пункты МТС 3/7 → 7/7; шум 9 → 7 у v2e/v2l</a:t>
+            </a:r>
+          </a:p>
+        </p:txBody>
+      </p:sp>
+      <p:sp>
+        <p:nvSpPr>
+          <p:cNvPr id="9" name="TextBox 8"/>
+          <p:cNvSpPr txBox="1"/>
+          <p:nvPr/>
+        </p:nvSpPr>
+        <p:spPr>
+          <a:xfrm>
+            <a:off x="548640" y="4526280"/>
+            <a:ext cx="11064240" cy="1600200"/>
+          </a:xfrm>
+          <a:prstGeom prst="rect">
+            <a:avLst/>
+          </a:prstGeom>
+          <a:noFill/>
+        </p:spPr>
+        <p:txBody>
+          <a:bodyPr wrap="square">
+            <a:spAutoFit/>
+          </a:bodyPr>
+          <a:lstStyle/>
+          <a:p>
+            <a:pPr>
+              <a:defRPr sz="1300" b="1">
+                <a:solidFill>
+                  <a:srgbClr val="2563EB"/>
+                </a:solidFill>
+              </a:defRPr>
+            </a:pPr>
+            <a:r>
+              <a:t>Пример находки на документах МТС</a:t>
+            </a:r>
+          </a:p>
+          <a:p>
+            <a:pPr>
+              <a:spcAft>
+                <a:spcPts val="300"/>
+              </a:spcAft>
+              <a:defRPr sz="1250">
+                <a:solidFill>
+                  <a:srgbClr val="1F2328"/>
+                </a:solidFill>
+              </a:defRPr>
+            </a:pPr>
+            <a:r>
+              <a:t>rejected (doc3, 120b): checklist:INC-01 score 0 — «нет механизма инкремента», при том что документ явно описывает полную перезапись партиции; критик убрал ложный пробел. Из 25 кандидатов в отчёт прошло 16.</a:t>
+            </a:r>
+          </a:p>
+        </p:txBody>
+      </p:sp>
+    </p:spTree>
+  </p:cSld>
+  <p:clrMapOvr>
+    <a:masterClrMapping/>
+  </p:clrMapOvr>
+</p:sld>
+</file>
+
+<file path=ppt/slides/slide16.xml><?xml version="1.0" encoding="utf-8"?>
+<p:sld xmlns:a="http://schemas.openxmlformats.org/drawingml/2006/main" xmlns:p="http://schemas.openxmlformats.org/presentationml/2006/main" xmlns:r="http://schemas.openxmlformats.org/officeDocument/2006/relationships">
+  <p:cSld>
+    <p:spTree>
+      <p:nvGrpSpPr>
+        <p:cNvPr id="1" name=""/>
+        <p:cNvGrpSpPr/>
+        <p:nvPr/>
+      </p:nvGrpSpPr>
+      <p:grpSpPr/>
+      <p:sp>
+        <p:nvSpPr>
+          <p:cNvPr id="2" name="TextBox 1"/>
+          <p:cNvSpPr txBox="1"/>
+          <p:nvPr/>
+        </p:nvSpPr>
+        <p:spPr>
+          <a:xfrm>
+            <a:off x="548640" y="274320"/>
+            <a:ext cx="11155680" cy="822960"/>
+          </a:xfrm>
+          <a:prstGeom prst="rect">
+            <a:avLst/>
+          </a:prstGeom>
+          <a:noFill/>
+        </p:spPr>
+        <p:txBody>
+          <a:bodyPr wrap="none">
+            <a:spAutoFit/>
+          </a:bodyPr>
+          <a:lstStyle/>
+          <a:p>
+            <a:pPr>
+              <a:defRPr sz="2600" b="1">
+                <a:solidFill>
+                  <a:srgbClr val="1F2328"/>
+                </a:solidFill>
+              </a:defRPr>
+            </a:pPr>
+            <a:r>
+              <a:t>Результаты: recall по размеченным дефектам</a:t>
+            </a:r>
+          </a:p>
+        </p:txBody>
+      </p:sp>
+      <p:pic>
+        <p:nvPicPr>
+          <p:cNvPr id="3" name="Picture 2" descr="recall.png"/>
+          <p:cNvPicPr>
+            <a:picLocks noChangeAspect="1"/>
+          </p:cNvPicPr>
+          <p:nvPr/>
+        </p:nvPicPr>
+        <p:blipFill>
+          <a:blip r:embed="rId2"/>
+          <a:stretch>
+            <a:fillRect/>
+          </a:stretch>
+        </p:blipFill>
+        <p:spPr>
+          <a:xfrm>
+            <a:off x="335127" y="1097280"/>
+            <a:ext cx="11521440" cy="3397649"/>
+          </a:xfrm>
+          <a:prstGeom prst="rect">
+            <a:avLst/>
+          </a:prstGeom>
+        </p:spPr>
+      </p:pic>
+      <p:sp>
+        <p:nvSpPr>
+          <p:cNvPr id="4" name="TextBox 3"/>
+          <p:cNvSpPr txBox="1"/>
+          <p:nvPr/>
+        </p:nvSpPr>
+        <p:spPr>
+          <a:xfrm>
+            <a:off x="548640" y="6263640"/>
+            <a:ext cx="11155680" cy="457200"/>
+          </a:xfrm>
+          <a:prstGeom prst="rect">
+            <a:avLst/>
+          </a:prstGeom>
+          <a:noFill/>
+        </p:spPr>
+        <p:txBody>
+          <a:bodyPr wrap="square">
+            <a:spAutoFit/>
+          </a:bodyPr>
+          <a:lstStyle/>
+          <a:p>
+            <a:pPr>
+              <a:defRPr sz="1100">
+                <a:solidFill>
+                  <a:srgbClr val="6B7280"/>
+                </a:solidFill>
+              </a:defRPr>
+            </a:pPr>
+            <a:r>
+              <a:t>Промпт слеп к шаблону и промахивает лёгкое; конвейер закрывает все 8 пунктов МТС; зонды неоднозначности дают 16/16 на целевом документе. Разброс GPT между прогонами ±2 → числа как диапазон, консенсус двух прогонов.</a:t>
+            </a:r>
+          </a:p>
+        </p:txBody>
+      </p:sp>
+    </p:spTree>
+  </p:cSld>
+  <p:clrMapOvr>
+    <a:masterClrMapping/>
+  </p:clrMapOvr>
+</p:sld>
+</file>
+
+<file path=ppt/slides/slide17.xml><?xml version="1.0" encoding="utf-8"?>
+<p:sld xmlns:a="http://schemas.openxmlformats.org/drawingml/2006/main" xmlns:p="http://schemas.openxmlformats.org/presentationml/2006/main" xmlns:r="http://schemas.openxmlformats.org/officeDocument/2006/relationships">
+  <p:cSld>
+    <p:spTree>
+      <p:nvGrpSpPr>
+        <p:cNvPr id="1" name=""/>
+        <p:cNvGrpSpPr/>
+        <p:nvPr/>
+      </p:nvGrpSpPr>
+      <p:grpSpPr/>
+      <p:sp>
+        <p:nvSpPr>
+          <p:cNvPr id="2" name="TextBox 1"/>
+          <p:cNvSpPr txBox="1"/>
+          <p:nvPr/>
+        </p:nvSpPr>
+        <p:spPr>
+          <a:xfrm>
+            <a:off x="548640" y="274320"/>
+            <a:ext cx="11155680" cy="822960"/>
+          </a:xfrm>
+          <a:prstGeom prst="rect">
+            <a:avLst/>
+          </a:prstGeom>
+          <a:noFill/>
+        </p:spPr>
+        <p:txBody>
+          <a:bodyPr wrap="none">
+            <a:spAutoFit/>
+          </a:bodyPr>
+          <a:lstStyle/>
+          <a:p>
+            <a:pPr>
+              <a:defRPr sz="2600" b="1">
+                <a:solidFill>
+                  <a:srgbClr val="1F2328"/>
+                </a:solidFill>
+              </a:defRPr>
+            </a:pPr>
+            <a:r>
+              <a:t>Шум и порог критика</a:t>
+            </a:r>
+          </a:p>
+        </p:txBody>
+      </p:sp>
+      <p:pic>
+        <p:nvPicPr>
+          <p:cNvPr id="3" name="Picture 2" descr="noise.png"/>
+          <p:cNvPicPr>
+            <a:picLocks noChangeAspect="1"/>
+          </p:cNvPicPr>
+          <p:nvPr/>
+        </p:nvPicPr>
+        <p:blipFill>
+          <a:blip r:embed="rId2"/>
+          <a:stretch>
+            <a:fillRect/>
+          </a:stretch>
+        </p:blipFill>
+        <p:spPr>
+          <a:xfrm>
+            <a:off x="335127" y="1097280"/>
+            <a:ext cx="11521440" cy="3180583"/>
+          </a:xfrm>
+          <a:prstGeom prst="rect">
+            <a:avLst/>
+          </a:prstGeom>
+        </p:spPr>
+      </p:pic>
+      <p:sp>
+        <p:nvSpPr>
+          <p:cNvPr id="4" name="TextBox 3"/>
+          <p:cNvSpPr txBox="1"/>
+          <p:nvPr/>
+        </p:nvSpPr>
+        <p:spPr>
+          <a:xfrm>
+            <a:off x="548640" y="6263640"/>
+            <a:ext cx="11155680" cy="457200"/>
+          </a:xfrm>
+          <a:prstGeom prst="rect">
+            <a:avLst/>
+          </a:prstGeom>
+          <a:noFill/>
+        </p:spPr>
+        <p:txBody>
+          <a:bodyPr wrap="square">
+            <a:spAutoFit/>
+          </a:bodyPr>
+          <a:lstStyle/>
+          <a:p>
+            <a:pPr>
+              <a:defRPr sz="1100">
+                <a:solidFill>
+                  <a:srgbClr val="6B7280"/>
+                </a:solidFill>
+              </a:defRPr>
+            </a:pPr>
+            <a:r>
+              <a:t>Шум порогом не лечится (EXP-07): при θ=6 recall doc3 падает 12 → 8. Лечится правилами: обезличивание (−40%), «не применимо» (11 → 7 на 120b), запрет вопросов о заглушках. Трижды «шум» на чистой синтетике оказывался реальными дефектами базы → правило: читать сырые выводы глазами.</a:t>
+            </a:r>
+          </a:p>
+        </p:txBody>
+      </p:sp>
+    </p:spTree>
+  </p:cSld>
+  <p:clrMapOvr>
+    <a:masterClrMapping/>
+  </p:clrMapOvr>
+</p:sld>
+</file>
+
+<file path=ppt/slides/slide18.xml><?xml version="1.0" encoding="utf-8"?>
+<p:sld xmlns:a="http://schemas.openxmlformats.org/drawingml/2006/main" xmlns:p="http://schemas.openxmlformats.org/presentationml/2006/main" xmlns:r="http://schemas.openxmlformats.org/officeDocument/2006/relationships">
+  <p:cSld>
+    <p:spTree>
+      <p:nvGrpSpPr>
+        <p:cNvPr id="1" name=""/>
+        <p:cNvGrpSpPr/>
+        <p:nvPr/>
+      </p:nvGrpSpPr>
+      <p:grpSpPr/>
+      <p:sp>
+        <p:nvSpPr>
+          <p:cNvPr id="2" name="TextBox 1"/>
+          <p:cNvSpPr txBox="1"/>
+          <p:nvPr/>
+        </p:nvSpPr>
+        <p:spPr>
+          <a:xfrm>
+            <a:off x="548640" y="274320"/>
+            <a:ext cx="11155680" cy="822960"/>
+          </a:xfrm>
+          <a:prstGeom prst="rect">
+            <a:avLst/>
+          </a:prstGeom>
+          <a:noFill/>
+        </p:spPr>
+        <p:txBody>
+          <a:bodyPr wrap="none">
+            <a:spAutoFit/>
+          </a:bodyPr>
+          <a:lstStyle/>
+          <a:p>
+            <a:pPr>
+              <a:defRPr sz="2600" b="1">
+                <a:solidFill>
+                  <a:srgbClr val="1F2328"/>
+                </a:solidFill>
+              </a:defRPr>
+            </a:pPr>
+            <a:r>
+              <a:t>Лестница моделей: разрыв self-hosted 120b и GPT-5.5</a:t>
+            </a:r>
+          </a:p>
+        </p:txBody>
+      </p:sp>
+      <p:pic>
+        <p:nvPicPr>
+          <p:cNvPr id="3" name="Picture 2" descr="models.png"/>
+          <p:cNvPicPr>
+            <a:picLocks noChangeAspect="1"/>
+          </p:cNvPicPr>
+          <p:nvPr/>
+        </p:nvPicPr>
+        <p:blipFill>
+          <a:blip r:embed="rId2"/>
+          <a:stretch>
+            <a:fillRect/>
+          </a:stretch>
+        </p:blipFill>
+        <p:spPr>
+          <a:xfrm>
+            <a:off x="518007" y="1097280"/>
+            <a:ext cx="11155680" cy="2874295"/>
+          </a:xfrm>
+          <a:prstGeom prst="rect">
+            <a:avLst/>
+          </a:prstGeom>
+        </p:spPr>
+      </p:pic>
+      <p:sp>
+        <p:nvSpPr>
+          <p:cNvPr id="4" name="TextBox 3"/>
+          <p:cNvSpPr txBox="1"/>
+          <p:nvPr/>
+        </p:nvSpPr>
+        <p:spPr>
+          <a:xfrm>
+            <a:off x="548640" y="6263640"/>
+            <a:ext cx="11155680" cy="457200"/>
+          </a:xfrm>
+          <a:prstGeom prst="rect">
+            <a:avLst/>
+          </a:prstGeom>
+          <a:noFill/>
+        </p:spPr>
+        <p:txBody>
+          <a:bodyPr wrap="square">
+            <a:spAutoFit/>
+          </a:bodyPr>
+          <a:lstStyle/>
+          <a:p>
+            <a:pPr>
+              <a:defRPr sz="1100">
+                <a:solidFill>
+                  <a:srgbClr val="6B7280"/>
+                </a:solidFill>
+              </a:defRPr>
+            </a:pPr>
+            <a:r>
+              <a:t>Разрыв на doc3 — 4 «выводных» дефекта (по какому полю времени последний IMEI, TAC не найден, бэкфилл, границы UTC); у GPT их добирают зонды. Путь: vLLM + logprobs на 120b. На пунктах МТС разрыв 1 дефект (11 vs 12 из 13). H100 $3.49/ч ≈ $0.4/документ.</a:t>
+            </a:r>
+          </a:p>
+        </p:txBody>
+      </p:sp>
+    </p:spTree>
+  </p:cSld>
+  <p:clrMapOvr>
+    <a:masterClrMapping/>
+  </p:clrMapOvr>
+</p:sld>
+</file>
+
+<file path=ppt/slides/slide19.xml><?xml version="1.0" encoding="utf-8"?>
+<p:sld xmlns:a="http://schemas.openxmlformats.org/drawingml/2006/main" xmlns:p="http://schemas.openxmlformats.org/presentationml/2006/main" xmlns:r="http://schemas.openxmlformats.org/officeDocument/2006/relationships">
+  <p:cSld>
+    <p:spTree>
+      <p:nvGrpSpPr>
+        <p:cNvPr id="1" name=""/>
+        <p:cNvGrpSpPr/>
+        <p:nvPr/>
+      </p:nvGrpSpPr>
+      <p:grpSpPr/>
+      <p:sp>
+        <p:nvSpPr>
+          <p:cNvPr id="2" name="TextBox 1"/>
+          <p:cNvSpPr txBox="1"/>
+          <p:nvPr/>
+        </p:nvSpPr>
+        <p:spPr>
+          <a:xfrm>
+            <a:off x="548640" y="274320"/>
+            <a:ext cx="11155680" cy="822960"/>
+          </a:xfrm>
+          <a:prstGeom prst="rect">
+            <a:avLst/>
+          </a:prstGeom>
+          <a:noFill/>
+        </p:spPr>
+        <p:txBody>
+          <a:bodyPr wrap="none">
+            <a:spAutoFit/>
+          </a:bodyPr>
+          <a:lstStyle/>
+          <a:p>
+            <a:pPr>
+              <a:defRPr sz="2600" b="1">
+                <a:solidFill>
+                  <a:srgbClr val="1F2328"/>
+                </a:solidFill>
+              </a:defRPr>
+            </a:pPr>
+            <a:r>
+              <a:t>Что уже работает: контур и демо</a:t>
+            </a:r>
+          </a:p>
+        </p:txBody>
+      </p:sp>
+      <p:pic>
+        <p:nvPicPr>
+          <p:cNvPr id="3" name="Picture 2" descr="architecture.png"/>
+          <p:cNvPicPr>
+            <a:picLocks noChangeAspect="1"/>
+          </p:cNvPicPr>
+          <p:nvPr/>
+        </p:nvPicPr>
+        <p:blipFill>
+          <a:blip r:embed="rId2"/>
+          <a:stretch>
+            <a:fillRect/>
+          </a:stretch>
+        </p:blipFill>
+        <p:spPr>
+          <a:xfrm>
+            <a:off x="518007" y="1097280"/>
+            <a:ext cx="11155680" cy="5646089"/>
+          </a:xfrm>
+          <a:prstGeom prst="rect">
+            <a:avLst/>
+          </a:prstGeom>
+        </p:spPr>
+      </p:pic>
+      <p:sp>
+        <p:nvSpPr>
+          <p:cNvPr id="4" name="TextBox 3"/>
+          <p:cNvSpPr txBox="1"/>
+          <p:nvPr/>
+        </p:nvSpPr>
+        <p:spPr>
+          <a:xfrm>
+            <a:off x="548640" y="6263640"/>
+            <a:ext cx="11155680" cy="457200"/>
+          </a:xfrm>
+          <a:prstGeom prst="rect">
+            <a:avLst/>
+          </a:prstGeom>
+          <a:noFill/>
+        </p:spPr>
+        <p:txBody>
+          <a:bodyPr wrap="square">
+            <a:spAutoFit/>
+          </a:bodyPr>
+          <a:lstStyle/>
+          <a:p>
+            <a:pPr>
+              <a:defRPr sz="1100">
+                <a:solidFill>
+                  <a:srgbClr val="6B7280"/>
+                </a:solidFill>
+              </a:defRPr>
+            </a:pPr>
+            <a:r>
+              <a:t>Проверено на документах МТС: PDF → секции (doc1 11, doc2 8, doc3 14) → очередь → воркер на gpt-oss-120b → отчёт → история; doc3 14/16, doc1 12/12 по голду. UI: прогресс по этапам с оценкой времени, история версий документа, 👍/👎 по находке. RabbitMQ (DLQ), Postgres (документы, ревью, находки, фидбек), Prometheus/Grafana.</a:t>
+            </a:r>
+          </a:p>
+        </p:txBody>
+      </p:sp>
+    </p:spTree>
+  </p:cSld>
+  <p:clrMapOvr>
+    <a:masterClrMapping/>
+  </p:clrMapOvr>
+</p:sld>
+</file>
+
+<file path=ppt/slides/slide2.xml><?xml version="1.0" encoding="utf-8"?>
+<p:sld xmlns:a="http://schemas.openxmlformats.org/drawingml/2006/main" xmlns:p="http://schemas.openxmlformats.org/presentationml/2006/main" xmlns:r="http://schemas.openxmlformats.org/officeDocument/2006/relationships">
+  <p:cSld>
+    <p:spTree>
+      <p:nvGrpSpPr>
+        <p:cNvPr id="1" name=""/>
+        <p:cNvGrpSpPr/>
+        <p:nvPr/>
+      </p:nvGrpSpPr>
+      <p:grpSpPr/>
+      <p:sp>
+        <p:nvSpPr>
+          <p:cNvPr id="2" name="TextBox 1"/>
+          <p:cNvSpPr txBox="1"/>
+          <p:nvPr/>
+        </p:nvSpPr>
+        <p:spPr>
+          <a:xfrm>
+            <a:off x="548640" y="274320"/>
+            <a:ext cx="11155680" cy="822960"/>
+          </a:xfrm>
+          <a:prstGeom prst="rect">
+            <a:avLst/>
+          </a:prstGeom>
+          <a:noFill/>
+        </p:spPr>
+        <p:txBody>
+          <a:bodyPr wrap="none">
+            <a:spAutoFit/>
+          </a:bodyPr>
+          <a:lstStyle/>
+          <a:p>
+            <a:pPr>
+              <a:defRPr sz="2600" b="1">
+                <a:solidFill>
+                  <a:srgbClr val="1F2328"/>
+                </a:solidFill>
+              </a:defRPr>
+            </a:pPr>
+            <a:r>
+              <a:t>Проблема: что доживает до разработки</a:t>
+            </a:r>
+          </a:p>
+        </p:txBody>
+      </p:sp>
+      <p:sp>
+        <p:nvSpPr>
+          <p:cNvPr id="3" name="TextBox 2"/>
+          <p:cNvSpPr txBox="1"/>
+          <p:nvPr/>
+        </p:nvSpPr>
+        <p:spPr>
+          <a:xfrm>
+            <a:off x="640080" y="1188720"/>
+            <a:ext cx="10881360" cy="4937760"/>
+          </a:xfrm>
+          <a:prstGeom prst="rect">
+            <a:avLst/>
+          </a:prstGeom>
+          <a:noFill/>
+        </p:spPr>
+        <p:txBody>
+          <a:bodyPr wrap="square">
+            <a:spAutoFit/>
+          </a:bodyPr>
+          <a:lstStyle/>
+          <a:p>
+            <a:pPr>
+              <a:spcAft>
+                <a:spcPts val="500"/>
+              </a:spcAft>
+              <a:defRPr sz="1700">
+                <a:solidFill>
+                  <a:srgbClr val="1F2328"/>
+                </a:solidFill>
+              </a:defRPr>
+            </a:pPr>
+            <a:r>
+              <a:t>• Аналитик NET пишет ТЗ на поток или витрину; разработчик и тестировщик вычитывают вручную, вопросы всплывают после передачи</a:t>
+            </a:r>
+          </a:p>
+          <a:p>
+            <a:pPr>
+              <a:spcAft>
+                <a:spcPts val="500"/>
+              </a:spcAft>
+              <a:defRPr sz="1700">
+                <a:solidFill>
+                  <a:srgbClr val="1F2328"/>
+                </a:solidFill>
+              </a:defRPr>
+            </a:pPr>
+            <a:r>
+              <a:t>• Три класса проблем — все три есть в тестовых документах МТС:</a:t>
+            </a:r>
+          </a:p>
+          <a:p>
+            <a:pPr lvl="1">
+              <a:spcAft>
+                <a:spcPts val="500"/>
+              </a:spcAft>
+              <a:defRPr sz="1500">
+                <a:solidFill>
+                  <a:srgbClr val="6B7280"/>
+                </a:solidFill>
+              </a:defRPr>
+            </a:pPr>
+            <a:r>
+              <a:t>– пропуск: не задан ключ витрины; нет правила для NULL; нет расписания и SLA; NOT NULL/NULLABLE не указан ни для одного поля</a:t>
+            </a:r>
+          </a:p>
+          <a:p>
+            <a:pPr lvl="1">
+              <a:spcAft>
+                <a:spcPts val="500"/>
+              </a:spcAft>
+              <a:defRPr sz="1500">
+                <a:solidFill>
+                  <a:srgbClr val="6B7280"/>
+                </a:solidFill>
+              </a:defRPr>
+            </a:pPr>
+            <a:r>
+              <a:t>– неоднозначность: «FIELD_IMEI (последний по времени за месяц)» — по какому полю времени и из какой таблицы?</a:t>
+            </a:r>
+          </a:p>
+          <a:p>
+            <a:pPr lvl="1">
+              <a:spcAft>
+                <a:spcPts val="500"/>
+              </a:spcAft>
+              <a:defRPr sz="1500">
+                <a:solidFill>
+                  <a:srgbClr val="6B7280"/>
+                </a:solidFill>
+              </a:defRPr>
+            </a:pPr>
+            <a:r>
+              <a:t>– противоречие: «Способ загрузки: Инкремент» и «Обновление: только полная перезагрузка месяца» в одном документе</a:t>
+            </a:r>
+          </a:p>
+          <a:p>
+            <a:pPr>
+              <a:spcAft>
+                <a:spcPts val="500"/>
+              </a:spcAft>
+              <a:defRPr sz="1700">
+                <a:solidFill>
+                  <a:srgbClr val="1F2328"/>
+                </a:solidFill>
+              </a:defRPr>
+            </a:pPr>
+            <a:r>
+              <a:t>• Кейсодатель: 4 зоны внимания, 8 обязательных пунктов документации, проверка на новом документе типа «витрина», метрика — полезность замечаний</a:t>
+            </a:r>
+          </a:p>
+        </p:txBody>
+      </p:sp>
+    </p:spTree>
+  </p:cSld>
+  <p:clrMapOvr>
+    <a:masterClrMapping/>
+  </p:clrMapOvr>
+</p:sld>
+</file>
+
+<file path=ppt/slides/slide20.xml><?xml version="1.0" encoding="utf-8"?>
+<p:sld xmlns:a="http://schemas.openxmlformats.org/drawingml/2006/main" xmlns:p="http://schemas.openxmlformats.org/presentationml/2006/main" xmlns:r="http://schemas.openxmlformats.org/officeDocument/2006/relationships">
+  <p:cSld>
+    <p:spTree>
+      <p:nvGrpSpPr>
+        <p:cNvPr id="1" name=""/>
+        <p:cNvGrpSpPr/>
+        <p:nvPr/>
+      </p:nvGrpSpPr>
+      <p:grpSpPr/>
+      <p:sp>
+        <p:nvSpPr>
+          <p:cNvPr id="2" name="TextBox 1"/>
+          <p:cNvSpPr txBox="1"/>
+          <p:nvPr/>
+        </p:nvSpPr>
+        <p:spPr>
+          <a:xfrm>
+            <a:off x="548640" y="274320"/>
+            <a:ext cx="11155680" cy="822960"/>
+          </a:xfrm>
+          <a:prstGeom prst="rect">
+            <a:avLst/>
+          </a:prstGeom>
+          <a:noFill/>
+        </p:spPr>
+        <p:txBody>
+          <a:bodyPr wrap="none">
+            <a:spAutoFit/>
+          </a:bodyPr>
+          <a:lstStyle/>
+          <a:p>
+            <a:pPr>
+              <a:defRPr sz="2600" b="1">
+                <a:solidFill>
+                  <a:srgbClr val="1F2328"/>
+                </a:solidFill>
+              </a:defRPr>
+            </a:pPr>
+            <a:r>
+              <a:t>Риски AI-решения и как закрываем</a:t>
             </a:r>
           </a:p>
         </p:txBody>
@@ -3231,8 +6366,8 @@
           <p:nvPr/>
         </p:nvGraphicFramePr>
         <p:xfrm>
-          <a:off x="548640" y="1280160"/>
-          <a:ext cx="11064240" cy="2926080"/>
+          <a:off x="548640" y="1188720"/>
+          <a:ext cx="11064240" cy="3127248"/>
         </p:xfrm>
         <a:graphic>
           <a:graphicData uri="http://schemas.openxmlformats.org/drawingml/2006/table">
@@ -3241,17 +6376,18 @@
                 <a:tableStyleId>{5C22544A-7EE6-4342-B048-85BDC9FD1C3A}</a:tableStyleId>
               </a:tblPr>
               <a:tblGrid>
+                <a:gridCol w="2743200"/>
                 <a:gridCol w="3840480"/>
-                <a:gridCol w="7223760"/>
+                <a:gridCol w="4480560"/>
               </a:tblGrid>
-              <a:tr h="365760">
+              <a:tr h="347472">
                 <a:tc>
                   <a:txBody>
                     <a:bodyPr/>
                     <a:lstStyle/>
                     <a:p>
                       <a:pPr>
-                        <a:defRPr sz="1300" b="1"/>
+                        <a:defRPr sz="1100" b="1"/>
                       </a:pPr>
                       <a:r>
                         <a:t>Риск</a:t>
@@ -3266,24 +6402,39 @@
                     <a:lstStyle/>
                     <a:p>
                       <a:pPr>
-                        <a:defRPr sz="1300" b="1"/>
+                        <a:defRPr sz="1100" b="1"/>
                       </a:pPr>
                       <a:r>
-                        <a:t>Мера</a:t>
+                        <a:t>Проявление у нас</a:t>
+                      </a:r>
+                    </a:p>
+                  </a:txBody>
+                  <a:tcPr/>
+                </a:tc>
+                <a:tc>
+                  <a:txBody>
+                    <a:bodyPr/>
+                    <a:lstStyle/>
+                    <a:p>
+                      <a:pPr>
+                        <a:defRPr sz="1100" b="1"/>
+                      </a:pPr>
+                      <a:r>
+                        <a:t>Мера / статус</a:t>
                       </a:r>
                     </a:p>
                   </a:txBody>
                   <a:tcPr/>
                 </a:tc>
               </a:tr>
-              <a:tr h="365760">
+              <a:tr h="347472">
                 <a:tc>
                   <a:txBody>
                     <a:bodyPr/>
                     <a:lstStyle/>
                     <a:p>
                       <a:pPr>
-                        <a:defRPr sz="1300"/>
+                        <a:defRPr sz="1100"/>
                       </a:pPr>
                       <a:r>
                         <a:t>Галлюцинация цитаты</a:t>
@@ -3298,24 +6449,39 @@
                     <a:lstStyle/>
                     <a:p>
                       <a:pPr>
-                        <a:defRPr sz="1300"/>
+                        <a:defRPr sz="1100"/>
                       </a:pPr>
                       <a:r>
-                        <a:t>программная верификация: нет в документе → отбрасываем; anchoring 96–100%</a:t>
+                        <a:t>модель «цитирует» отсутствующее</a:t>
+                      </a:r>
+                    </a:p>
+                  </a:txBody>
+                  <a:tcPr/>
+                </a:tc>
+                <a:tc>
+                  <a:txBody>
+                    <a:bodyPr/>
+                    <a:lstStyle/>
+                    <a:p>
+                      <a:pPr>
+                        <a:defRPr sz="1100"/>
+                      </a:pPr>
+                      <a:r>
+                        <a:t>верификация цитат; anchoring 96–100%</a:t>
                       </a:r>
                     </a:p>
                   </a:txBody>
                   <a:tcPr/>
                 </a:tc>
               </a:tr>
-              <a:tr h="365760">
+              <a:tr h="347472">
                 <a:tc>
                   <a:txBody>
                     <a:bodyPr/>
                     <a:lstStyle/>
                     <a:p>
                       <a:pPr>
-                        <a:defRPr sz="1300"/>
+                        <a:defRPr sz="1100"/>
                       </a:pPr>
                       <a:r>
                         <a:t>Фильтр режет правду</a:t>
@@ -3330,27 +6496,10 @@
                     <a:lstStyle/>
                     <a:p>
                       <a:pPr>
-                        <a:defRPr sz="1300"/>
+                        <a:defRPr sz="1100"/>
                       </a:pPr>
                       <a:r>
-                        <a:t>официальные пункты и детерминированные находки вне порога критика</a:t>
-                      </a:r>
-                    </a:p>
-                  </a:txBody>
-                  <a:tcPr/>
-                </a:tc>
-              </a:tr>
-              <a:tr h="365760">
-                <a:tc>
-                  <a:txBody>
-                    <a:bodyPr/>
-                    <a:lstStyle/>
-                    <a:p>
-                      <a:pPr>
-                        <a:defRPr sz="1300"/>
-                      </a:pPr>
-                      <a:r>
-                        <a:t>Разброс модели ±2</a:t>
+                        <a:t>критик ставил 0 верным пунктам МТС (EXP-13)</a:t>
                       </a:r>
                     </a:p>
                   </a:txBody>
@@ -3362,24 +6511,118 @@
                     <a:lstStyle/>
                     <a:p>
                       <a:pPr>
-                        <a:defRPr sz="1300"/>
+                        <a:defRPr sz="1100"/>
                       </a:pPr>
                       <a:r>
-                        <a:t>консенсус двух прогонов, числа как диапазон</a:t>
+                        <a:t>защищённые слоты и детерминированные проходы (EXP-14: 3/7 → 7/7)</a:t>
                       </a:r>
                     </a:p>
                   </a:txBody>
                   <a:tcPr/>
                 </a:tc>
               </a:tr>
-              <a:tr h="365760">
+              <a:tr h="347472">
                 <a:tc>
                   <a:txBody>
                     <a:bodyPr/>
                     <a:lstStyle/>
                     <a:p>
                       <a:pPr>
-                        <a:defRPr sz="1300"/>
+                        <a:defRPr sz="1100"/>
+                      </a:pPr>
+                      <a:r>
+                        <a:t>Молчаливая потеря ответов</a:t>
+                      </a:r>
+                    </a:p>
+                  </a:txBody>
+                  <a:tcPr/>
+                </a:tc>
+                <a:tc>
+                  <a:txBody>
+                    <a:bodyPr/>
+                    <a:lstStyle/>
+                    <a:p>
+                      <a:pPr>
+                        <a:defRPr sz="1100"/>
+                      </a:pPr>
+                      <a:r>
+                        <a:t>10/27 слотов UNKNOWN (EXP-13)</a:t>
+                      </a:r>
+                    </a:p>
+                  </a:txBody>
+                  <a:tcPr/>
+                </a:tc>
+                <a:tc>
+                  <a:txBody>
+                    <a:bodyPr/>
+                    <a:lstStyle/>
+                    <a:p>
+                      <a:pPr>
+                        <a:defRPr sz="1100"/>
+                      </a:pPr>
+                      <a:r>
+                        <a:t>схема, добор, логирование; UNKNOWN на дашборде — 0</a:t>
+                      </a:r>
+                    </a:p>
+                  </a:txBody>
+                  <a:tcPr/>
+                </a:tc>
+              </a:tr>
+              <a:tr h="347472">
+                <a:tc>
+                  <a:txBody>
+                    <a:bodyPr/>
+                    <a:lstStyle/>
+                    <a:p>
+                      <a:pPr>
+                        <a:defRPr sz="1100"/>
+                      </a:pPr>
+                      <a:r>
+                        <a:t>Разброс модели</a:t>
+                      </a:r>
+                    </a:p>
+                  </a:txBody>
+                  <a:tcPr/>
+                </a:tc>
+                <a:tc>
+                  <a:txBody>
+                    <a:bodyPr/>
+                    <a:lstStyle/>
+                    <a:p>
+                      <a:pPr>
+                        <a:defRPr sz="1100"/>
+                      </a:pPr>
+                      <a:r>
+                        <a:t>GPT ±2, 120b ±1–2 дефекта</a:t>
+                      </a:r>
+                    </a:p>
+                  </a:txBody>
+                  <a:tcPr/>
+                </a:tc>
+                <a:tc>
+                  <a:txBody>
+                    <a:bodyPr/>
+                    <a:lstStyle/>
+                    <a:p>
+                      <a:pPr>
+                        <a:defRPr sz="1100"/>
+                      </a:pPr>
+                      <a:r>
+                        <a:t>консенсус двух прогонов; числа как диапазон</a:t>
+                      </a:r>
+                    </a:p>
+                  </a:txBody>
+                  <a:tcPr/>
+                </a:tc>
+              </a:tr>
+              <a:tr h="347472">
+                <a:tc>
+                  <a:txBody>
+                    <a:bodyPr/>
+                    <a:lstStyle/>
+                    <a:p>
+                      <a:pPr>
+                        <a:defRPr sz="1100"/>
                       </a:pPr>
                       <a:r>
                         <a:t>Ложные срабатывания на обезличивании</a:t>
@@ -3394,7 +6637,22 @@
                     <a:lstStyle/>
                     <a:p>
                       <a:pPr>
-                        <a:defRPr sz="1300"/>
+                        <a:defRPr sz="1100"/>
+                      </a:pPr>
+                      <a:r>
+                        <a:t>«как называется столбец FIELD_IMSI» (120b)</a:t>
+                      </a:r>
+                    </a:p>
+                  </a:txBody>
+                  <a:tcPr/>
+                </a:tc>
+                <a:tc>
+                  <a:txBody>
+                    <a:bodyPr/>
+                    <a:lstStyle/>
+                    <a:p>
+                      <a:pPr>
+                        <a:defRPr sz="1100"/>
                       </a:pPr>
                       <a:r>
                         <a:t>правило в промптах + score 0 в критике (EXP-16)</a:t>
@@ -3404,14 +6662,61 @@
                   <a:tcPr/>
                 </a:tc>
               </a:tr>
-              <a:tr h="365760">
+              <a:tr h="347472">
                 <a:tc>
                   <a:txBody>
                     <a:bodyPr/>
                     <a:lstStyle/>
                     <a:p>
                       <a:pPr>
-                        <a:defRPr sz="1300"/>
+                        <a:defRPr sz="1100"/>
+                      </a:pPr>
+                      <a:r>
+                        <a:t>Синтетика ≠ реальность</a:t>
+                      </a:r>
+                    </a:p>
+                  </a:txBody>
+                  <a:tcPr/>
+                </a:tc>
+                <a:tc>
+                  <a:txBody>
+                    <a:bodyPr/>
+                    <a:lstStyle/>
+                    <a:p>
+                      <a:pPr>
+                        <a:defRPr sz="1100"/>
+                      </a:pPr>
+                      <a:r>
+                        <a:t>«шум» трижды был правдой</a:t>
+                      </a:r>
+                    </a:p>
+                  </a:txBody>
+                  <a:tcPr/>
+                </a:tc>
+                <a:tc>
+                  <a:txBody>
+                    <a:bodyPr/>
+                    <a:lstStyle/>
+                    <a:p>
+                      <a:pPr>
+                        <a:defRPr sz="1100"/>
+                      </a:pPr>
+                      <a:r>
+                        <a:t>вычитка сырых выводов, it1–it7; тройная разметка голдов — до финала</a:t>
+                      </a:r>
+                    </a:p>
+                  </a:txBody>
+                  <a:tcPr/>
+                </a:tc>
+              </a:tr>
+              <a:tr h="347472">
+                <a:tc>
+                  <a:txBody>
+                    <a:bodyPr/>
+                    <a:lstStyle/>
+                    <a:p>
+                      <a:pPr>
+                        <a:defRPr sz="1100"/>
                       </a:pPr>
                       <a:r>
                         <a:t>Слабая self-hosted модель</a:t>
@@ -3426,27 +6731,10 @@
                     <a:lstStyle/>
                     <a:p>
                       <a:pPr>
-                        <a:defRPr sz="1300"/>
+                        <a:defRPr sz="1100"/>
                       </a:pPr>
                       <a:r>
-                        <a:t>зонды неоднозначности через vLLM/logprobs; лестница моделей на одном бенче</a:t>
-                      </a:r>
-                    </a:p>
-                  </a:txBody>
-                  <a:tcPr/>
-                </a:tc>
-              </a:tr>
-              <a:tr h="365760">
-                <a:tc>
-                  <a:txBody>
-                    <a:bodyPr/>
-                    <a:lstStyle/>
-                    <a:p>
-                      <a:pPr>
-                        <a:defRPr sz="1300"/>
-                      </a:pPr>
-                      <a:r>
-                        <a:t>Синтетика ≠ реальность</a:t>
+                        <a:t>пропускает выводные дефекты</a:t>
                       </a:r>
                     </a:p>
                   </a:txBody>
@@ -3458,24 +6746,24 @@
                     <a:lstStyle/>
                     <a:p>
                       <a:pPr>
-                        <a:defRPr sz="1300"/>
+                        <a:defRPr sz="1100"/>
                       </a:pPr>
                       <a:r>
-                        <a:t>вычитка сырых выводов, тройная разметка голдов до финала</a:t>
+                        <a:t>зонды через vLLM/logprobs; reasoning effort — измерить</a:t>
                       </a:r>
                     </a:p>
                   </a:txBody>
                   <a:tcPr/>
                 </a:tc>
               </a:tr>
-              <a:tr h="365760">
+              <a:tr h="347472">
                 <a:tc>
                   <a:txBody>
                     <a:bodyPr/>
                     <a:lstStyle/>
                     <a:p>
                       <a:pPr>
-                        <a:defRPr sz="1300"/>
+                        <a:defRPr sz="1100"/>
                       </a:pPr>
                       <a:r>
                         <a:t>Длинные документы</a:t>
@@ -3490,10 +6778,25 @@
                     <a:lstStyle/>
                     <a:p>
                       <a:pPr>
-                        <a:defRPr sz="1300"/>
+                        <a:defRPr sz="1100"/>
                       </a:pPr>
                       <a:r>
-                        <a:t>обрыв на ~28k символов → чанкование по секциям (план)</a:t>
+                        <a:t>обрыв на ~28k символов (EXP-03)</a:t>
+                      </a:r>
+                    </a:p>
+                  </a:txBody>
+                  <a:tcPr/>
+                </a:tc>
+                <a:tc>
+                  <a:txBody>
+                    <a:bodyPr/>
+                    <a:lstStyle/>
+                    <a:p>
+                      <a:pPr>
+                        <a:defRPr sz="1100"/>
+                      </a:pPr>
+                      <a:r>
+                        <a:t>чанкование по секциям — план</a:t>
                       </a:r>
                     </a:p>
                   </a:txBody>
@@ -3512,7 +6815,7 @@
 </p:sld>
 </file>
 
-<file path=ppt/slides/slide11.xml><?xml version="1.0" encoding="utf-8"?>
+<file path=ppt/slides/slide21.xml><?xml version="1.0" encoding="utf-8"?>
 <p:sld xmlns:a="http://schemas.openxmlformats.org/drawingml/2006/main" xmlns:p="http://schemas.openxmlformats.org/presentationml/2006/main" xmlns:r="http://schemas.openxmlformats.org/officeDocument/2006/relationships">
   <p:cSld>
     <p:spTree>
@@ -3530,8 +6833,8 @@
         </p:nvSpPr>
         <p:spPr>
           <a:xfrm>
-            <a:off x="548640" y="320040"/>
-            <a:ext cx="10972800" cy="822960"/>
+            <a:off x="548640" y="274320"/>
+            <a:ext cx="11155680" cy="822960"/>
           </a:xfrm>
           <a:prstGeom prst="rect">
             <a:avLst/>
@@ -3545,7 +6848,7 @@
           <a:lstStyle/>
           <a:p>
             <a:pPr>
-              <a:defRPr sz="2800" b="1">
+              <a:defRPr sz="2600" b="1">
                 <a:solidFill>
                   <a:srgbClr val="1F2328"/>
                 </a:solidFill>
@@ -3565,7 +6868,7 @@
         </p:nvSpPr>
         <p:spPr>
           <a:xfrm>
-            <a:off x="640080" y="1234440"/>
+            <a:off x="640080" y="1188720"/>
             <a:ext cx="10881360" cy="4937760"/>
           </a:xfrm>
           <a:prstGeom prst="rect">
@@ -3581,9 +6884,9 @@
           <a:p>
             <a:pPr>
               <a:spcAft>
-                <a:spcPts val="600"/>
-              </a:spcAft>
-              <a:defRPr sz="1800">
+                <a:spcPts val="500"/>
+              </a:spcAft>
+              <a:defRPr sz="1700">
                 <a:solidFill>
                   <a:srgbClr val="1F2328"/>
                 </a:solidFill>
@@ -3596,61 +6899,61 @@
           <a:p>
             <a:pPr>
               <a:spcAft>
-                <a:spcPts val="600"/>
-              </a:spcAft>
-              <a:defRPr sz="1800">
-                <a:solidFill>
-                  <a:srgbClr val="1F2328"/>
-                </a:solidFill>
-              </a:defRPr>
-            </a:pPr>
-            <a:r>
-              <a:t>• Тройная разметка голдов документов МТС, пересчёт всех таблиц</a:t>
-            </a:r>
-          </a:p>
-          <a:p>
-            <a:pPr>
-              <a:spcAft>
-                <a:spcPts val="600"/>
-              </a:spcAft>
-              <a:defRPr sz="1800">
-                <a:solidFill>
-                  <a:srgbClr val="1F2328"/>
-                </a:solidFill>
-              </a:defRPr>
-            </a:pPr>
-            <a:r>
-              <a:t>• Детерминированные детекторы для оставшихся слепых зон (ссылка на раздел, таблица без структуры, тип против значений)</a:t>
-            </a:r>
-          </a:p>
-          <a:p>
-            <a:pPr>
-              <a:spcAft>
-                <a:spcPts val="600"/>
-              </a:spcAft>
-              <a:defRPr sz="1800">
-                <a:solidFill>
-                  <a:srgbClr val="1F2328"/>
-                </a:solidFill>
-              </a:defRPr>
-            </a:pPr>
-            <a:r>
-              <a:t>• Дашборд качества: recall по итерациям рядом с эксплуатационными метриками</a:t>
-            </a:r>
-          </a:p>
-          <a:p>
-            <a:pPr>
-              <a:spcAft>
-                <a:spcPts val="600"/>
-              </a:spcAft>
-              <a:defRPr sz="1800">
-                <a:solidFill>
-                  <a:srgbClr val="1F2328"/>
-                </a:solidFill>
-              </a:defRPr>
-            </a:pPr>
-            <a:r>
-              <a:t>• Отчёт-обоснование архитектуры по журналу экспериментов; финальное демо на новом документе кейсодателя</a:t>
+                <a:spcPts val="500"/>
+              </a:spcAft>
+              <a:defRPr sz="1700">
+                <a:solidFill>
+                  <a:srgbClr val="1F2328"/>
+                </a:solidFill>
+              </a:defRPr>
+            </a:pPr>
+            <a:r>
+              <a:t>• Тройная разметка голдов документов МТС (второй и третий размётчик), пересчёт всех таблиц</a:t>
+            </a:r>
+          </a:p>
+          <a:p>
+            <a:pPr>
+              <a:spcAft>
+                <a:spcPts val="500"/>
+              </a:spcAft>
+              <a:defRPr sz="1700">
+                <a:solidFill>
+                  <a:srgbClr val="1F2328"/>
+                </a:solidFill>
+              </a:defRPr>
+            </a:pPr>
+            <a:r>
+              <a:t>• Детерминированные детекторы для оставшихся слепых зон: ссылка на раздел при ненумерованных заголовках, объявленная таблица без структуры, тип против значений; INC-01 → «не применимо» при полной перезаписи</a:t>
+            </a:r>
+          </a:p>
+          <a:p>
+            <a:pPr>
+              <a:spcAft>
+                <a:spcPts val="500"/>
+              </a:spcAft>
+              <a:defRPr sz="1700">
+                <a:solidFill>
+                  <a:srgbClr val="1F2328"/>
+                </a:solidFill>
+              </a:defRPr>
+            </a:pPr>
+            <a:r>
+              <a:t>• Дашборд качества: recall по итерациям рядом с эксплуатационными метриками (bench_runs в Postgres)</a:t>
+            </a:r>
+          </a:p>
+          <a:p>
+            <a:pPr>
+              <a:spcAft>
+                <a:spcPts val="500"/>
+              </a:spcAft>
+              <a:defRPr sz="1700">
+                <a:solidFill>
+                  <a:srgbClr val="1F2328"/>
+                </a:solidFill>
+              </a:defRPr>
+            </a:pPr>
+            <a:r>
+              <a:t>• Фронтенд аналитика на нашем API (контракт готов, CORS включён); отчёт-обоснование архитектуры по журналу; финальное демо на новом документе кейсодателя</a:t>
             </a:r>
           </a:p>
         </p:txBody>
@@ -3663,7 +6966,7 @@
 </p:sld>
 </file>
 
-<file path=ppt/slides/slide12.xml><?xml version="1.0" encoding="utf-8"?>
+<file path=ppt/slides/slide22.xml><?xml version="1.0" encoding="utf-8"?>
 <p:sld xmlns:a="http://schemas.openxmlformats.org/drawingml/2006/main" xmlns:p="http://schemas.openxmlformats.org/presentationml/2006/main" xmlns:r="http://schemas.openxmlformats.org/officeDocument/2006/relationships">
   <p:cSld>
     <p:spTree>
@@ -3681,8 +6984,8 @@
         </p:nvSpPr>
         <p:spPr>
           <a:xfrm>
-            <a:off x="548640" y="320040"/>
-            <a:ext cx="10972800" cy="822960"/>
+            <a:off x="548640" y="274320"/>
+            <a:ext cx="11155680" cy="822960"/>
           </a:xfrm>
           <a:prstGeom prst="rect">
             <a:avLst/>
@@ -3696,7 +6999,7 @@
           <a:lstStyle/>
           <a:p>
             <a:pPr>
-              <a:defRPr sz="2800" b="1">
+              <a:defRPr sz="2600" b="1">
                 <a:solidFill>
                   <a:srgbClr val="1F2328"/>
                 </a:solidFill>
@@ -3717,8 +7020,8 @@
           <p:nvPr/>
         </p:nvGraphicFramePr>
         <p:xfrm>
-          <a:off x="548640" y="1280160"/>
-          <a:ext cx="11064240" cy="1463040"/>
+          <a:off x="548640" y="1188720"/>
+          <a:ext cx="11064240" cy="1389888"/>
         </p:xfrm>
         <a:graphic>
           <a:graphicData uri="http://schemas.openxmlformats.org/drawingml/2006/table">
@@ -3727,19 +7030,19 @@
                 <a:tableStyleId>{5C22544A-7EE6-4342-B048-85BDC9FD1C3A}</a:tableStyleId>
               </a:tblPr>
               <a:tblGrid>
-                <a:gridCol w="2743200"/>
-                <a:gridCol w="1828800"/>
-                <a:gridCol w="4846320"/>
+                <a:gridCol w="2651760"/>
+                <a:gridCol w="2286000"/>
+                <a:gridCol w="4480560"/>
                 <a:gridCol w="1645920"/>
               </a:tblGrid>
-              <a:tr h="365760">
+              <a:tr h="347472">
                 <a:tc>
                   <a:txBody>
                     <a:bodyPr/>
                     <a:lstStyle/>
                     <a:p>
                       <a:pPr>
-                        <a:defRPr sz="1300" b="1"/>
+                        <a:defRPr sz="1200" b="1"/>
                       </a:pPr>
                       <a:r>
                         <a:t>Участник</a:t>
@@ -3754,7 +7057,7 @@
                     <a:lstStyle/>
                     <a:p>
                       <a:pPr>
-                        <a:defRPr sz="1300" b="1"/>
+                        <a:defRPr sz="1200" b="1"/>
                       </a:pPr>
                       <a:r>
                         <a:t>Роль</a:t>
@@ -3769,7 +7072,7 @@
                     <a:lstStyle/>
                     <a:p>
                       <a:pPr>
-                        <a:defRPr sz="1300" b="1"/>
+                        <a:defRPr sz="1200" b="1"/>
                       </a:pPr>
                       <a:r>
                         <a:t>Зона ответственности</a:t>
@@ -3784,7 +7087,7 @@
                     <a:lstStyle/>
                     <a:p>
                       <a:pPr>
-                        <a:defRPr sz="1300" b="1"/>
+                        <a:defRPr sz="1200" b="1"/>
                       </a:pPr>
                       <a:r>
                         <a:t>Степень участия</a:t>
@@ -3794,14 +7097,14 @@
                   <a:tcPr/>
                 </a:tc>
               </a:tr>
-              <a:tr h="365760">
+              <a:tr h="347472">
                 <a:tc>
                   <a:txBody>
                     <a:bodyPr/>
                     <a:lstStyle/>
                     <a:p>
                       <a:pPr>
-                        <a:defRPr sz="1300"/>
+                        <a:defRPr sz="1200"/>
                       </a:pPr>
                       <a:r>
                         <a:t>Коротков Леонид (@fDAFX)</a:t>
@@ -3816,7 +7119,7 @@
                     <a:lstStyle/>
                     <a:p>
                       <a:pPr>
-                        <a:defRPr sz="1300"/>
+                        <a:defRPr sz="1200"/>
                       </a:pPr>
                       <a:r>
                         <a:t>AI Engineer — исследование и направление</a:t>
@@ -3831,7 +7134,7 @@
                     <a:lstStyle/>
                     <a:p>
                       <a:pPr>
-                        <a:defRPr sz="1300"/>
+                        <a:defRPr sz="1200"/>
                       </a:pPr>
                       <a:r>
                         <a:t>генерация и отбор идей: гипотезы, архитектурные решения, план экспериментов, выбор моделей и метрик; методология оценки</a:t>
@@ -3846,7 +7149,7 @@
                     <a:lstStyle/>
                     <a:p>
                       <a:pPr>
-                        <a:defRPr sz="1300"/>
+                        <a:defRPr sz="1200"/>
                       </a:pPr>
                       <a:r>
                         <a:t>ведущая, постоянно</a:t>
@@ -3856,14 +7159,14 @@
                   <a:tcPr/>
                 </a:tc>
               </a:tr>
-              <a:tr h="365760">
+              <a:tr h="347472">
                 <a:tc>
                   <a:txBody>
                     <a:bodyPr/>
                     <a:lstStyle/>
                     <a:p>
                       <a:pPr>
-                        <a:defRPr sz="1300"/>
+                        <a:defRPr sz="1200"/>
                       </a:pPr>
                       <a:r>
                         <a:t>Рыженко Виктор (@RyzhenkoViktor)</a:t>
@@ -3878,7 +7181,7 @@
                     <a:lstStyle/>
                     <a:p>
                       <a:pPr>
-                        <a:defRPr sz="1300"/>
+                        <a:defRPr sz="1200"/>
                       </a:pPr>
                       <a:r>
                         <a:t>AI Engineer — реализация</a:t>
@@ -3893,7 +7196,7 @@
                     <a:lstStyle/>
                     <a:p>
                       <a:pPr>
-                        <a:defRPr sz="1300"/>
+                        <a:defRPr sz="1200"/>
                       </a:pPr>
                       <a:r>
                         <a:t>код и инфраструктура: конвейер ревью и тесты, бенч и фабрика синтетики, compose-контур, интеграция self-hosted модели</a:t>
@@ -3908,7 +7211,7 @@
                     <a:lstStyle/>
                     <a:p>
                       <a:pPr>
-                        <a:defRPr sz="1300"/>
+                        <a:defRPr sz="1200"/>
                       </a:pPr>
                       <a:r>
                         <a:t>частичная, по задачам реализации</a:t>
@@ -3918,14 +7221,14 @@
                   <a:tcPr/>
                 </a:tc>
               </a:tr>
-              <a:tr h="365760">
+              <a:tr h="347472">
                 <a:tc>
                   <a:txBody>
                     <a:bodyPr/>
                     <a:lstStyle/>
                     <a:p>
                       <a:pPr>
-                        <a:defRPr sz="1300"/>
+                        <a:defRPr sz="1200"/>
                       </a:pPr>
                       <a:r>
                         <a:t>Сокол Тимофей (@xcmgg)</a:t>
@@ -3940,7 +7243,7 @@
                     <a:lstStyle/>
                     <a:p>
                       <a:pPr>
-                        <a:defRPr sz="1300"/>
+                        <a:defRPr sz="1200"/>
                       </a:pPr>
                       <a:r>
                         <a:t>AI Product — процессы и продукт</a:t>
@@ -3955,7 +7258,7 @@
                     <a:lstStyle/>
                     <a:p>
                       <a:pPr>
-                        <a:defRPr sz="1300"/>
+                        <a:defRPr sz="1200"/>
                       </a:pPr>
                       <a:r>
                         <a:t>процесс команды и курс развития, продуктовая проработка (гипотеза, MVP, критерии, риски), фронтенд аналитика, участие в коде</a:t>
@@ -3970,7 +7273,7 @@
                     <a:lstStyle/>
                     <a:p>
                       <a:pPr>
-                        <a:defRPr sz="1300"/>
+                        <a:defRPr sz="1200"/>
                       </a:pPr>
                       <a:r>
                         <a:t>высокая, постоянно</a:t>
@@ -3992,8 +7295,8 @@
         </p:nvSpPr>
         <p:spPr>
           <a:xfrm>
-            <a:off x="548640" y="6126480"/>
-            <a:ext cx="10972800" cy="548640"/>
+            <a:off x="548640" y="6172200"/>
+            <a:ext cx="11155680" cy="457200"/>
           </a:xfrm>
           <a:prstGeom prst="rect">
             <a:avLst/>
@@ -4015,187 +7318,6 @@
             </a:pPr>
             <a:r>
               <a:t>Степень участия — на 04.09; в финальной версии уточняется по фактическому вкладу.</a:t>
-            </a:r>
-          </a:p>
-        </p:txBody>
-      </p:sp>
-    </p:spTree>
-  </p:cSld>
-  <p:clrMapOvr>
-    <a:masterClrMapping/>
-  </p:clrMapOvr>
-</p:sld>
-</file>
-
-<file path=ppt/slides/slide2.xml><?xml version="1.0" encoding="utf-8"?>
-<p:sld xmlns:a="http://schemas.openxmlformats.org/drawingml/2006/main" xmlns:p="http://schemas.openxmlformats.org/presentationml/2006/main" xmlns:r="http://schemas.openxmlformats.org/officeDocument/2006/relationships">
-  <p:cSld>
-    <p:spTree>
-      <p:nvGrpSpPr>
-        <p:cNvPr id="1" name=""/>
-        <p:cNvGrpSpPr/>
-        <p:nvPr/>
-      </p:nvGrpSpPr>
-      <p:grpSpPr/>
-      <p:sp>
-        <p:nvSpPr>
-          <p:cNvPr id="2" name="TextBox 1"/>
-          <p:cNvSpPr txBox="1"/>
-          <p:nvPr/>
-        </p:nvSpPr>
-        <p:spPr>
-          <a:xfrm>
-            <a:off x="548640" y="320040"/>
-            <a:ext cx="10972800" cy="822960"/>
-          </a:xfrm>
-          <a:prstGeom prst="rect">
-            <a:avLst/>
-          </a:prstGeom>
-          <a:noFill/>
-        </p:spPr>
-        <p:txBody>
-          <a:bodyPr wrap="none">
-            <a:spAutoFit/>
-          </a:bodyPr>
-          <a:lstStyle/>
-          <a:p>
-            <a:pPr>
-              <a:defRPr sz="2800" b="1">
-                <a:solidFill>
-                  <a:srgbClr val="1F2328"/>
-                </a:solidFill>
-              </a:defRPr>
-            </a:pPr>
-            <a:r>
-              <a:t>Проблема</a:t>
-            </a:r>
-          </a:p>
-        </p:txBody>
-      </p:sp>
-      <p:sp>
-        <p:nvSpPr>
-          <p:cNvPr id="3" name="TextBox 2"/>
-          <p:cNvSpPr txBox="1"/>
-          <p:nvPr/>
-        </p:nvSpPr>
-        <p:spPr>
-          <a:xfrm>
-            <a:off x="640080" y="1234440"/>
-            <a:ext cx="10881360" cy="4937760"/>
-          </a:xfrm>
-          <a:prstGeom prst="rect">
-            <a:avLst/>
-          </a:prstGeom>
-          <a:noFill/>
-        </p:spPr>
-        <p:txBody>
-          <a:bodyPr wrap="square">
-            <a:spAutoFit/>
-          </a:bodyPr>
-          <a:lstStyle/>
-          <a:p>
-            <a:pPr>
-              <a:spcAft>
-                <a:spcPts val="600"/>
-              </a:spcAft>
-              <a:defRPr sz="1800">
-                <a:solidFill>
-                  <a:srgbClr val="1F2328"/>
-                </a:solidFill>
-              </a:defRPr>
-            </a:pPr>
-            <a:r>
-              <a:t>• Аналитик NET пишет ТЗ на поток или витрину; разработчик и тестировщик вычитывают вручную</a:t>
-            </a:r>
-          </a:p>
-          <a:p>
-            <a:pPr>
-              <a:spcAft>
-                <a:spcPts val="600"/>
-              </a:spcAft>
-              <a:defRPr sz="1800">
-                <a:solidFill>
-                  <a:srgbClr val="1F2328"/>
-                </a:solidFill>
-              </a:defRPr>
-            </a:pPr>
-            <a:r>
-              <a:t>• Часть проблем доживает до разработки и возвращается: повторные согласования, переделки, перепроверки</a:t>
-            </a:r>
-          </a:p>
-          <a:p>
-            <a:pPr>
-              <a:spcAft>
-                <a:spcPts val="600"/>
-              </a:spcAft>
-              <a:defRPr sz="1800">
-                <a:solidFill>
-                  <a:srgbClr val="1F2328"/>
-                </a:solidFill>
-              </a:defRPr>
-            </a:pPr>
-            <a:r>
-              <a:t>• Три класса проблем в документах МТС:</a:t>
-            </a:r>
-          </a:p>
-          <a:p>
-            <a:pPr lvl="1">
-              <a:spcAft>
-                <a:spcPts val="600"/>
-              </a:spcAft>
-              <a:defRPr sz="1500">
-                <a:solidFill>
-                  <a:srgbClr val="6B7280"/>
-                </a:solidFill>
-              </a:defRPr>
-            </a:pPr>
-            <a:r>
-              <a:t>– пропуски — нет ключа витрины, правила для NULL, расписания и SLA</a:t>
-            </a:r>
-          </a:p>
-          <a:p>
-            <a:pPr lvl="1">
-              <a:spcAft>
-                <a:spcPts val="600"/>
-              </a:spcAft>
-              <a:defRPr sz="1500">
-                <a:solidFill>
-                  <a:srgbClr val="6B7280"/>
-                </a:solidFill>
-              </a:defRPr>
-            </a:pPr>
-            <a:r>
-              <a:t>– неоднозначности — «последний по времени IMEI»: по какому полю, из какой таблицы</a:t>
-            </a:r>
-          </a:p>
-          <a:p>
-            <a:pPr lvl="1">
-              <a:spcAft>
-                <a:spcPts val="600"/>
-              </a:spcAft>
-              <a:defRPr sz="1500">
-                <a:solidFill>
-                  <a:srgbClr val="6B7280"/>
-                </a:solidFill>
-              </a:defRPr>
-            </a:pPr>
-            <a:r>
-              <a:t>– противоречия — «Инкремент» и «только полная перезагрузка месяца» в одном документе</a:t>
-            </a:r>
-          </a:p>
-          <a:p>
-            <a:pPr>
-              <a:spcAft>
-                <a:spcPts val="600"/>
-              </a:spcAft>
-              <a:defRPr sz="1800">
-                <a:solidFill>
-                  <a:srgbClr val="1F2328"/>
-                </a:solidFill>
-              </a:defRPr>
-            </a:pPr>
-            <a:r>
-              <a:t>• Кейсодатель: 4 зоны внимания, 8 обязательных пунктов документации, тест на новом документе типа «витрина»</a:t>
             </a:r>
           </a:p>
         </p:txBody>
@@ -4226,8 +7348,8 @@
         </p:nvSpPr>
         <p:spPr>
           <a:xfrm>
-            <a:off x="548640" y="320040"/>
-            <a:ext cx="10972800" cy="822960"/>
+            <a:off x="548640" y="274320"/>
+            <a:ext cx="11155680" cy="822960"/>
           </a:xfrm>
           <a:prstGeom prst="rect">
             <a:avLst/>
@@ -4241,14 +7363,14 @@
           <a:lstStyle/>
           <a:p>
             <a:pPr>
-              <a:defRPr sz="2800" b="1">
-                <a:solidFill>
-                  <a:srgbClr val="1F2328"/>
-                </a:solidFill>
-              </a:defRPr>
-            </a:pPr>
-            <a:r>
-              <a:t>Постановка задачи</a:t>
+              <a:defRPr sz="2600" b="1">
+                <a:solidFill>
+                  <a:srgbClr val="1F2328"/>
+                </a:solidFill>
+              </a:defRPr>
+            </a:pPr>
+            <a:r>
+              <a:t>Постановка и наши требования к себе</a:t>
             </a:r>
           </a:p>
         </p:txBody>
@@ -4261,7 +7383,7 @@
         </p:nvSpPr>
         <p:spPr>
           <a:xfrm>
-            <a:off x="640080" y="1234440"/>
+            <a:off x="640080" y="1188720"/>
             <a:ext cx="10881360" cy="4937760"/>
           </a:xfrm>
           <a:prstGeom prst="rect">
@@ -4277,67 +7399,52 @@
           <a:p>
             <a:pPr>
               <a:spcAft>
-                <a:spcPts val="600"/>
-              </a:spcAft>
-              <a:defRPr sz="1800">
-                <a:solidFill>
-                  <a:srgbClr val="1F2328"/>
-                </a:solidFill>
-              </a:defRPr>
-            </a:pPr>
-            <a:r>
-              <a:t>• Вход: текст ТЗ (markdown, txt, docx, pdf). Выход: места, требующие уточнения</a:t>
-            </a:r>
-          </a:p>
-          <a:p>
-            <a:pPr>
-              <a:spcAft>
-                <a:spcPts val="600"/>
-              </a:spcAft>
-              <a:defRPr sz="1800">
-                <a:solidFill>
-                  <a:srgbClr val="1F2328"/>
-                </a:solidFill>
-              </a:defRPr>
-            </a:pPr>
-            <a:r>
-              <a:t>• Каждая находка: дословная цитата · почему это проблема здесь · что уточнить · критичность</a:t>
-            </a:r>
-          </a:p>
-          <a:p>
-            <a:pPr>
-              <a:spcAft>
-                <a:spcPts val="600"/>
-              </a:spcAft>
-              <a:defRPr sz="1800">
-                <a:solidFill>
-                  <a:srgbClr val="1F2328"/>
-                </a:solidFill>
-              </a:defRPr>
-            </a:pPr>
-            <a:r>
-              <a:t>• Плюс: покрытие чеклиста полноты и общий вердикт готовности; решение всегда за аналитиком</a:t>
-            </a:r>
-          </a:p>
-          <a:p>
-            <a:pPr>
-              <a:spcAft>
-                <a:spcPts val="600"/>
-              </a:spcAft>
-              <a:defRPr sz="1800">
-                <a:solidFill>
-                  <a:srgbClr val="1F2328"/>
-                </a:solidFill>
-              </a:defRPr>
-            </a:pPr>
-            <a:r>
-              <a:t>• Наши требования к себе:</a:t>
+                <a:spcPts val="500"/>
+              </a:spcAft>
+              <a:defRPr sz="1700">
+                <a:solidFill>
+                  <a:srgbClr val="1F2328"/>
+                </a:solidFill>
+              </a:defRPr>
+            </a:pPr>
+            <a:r>
+              <a:t>• Вход: ТЗ (markdown, txt, docx, pdf). Выход: места, требующие уточнения — цитата · почему · что уточнить · критичность; покрытие чеклиста; вердикт</a:t>
+            </a:r>
+          </a:p>
+          <a:p>
+            <a:pPr>
+              <a:spcAft>
+                <a:spcPts val="500"/>
+              </a:spcAft>
+              <a:defRPr sz="1700">
+                <a:solidFill>
+                  <a:srgbClr val="1F2328"/>
+                </a:solidFill>
+              </a:defRPr>
+            </a:pPr>
+            <a:r>
+              <a:t>• Решение не заменяет аналитика: светофор и вопросы, а не правки</a:t>
+            </a:r>
+          </a:p>
+          <a:p>
+            <a:pPr>
+              <a:spcAft>
+                <a:spcPts val="500"/>
+              </a:spcAft>
+              <a:defRPr sz="1700">
+                <a:solidFill>
+                  <a:srgbClr val="1F2328"/>
+                </a:solidFill>
+              </a:defRPr>
+            </a:pPr>
+            <a:r>
+              <a:t>• Требования, которые превратились в архитектуру:</a:t>
             </a:r>
           </a:p>
           <a:p>
             <a:pPr lvl="1">
               <a:spcAft>
-                <a:spcPts val="600"/>
+                <a:spcPts val="500"/>
               </a:spcAft>
               <a:defRPr sz="1500">
                 <a:solidFill>
@@ -4346,13 +7453,13 @@
               </a:defRPr>
             </a:pPr>
             <a:r>
-              <a:t>– замечание без привязки к тексту — не замечание (верификация цитат)</a:t>
+              <a:t>– замечание без привязки к тексту — не замечание → программная верификация цитат</a:t>
             </a:r>
           </a:p>
           <a:p>
             <a:pPr lvl="1">
               <a:spcAft>
-                <a:spcPts val="600"/>
+                <a:spcPts val="500"/>
               </a:spcAft>
               <a:defRPr sz="1500">
                 <a:solidFill>
@@ -4361,13 +7468,13 @@
               </a:defRPr>
             </a:pPr>
             <a:r>
-              <a:t>– обезличивание — не дефект; официальные пункты МТС проверяются всегда</a:t>
+              <a:t>– обезличивание (TABLE_*, FIELD_*, CLUSTER) — не дефект → правило в промптах и в критике</a:t>
             </a:r>
           </a:p>
           <a:p>
             <a:pPr lvl="1">
               <a:spcAft>
-                <a:spcPts val="600"/>
+                <a:spcPts val="500"/>
               </a:spcAft>
               <a:defRPr sz="1500">
                 <a:solidFill>
@@ -4376,7 +7483,22 @@
               </a:defRPr>
             </a:pPr>
             <a:r>
-              <a:t>– качество измеряется на размеченных данных; любая смена модели или промпта — через бенч</a:t>
+              <a:t>– 8 пунктов кейсодателя проверяются всегда → отдельные слоты, критик не вправе их резать</a:t>
+            </a:r>
+          </a:p>
+          <a:p>
+            <a:pPr lvl="1">
+              <a:spcAft>
+                <a:spcPts val="500"/>
+              </a:spcAft>
+              <a:defRPr sz="1500">
+                <a:solidFill>
+                  <a:srgbClr val="6B7280"/>
+                </a:solidFill>
+              </a:defRPr>
+            </a:pPr>
+            <a:r>
+              <a:t>– качество измеряется, а не оценивается → голды, синтетика, бенч, журнал экспериментов</a:t>
             </a:r>
           </a:p>
         </p:txBody>
@@ -4407,8 +7529,8 @@
         </p:nvSpPr>
         <p:spPr>
           <a:xfrm>
-            <a:off x="548640" y="320040"/>
-            <a:ext cx="10972800" cy="822960"/>
+            <a:off x="548640" y="274320"/>
+            <a:ext cx="11155680" cy="822960"/>
           </a:xfrm>
           <a:prstGeom prst="rect">
             <a:avLst/>
@@ -4422,14 +7544,14 @@
           <a:lstStyle/>
           <a:p>
             <a:pPr>
-              <a:defRPr sz="2800" b="1">
-                <a:solidFill>
-                  <a:srgbClr val="1F2328"/>
-                </a:solidFill>
-              </a:defRPr>
-            </a:pPr>
-            <a:r>
-              <a:t>Подход: конвейер, а не промпт</a:t>
+              <a:defRPr sz="2600" b="1">
+                <a:solidFill>
+                  <a:srgbClr val="1F2328"/>
+                </a:solidFill>
+              </a:defRPr>
+            </a:pPr>
+            <a:r>
+              <a:t>Как мы доказываем: данные и метрики</a:t>
             </a:r>
           </a:p>
         </p:txBody>
@@ -4442,7 +7564,7 @@
         </p:nvSpPr>
         <p:spPr>
           <a:xfrm>
-            <a:off x="640080" y="1234440"/>
+            <a:off x="640080" y="1188720"/>
             <a:ext cx="10881360" cy="4937760"/>
           </a:xfrm>
           <a:prstGeom prst="rect">
@@ -4458,91 +7580,76 @@
           <a:p>
             <a:pPr>
               <a:spcAft>
-                <a:spcPts val="600"/>
-              </a:spcAft>
-              <a:defRPr sz="1800">
-                <a:solidFill>
-                  <a:srgbClr val="1F2328"/>
-                </a:solidFill>
-              </a:defRPr>
-            </a:pPr>
-            <a:r>
-              <a:t>• Детерминированное ядро: шаблон МТС (20 разделов, «не применимо»), языковые паттерны, граф сущностей — 0 шума</a:t>
-            </a:r>
-          </a:p>
-          <a:p>
-            <a:pPr>
-              <a:spcAft>
-                <a:spcPts val="600"/>
-              </a:spcAft>
-              <a:defRPr sz="1800">
-                <a:solidFill>
-                  <a:srgbClr val="1F2328"/>
-                </a:solidFill>
-              </a:defRPr>
-            </a:pPr>
-            <a:r>
-              <a:t>• Чеклист полноты: 27 бинарных слотов, включая 8 «Основных моментов» МТС; исходы OK / MISSING / UNCLEAR / NA</a:t>
-            </a:r>
-          </a:p>
-          <a:p>
-            <a:pPr>
-              <a:spcAft>
-                <a:spcPts val="600"/>
-              </a:spcAft>
-              <a:defRPr sz="1800">
-                <a:solidFill>
-                  <a:srgbClr val="1F2328"/>
-                </a:solidFill>
-              </a:defRPr>
-            </a:pPr>
-            <a:r>
-              <a:t>• Межсекционная согласованность, «взгляд разработчика»: что придётся угадывать</a:t>
-            </a:r>
-          </a:p>
-          <a:p>
-            <a:pPr>
-              <a:spcAft>
-                <a:spcPts val="600"/>
-              </a:spcAft>
-              <a:defRPr sz="1800">
-                <a:solidFill>
-                  <a:srgbClr val="1F2328"/>
-                </a:solidFill>
-              </a:defRPr>
-            </a:pPr>
-            <a:r>
-              <a:t>• Неоднозначность как число: семантическая энтропия ответов и вероятности из логитов</a:t>
-            </a:r>
-          </a:p>
-          <a:p>
-            <a:pPr>
-              <a:spcAft>
-                <a:spcPts val="600"/>
-              </a:spcAft>
-              <a:defRPr sz="1800">
-                <a:solidFill>
-                  <a:srgbClr val="1F2328"/>
-                </a:solidFill>
-              </a:defRPr>
-            </a:pPr>
-            <a:r>
-              <a:t>• Верификация цитат (галлюцинации отбрасываются) и критик-ранжировщик, который не вправе резать пункты кейсодателя</a:t>
-            </a:r>
-          </a:p>
-          <a:p>
-            <a:pPr>
-              <a:spcAft>
-                <a:spcPts val="600"/>
-              </a:spcAft>
-              <a:defRPr sz="1800">
-                <a:solidFill>
-                  <a:srgbClr val="1F2328"/>
-                </a:solidFill>
-              </a:defRPr>
-            </a:pPr>
-            <a:r>
-              <a:t>• Модель — параметр: GPT-5.5 как референс, self-hosted gpt-oss-120b как ярус заказчика</a:t>
+                <a:spcPts val="500"/>
+              </a:spcAft>
+              <a:defRPr sz="1700">
+                <a:solidFill>
+                  <a:srgbClr val="1F2328"/>
+                </a:solidFill>
+              </a:defRPr>
+            </a:pPr>
+            <a:r>
+              <a:t>• Голд: 3 обезличенных документа МТС, 36 размеченных дефектов с кодами таксономии (A пропуск, B неоднозначность, C ссылка, D противоречие, E измеримость, F шаблон) и сложностью; 9 позиций — официальные пункты</a:t>
+            </a:r>
+          </a:p>
+          <a:p>
+            <a:pPr>
+              <a:spcAft>
+                <a:spcPts val="500"/>
+              </a:spcAft>
+              <a:defRPr sz="1700">
+                <a:solidFill>
+                  <a:srgbClr val="1F2328"/>
+                </a:solidFill>
+              </a:defRPr>
+            </a:pPr>
+            <a:r>
+              <a:t>• Фабрика синтетики: чистая база в официальном шаблоне МТС (20 разделов) + рецепты инъекций с автоматическим голдом; 33 инъекции (v1 обычные, v2hard экспертные, v3official — по 8 пунктам); 7 итераций вычитки</a:t>
+            </a:r>
+          </a:p>
+          <a:p>
+            <a:pPr>
+              <a:spcAft>
+                <a:spcPts val="500"/>
+              </a:spcAft>
+              <a:defRPr sz="1700">
+                <a:solidFill>
+                  <a:srgbClr val="1F2328"/>
+                </a:solidFill>
+              </a:defRPr>
+            </a:pPr>
+            <a:r>
+              <a:t>• Метрики: recall по классам и сложности, шум на заведомо чистом документе, anchoring (доля верифицированных цитат), разброс между прогонами, цена (вызовы, токены)</a:t>
+            </a:r>
+          </a:p>
+          <a:p>
+            <a:pPr>
+              <a:spcAft>
+                <a:spcPts val="500"/>
+              </a:spcAft>
+              <a:defRPr sz="1700">
+                <a:solidFill>
+                  <a:srgbClr val="1F2328"/>
+                </a:solidFill>
+              </a:defRPr>
+            </a:pPr>
+            <a:r>
+              <a:t>• Бенч «варианты × цели» → матрица ошибок «вариант × класс»: слепые зоны (не ловит никто) и уникальные вклады (ловит один)</a:t>
+            </a:r>
+          </a:p>
+          <a:p>
+            <a:pPr>
+              <a:spcAft>
+                <a:spcPts val="500"/>
+              </a:spcAft>
+              <a:defRPr sz="1700">
+                <a:solidFill>
+                  <a:srgbClr val="1F2328"/>
+                </a:solidFill>
+              </a:defRPr>
+            </a:pPr>
+            <a:r>
+              <a:t>• Правило журнала: файл эксперимента с вопросом и ожиданием — до прогона; 16 экспериментов за трое суток</a:t>
             </a:r>
           </a:p>
         </p:txBody>
@@ -4555,8 +7662,8 @@
         </p:nvSpPr>
         <p:spPr>
           <a:xfrm>
-            <a:off x="640080" y="6263640"/>
-            <a:ext cx="10881360" cy="457200"/>
+            <a:off x="548640" y="6263640"/>
+            <a:ext cx="11155680" cy="457200"/>
           </a:xfrm>
           <a:prstGeom prst="rect">
             <a:avLst/>
@@ -4564,7 +7671,7 @@
           <a:noFill/>
         </p:spPr>
         <p:txBody>
-          <a:bodyPr wrap="none">
+          <a:bodyPr wrap="square">
             <a:spAutoFit/>
           </a:bodyPr>
           <a:lstStyle/>
@@ -4577,7 +7684,7 @@
               </a:defRPr>
             </a:pPr>
             <a:r>
-              <a:t>Что взяли у сильных решений: PR-Agent (бинарные вопросы с цитатой), CodeRabbit (этажи конвейера), Greptile (критик), QVscribe (детерминированное ядро), Bugbot (консенсус)</a:t>
+              <a:t>Правило проекта: любое решение = «было → стало» цифрами + команда воспроизведения. experiments/README.md</a:t>
             </a:r>
           </a:p>
         </p:txBody>
@@ -4609,7 +7716,7 @@
         <p:spPr>
           <a:xfrm>
             <a:off x="548640" y="274320"/>
-            <a:ext cx="10972800" cy="731520"/>
+            <a:ext cx="11155680" cy="822960"/>
           </a:xfrm>
           <a:prstGeom prst="rect">
             <a:avLst/>
@@ -4623,42 +7730,728 @@
           <a:lstStyle/>
           <a:p>
             <a:pPr>
-              <a:defRPr sz="2800" b="1">
-                <a:solidFill>
-                  <a:srgbClr val="1F2328"/>
-                </a:solidFill>
-              </a:defRPr>
-            </a:pPr>
-            <a:r>
-              <a:t>Схема решения</a:t>
-            </a:r>
-          </a:p>
-        </p:txBody>
-      </p:sp>
-      <p:pic>
-        <p:nvPicPr>
-          <p:cNvPr id="3" name="Picture 2" descr="architecture.png"/>
-          <p:cNvPicPr>
-            <a:picLocks noChangeAspect="1"/>
-          </p:cNvPicPr>
-          <p:nvPr/>
-        </p:nvPicPr>
-        <p:blipFill>
-          <a:blip r:embed="rId2"/>
-          <a:stretch>
-            <a:fillRect/>
-          </a:stretch>
-        </p:blipFill>
-        <p:spPr>
-          <a:xfrm>
-            <a:off x="365760" y="1051560"/>
-            <a:ext cx="11430000" cy="5803801"/>
-          </a:xfrm>
-          <a:prstGeom prst="rect">
-            <a:avLst/>
-          </a:prstGeom>
-        </p:spPr>
-      </p:pic>
+              <a:defRPr sz="2600" b="1">
+                <a:solidFill>
+                  <a:srgbClr val="1F2328"/>
+                </a:solidFill>
+              </a:defRPr>
+            </a:pPr>
+            <a:r>
+              <a:t>Гипотезы и что с ними стало</a:t>
+            </a:r>
+          </a:p>
+        </p:txBody>
+      </p:sp>
+      <p:graphicFrame>
+        <p:nvGraphicFramePr>
+          <p:cNvPr id="3" name="Table 2"/>
+          <p:cNvGraphicFramePr>
+            <a:graphicFrameLocks noGrp="1"/>
+          </p:cNvGraphicFramePr>
+          <p:nvPr/>
+        </p:nvGraphicFramePr>
+        <p:xfrm>
+          <a:off x="548640" y="1188720"/>
+          <a:ext cx="11064240" cy="3822192"/>
+        </p:xfrm>
+        <a:graphic>
+          <a:graphicData uri="http://schemas.openxmlformats.org/drawingml/2006/table">
+            <a:tbl>
+              <a:tblPr firstRow="1" bandRow="1">
+                <a:tableStyleId>{5C22544A-7EE6-4342-B048-85BDC9FD1C3A}</a:tableStyleId>
+              </a:tblPr>
+              <a:tblGrid>
+                <a:gridCol w="3566160"/>
+                <a:gridCol w="1280160"/>
+                <a:gridCol w="4846320"/>
+                <a:gridCol w="1371600"/>
+              </a:tblGrid>
+              <a:tr h="347472">
+                <a:tc>
+                  <a:txBody>
+                    <a:bodyPr/>
+                    <a:lstStyle/>
+                    <a:p>
+                      <a:pPr>
+                        <a:defRPr sz="1100" b="1"/>
+                      </a:pPr>
+                      <a:r>
+                        <a:t>Гипотеза</a:t>
+                      </a:r>
+                    </a:p>
+                  </a:txBody>
+                  <a:tcPr/>
+                </a:tc>
+                <a:tc>
+                  <a:txBody>
+                    <a:bodyPr/>
+                    <a:lstStyle/>
+                    <a:p>
+                      <a:pPr>
+                        <a:defRPr sz="1100" b="1"/>
+                      </a:pPr>
+                      <a:r>
+                        <a:t>Эксперимент</a:t>
+                      </a:r>
+                    </a:p>
+                  </a:txBody>
+                  <a:tcPr/>
+                </a:tc>
+                <a:tc>
+                  <a:txBody>
+                    <a:bodyPr/>
+                    <a:lstStyle/>
+                    <a:p>
+                      <a:pPr>
+                        <a:defRPr sz="1100" b="1"/>
+                      </a:pPr>
+                      <a:r>
+                        <a:t>Результат</a:t>
+                      </a:r>
+                    </a:p>
+                  </a:txBody>
+                  <a:tcPr/>
+                </a:tc>
+                <a:tc>
+                  <a:txBody>
+                    <a:bodyPr/>
+                    <a:lstStyle/>
+                    <a:p>
+                      <a:pPr>
+                        <a:defRPr sz="1100" b="1"/>
+                      </a:pPr>
+                      <a:r>
+                        <a:t>Вердикт</a:t>
+                      </a:r>
+                    </a:p>
+                  </a:txBody>
+                  <a:tcPr/>
+                </a:tc>
+              </a:tr>
+              <a:tr h="347472">
+                <a:tc>
+                  <a:txBody>
+                    <a:bodyPr/>
+                    <a:lstStyle/>
+                    <a:p>
+                      <a:pPr>
+                        <a:defRPr sz="1100"/>
+                      </a:pPr>
+                      <a:r>
+                        <a:t>H1 Граф сущностей из заглушек обезличивания</a:t>
+                      </a:r>
+                    </a:p>
+                  </a:txBody>
+                  <a:tcPr/>
+                </a:tc>
+                <a:tc>
+                  <a:txBody>
+                    <a:bodyPr/>
+                    <a:lstStyle/>
+                    <a:p>
+                      <a:pPr>
+                        <a:defRPr sz="1100"/>
+                      </a:pPr>
+                      <a:r>
+                        <a:t>EXP-01</a:t>
+                      </a:r>
+                    </a:p>
+                  </a:txBody>
+                  <a:tcPr/>
+                </a:tc>
+                <a:tc>
+                  <a:txBody>
+                    <a:bodyPr/>
+                    <a:lstStyle/>
+                    <a:p>
+                      <a:pPr>
+                        <a:defRPr sz="1100"/>
+                      </a:pPr>
+                      <a:r>
+                        <a:t>synth 2/12 → 5/12, doc3 +critical, 0 ложных, 0 вызовов LLM</a:t>
+                      </a:r>
+                    </a:p>
+                  </a:txBody>
+                  <a:tcPr/>
+                </a:tc>
+                <a:tc>
+                  <a:txBody>
+                    <a:bodyPr/>
+                    <a:lstStyle/>
+                    <a:p>
+                      <a:pPr>
+                        <a:defRPr sz="1100"/>
+                      </a:pPr>
+                      <a:r>
+                        <a:t>в прод</a:t>
+                      </a:r>
+                    </a:p>
+                  </a:txBody>
+                  <a:tcPr/>
+                </a:tc>
+              </a:tr>
+              <a:tr h="347472">
+                <a:tc>
+                  <a:txBody>
+                    <a:bodyPr/>
+                    <a:lstStyle/>
+                    <a:p>
+                      <a:pPr>
+                        <a:defRPr sz="1100"/>
+                      </a:pPr>
+                      <a:r>
+                        <a:t>Лестница промпта: цитаты → таксономия → обезличивание</a:t>
+                      </a:r>
+                    </a:p>
+                  </a:txBody>
+                  <a:tcPr/>
+                </a:tc>
+                <a:tc>
+                  <a:txBody>
+                    <a:bodyPr/>
+                    <a:lstStyle/>
+                    <a:p>
+                      <a:pPr>
+                        <a:defRPr sz="1100"/>
+                      </a:pPr>
+                      <a:r>
+                        <a:t>EXP-02</a:t>
+                      </a:r>
+                    </a:p>
+                  </a:txBody>
+                  <a:tcPr/>
+                </a:tc>
+                <a:tc>
+                  <a:txBody>
+                    <a:bodyPr/>
+                    <a:lstStyle/>
+                    <a:p>
+                      <a:pPr>
+                        <a:defRPr sz="1100"/>
+                      </a:pPr>
+                      <a:r>
+                        <a:t>таксономия +3 recall; обезличивание +2 и −40% шума; цитаты recall не двигают, но питают верификацию</a:t>
+                      </a:r>
+                    </a:p>
+                  </a:txBody>
+                  <a:tcPr/>
+                </a:tc>
+                <a:tc>
+                  <a:txBody>
+                    <a:bodyPr/>
+                    <a:lstStyle/>
+                    <a:p>
+                      <a:pPr>
+                        <a:defRPr sz="1100"/>
+                      </a:pPr>
+                      <a:r>
+                        <a:t>выводы сняты</a:t>
+                      </a:r>
+                    </a:p>
+                  </a:txBody>
+                  <a:tcPr/>
+                </a:tc>
+              </a:tr>
+              <a:tr h="347472">
+                <a:tc>
+                  <a:txBody>
+                    <a:bodyPr/>
+                    <a:lstStyle/>
+                    <a:p>
+                      <a:pPr>
+                        <a:defRPr sz="1100"/>
+                      </a:pPr>
+                      <a:r>
+                        <a:t>Длина контекста</a:t>
+                      </a:r>
+                    </a:p>
+                  </a:txBody>
+                  <a:tcPr/>
+                </a:tc>
+                <a:tc>
+                  <a:txBody>
+                    <a:bodyPr/>
+                    <a:lstStyle/>
+                    <a:p>
+                      <a:pPr>
+                        <a:defRPr sz="1100"/>
+                      </a:pPr>
+                      <a:r>
+                        <a:t>EXP-03</a:t>
+                      </a:r>
+                    </a:p>
+                  </a:txBody>
+                  <a:tcPr/>
+                </a:tc>
+                <a:tc>
+                  <a:txBody>
+                    <a:bodyPr/>
+                    <a:lstStyle/>
+                    <a:p>
+                      <a:pPr>
+                        <a:defRPr sz="1100"/>
+                      </a:pPr>
+                      <a:r>
+                        <a:t>обрыв recall ×3 на ~28k символов; A-класс умирает первым; anchoring 100% → 47%</a:t>
+                      </a:r>
+                    </a:p>
+                  </a:txBody>
+                  <a:tcPr/>
+                </a:tc>
+                <a:tc>
+                  <a:txBody>
+                    <a:bodyPr/>
+                    <a:lstStyle/>
+                    <a:p>
+                      <a:pPr>
+                        <a:defRPr sz="1100"/>
+                      </a:pPr>
+                      <a:r>
+                        <a:t>чанкование — план</a:t>
+                      </a:r>
+                    </a:p>
+                  </a:txBody>
+                  <a:tcPr/>
+                </a:tc>
+              </a:tr>
+              <a:tr h="347472">
+                <a:tc>
+                  <a:txBody>
+                    <a:bodyPr/>
+                    <a:lstStyle/>
+                    <a:p>
+                      <a:pPr>
+                        <a:defRPr sz="1100"/>
+                      </a:pPr>
+                      <a:r>
+                        <a:t>H5 «Компиляция ТЗ» (план реализации с журналом допущений)</a:t>
+                      </a:r>
+                    </a:p>
+                  </a:txBody>
+                  <a:tcPr/>
+                </a:tc>
+                <a:tc>
+                  <a:txBody>
+                    <a:bodyPr/>
+                    <a:lstStyle/>
+                    <a:p>
+                      <a:pPr>
+                        <a:defRPr sz="1100"/>
+                      </a:pPr>
+                      <a:r>
+                        <a:t>EXP-05</a:t>
+                      </a:r>
+                    </a:p>
+                  </a:txBody>
+                  <a:tcPr/>
+                </a:tc>
+                <a:tc>
+                  <a:txBody>
+                    <a:bodyPr/>
+                    <a:lstStyle/>
+                    <a:p>
+                      <a:pPr>
+                        <a:defRPr sz="1100"/>
+                      </a:pPr>
+                      <a:r>
+                        <a:t>+2 на doc3 в ансамбле; самый чистый проход (шум 5)</a:t>
+                      </a:r>
+                    </a:p>
+                  </a:txBody>
+                  <a:tcPr/>
+                </a:tc>
+                <a:tc>
+                  <a:txBody>
+                    <a:bodyPr/>
+                    <a:lstStyle/>
+                    <a:p>
+                      <a:pPr>
+                        <a:defRPr sz="1100"/>
+                      </a:pPr>
+                      <a:r>
+                        <a:t>в прод (v3)</a:t>
+                      </a:r>
+                    </a:p>
+                  </a:txBody>
+                  <a:tcPr/>
+                </a:tc>
+              </a:tr>
+              <a:tr h="347472">
+                <a:tc>
+                  <a:txBody>
+                    <a:bodyPr/>
+                    <a:lstStyle/>
+                    <a:p>
+                      <a:pPr>
+                        <a:defRPr sz="1100"/>
+                      </a:pPr>
+                      <a:r>
+                        <a:t>Порог критика</a:t>
+                      </a:r>
+                    </a:p>
+                  </a:txBody>
+                  <a:tcPr/>
+                </a:tc>
+                <a:tc>
+                  <a:txBody>
+                    <a:bodyPr/>
+                    <a:lstStyle/>
+                    <a:p>
+                      <a:pPr>
+                        <a:defRPr sz="1100"/>
+                      </a:pPr>
+                      <a:r>
+                        <a:t>EXP-07</a:t>
+                      </a:r>
+                    </a:p>
+                  </a:txBody>
+                  <a:tcPr/>
+                </a:tc>
+                <a:tc>
+                  <a:txBody>
+                    <a:bodyPr/>
+                    <a:lstStyle/>
+                    <a:p>
+                      <a:pPr>
+                        <a:defRPr sz="1100"/>
+                      </a:pPr>
+                      <a:r>
+                        <a:t>θ=4: recall держится, хвост −40%; шум порогом не лечится</a:t>
+                      </a:r>
+                    </a:p>
+                  </a:txBody>
+                  <a:tcPr/>
+                </a:tc>
+                <a:tc>
+                  <a:txBody>
+                    <a:bodyPr/>
+                    <a:lstStyle/>
+                    <a:p>
+                      <a:pPr>
+                        <a:defRPr sz="1100"/>
+                      </a:pPr>
+                      <a:r>
+                        <a:t>принят; промпт критика — H11</a:t>
+                      </a:r>
+                    </a:p>
+                  </a:txBody>
+                  <a:tcPr/>
+                </a:tc>
+              </a:tr>
+              <a:tr h="347472">
+                <a:tc>
+                  <a:txBody>
+                    <a:bodyPr/>
+                    <a:lstStyle/>
+                    <a:p>
+                      <a:pPr>
+                        <a:defRPr sz="1100"/>
+                      </a:pPr>
+                      <a:r>
+                        <a:t>Подход D: семантическая энтропия</a:t>
+                      </a:r>
+                    </a:p>
+                  </a:txBody>
+                  <a:tcPr/>
+                </a:tc>
+                <a:tc>
+                  <a:txBody>
+                    <a:bodyPr/>
+                    <a:lstStyle/>
+                    <a:p>
+                      <a:pPr>
+                        <a:defRPr sz="1100"/>
+                      </a:pPr>
+                      <a:r>
+                        <a:t>EXP-09/14</a:t>
+                      </a:r>
+                    </a:p>
+                  </a:txBody>
+                  <a:tcPr/>
+                </a:tc>
+                <a:tc>
+                  <a:txBody>
+                    <a:bodyPr/>
+                    <a:lstStyle/>
+                    <a:p>
+                      <a:pPr>
+                        <a:defRPr sz="1100"/>
+                      </a:pPr>
+                      <a:r>
+                        <a:t>doc3 7/13 → 11/13 (it3); 16/16 (it6) при шуме 7</a:t>
+                      </a:r>
+                    </a:p>
+                  </a:txBody>
+                  <a:tcPr/>
+                </a:tc>
+                <a:tc>
+                  <a:txBody>
+                    <a:bodyPr/>
+                    <a:lstStyle/>
+                    <a:p>
+                      <a:pPr>
+                        <a:defRPr sz="1100"/>
+                      </a:pPr>
+                      <a:r>
+                        <a:t>в прод</a:t>
+                      </a:r>
+                    </a:p>
+                  </a:txBody>
+                  <a:tcPr/>
+                </a:tc>
+              </a:tr>
+              <a:tr h="347472">
+                <a:tc>
+                  <a:txBody>
+                    <a:bodyPr/>
+                    <a:lstStyle/>
+                    <a:p>
+                      <a:pPr>
+                        <a:defRPr sz="1100"/>
+                      </a:pPr>
+                      <a:r>
+                        <a:t>H10 Логит-зонд вместо сэмплирования</a:t>
+                      </a:r>
+                    </a:p>
+                  </a:txBody>
+                  <a:tcPr/>
+                </a:tc>
+                <a:tc>
+                  <a:txBody>
+                    <a:bodyPr/>
+                    <a:lstStyle/>
+                    <a:p>
+                      <a:pPr>
+                        <a:defRPr sz="1100"/>
+                      </a:pPr>
+                      <a:r>
+                        <a:t>EXP-11/13/14</a:t>
+                      </a:r>
+                    </a:p>
+                  </a:txBody>
+                  <a:tcPr/>
+                </a:tc>
+                <a:tc>
+                  <a:txBody>
+                    <a:bodyPr/>
+                    <a:lstStyle/>
+                    <a:p>
+                      <a:pPr>
+                        <a:defRPr sz="1100"/>
+                      </a:pPr>
+                      <a:r>
+                        <a:t>×0.1 цены; B-класс 9/9; единственный ловил анафору; doc3 16/16</a:t>
+                      </a:r>
+                    </a:p>
+                  </a:txBody>
+                  <a:tcPr/>
+                </a:tc>
+                <a:tc>
+                  <a:txBody>
+                    <a:bodyPr/>
+                    <a:lstStyle/>
+                    <a:p>
+                      <a:pPr>
+                        <a:defRPr sz="1100"/>
+                      </a:pPr>
+                      <a:r>
+                        <a:t>в прод</a:t>
+                      </a:r>
+                    </a:p>
+                  </a:txBody>
+                  <a:tcPr/>
+                </a:tc>
+              </a:tr>
+              <a:tr h="347472">
+                <a:tc>
+                  <a:txBody>
+                    <a:bodyPr/>
+                    <a:lstStyle/>
+                    <a:p>
+                      <a:pPr>
+                        <a:defRPr sz="1100"/>
+                      </a:pPr>
+                      <a:r>
+                        <a:t>Официальные пункты МТС как слоты + защита от критика</a:t>
+                      </a:r>
+                    </a:p>
+                  </a:txBody>
+                  <a:tcPr/>
+                </a:tc>
+                <a:tc>
+                  <a:txBody>
+                    <a:bodyPr/>
+                    <a:lstStyle/>
+                    <a:p>
+                      <a:pPr>
+                        <a:defRPr sz="1100"/>
+                      </a:pPr>
+                      <a:r>
+                        <a:t>EXP-13/14</a:t>
+                      </a:r>
+                    </a:p>
+                  </a:txBody>
+                  <a:tcPr/>
+                </a:tc>
+                <a:tc>
+                  <a:txBody>
+                    <a:bodyPr/>
+                    <a:lstStyle/>
+                    <a:p>
+                      <a:pPr>
+                        <a:defRPr sz="1100"/>
+                      </a:pPr>
+                      <a:r>
+                        <a:t>A-класс v3official 3/7 → 7/7</a:t>
+                      </a:r>
+                    </a:p>
+                  </a:txBody>
+                  <a:tcPr/>
+                </a:tc>
+                <a:tc>
+                  <a:txBody>
+                    <a:bodyPr/>
+                    <a:lstStyle/>
+                    <a:p>
+                      <a:pPr>
+                        <a:defRPr sz="1100"/>
+                      </a:pPr>
+                      <a:r>
+                        <a:t>в прод</a:t>
+                      </a:r>
+                    </a:p>
+                  </a:txBody>
+                  <a:tcPr/>
+                </a:tc>
+              </a:tr>
+              <a:tr h="347472">
+                <a:tc>
+                  <a:txBody>
+                    <a:bodyPr/>
+                    <a:lstStyle/>
+                    <a:p>
+                      <a:pPr>
+                        <a:defRPr sz="1100"/>
+                      </a:pPr>
+                      <a:r>
+                        <a:t>Исход «не применимо» у слота</a:t>
+                      </a:r>
+                    </a:p>
+                  </a:txBody>
+                  <a:tcPr/>
+                </a:tc>
+                <a:tc>
+                  <a:txBody>
+                    <a:bodyPr/>
+                    <a:lstStyle/>
+                    <a:p>
+                      <a:pPr>
+                        <a:defRPr sz="1100"/>
+                      </a:pPr>
+                      <a:r>
+                        <a:t>EXP-16</a:t>
+                      </a:r>
+                    </a:p>
+                  </a:txBody>
+                  <a:tcPr/>
+                </a:tc>
+                <a:tc>
+                  <a:txBody>
+                    <a:bodyPr/>
+                    <a:lstStyle/>
+                    <a:p>
+                      <a:pPr>
+                        <a:defRPr sz="1100"/>
+                      </a:pPr>
+                      <a:r>
+                        <a:t>шум 120b 11 → 7 без потери пунктов МТС</a:t>
+                      </a:r>
+                    </a:p>
+                  </a:txBody>
+                  <a:tcPr/>
+                </a:tc>
+                <a:tc>
+                  <a:txBody>
+                    <a:bodyPr/>
+                    <a:lstStyle/>
+                    <a:p>
+                      <a:pPr>
+                        <a:defRPr sz="1100"/>
+                      </a:pPr>
+                      <a:r>
+                        <a:t>в прод</a:t>
+                      </a:r>
+                    </a:p>
+                  </a:txBody>
+                  <a:tcPr/>
+                </a:tc>
+              </a:tr>
+              <a:tr h="347472">
+                <a:tc>
+                  <a:txBody>
+                    <a:bodyPr/>
+                    <a:lstStyle/>
+                    <a:p>
+                      <a:pPr>
+                        <a:defRPr sz="1100"/>
+                      </a:pPr>
+                      <a:r>
+                        <a:t>Модель — параметр (лестница Qwen-14B / gpt-oss-120b / GPT-5.5)</a:t>
+                      </a:r>
+                    </a:p>
+                  </a:txBody>
+                  <a:tcPr/>
+                </a:tc>
+                <a:tc>
+                  <a:txBody>
+                    <a:bodyPr/>
+                    <a:lstStyle/>
+                    <a:p>
+                      <a:pPr>
+                        <a:defRPr sz="1100"/>
+                      </a:pPr>
+                      <a:r>
+                        <a:t>ночь, EXP-15</a:t>
+                      </a:r>
+                    </a:p>
+                  </a:txBody>
+                  <a:tcPr/>
+                </a:tc>
+                <a:tc>
+                  <a:txBody>
+                    <a:bodyPr/>
+                    <a:lstStyle/>
+                    <a:p>
+                      <a:pPr>
+                        <a:defRPr sz="1100"/>
+                      </a:pPr>
+                      <a:r>
+                        <a:t>модель решает сильнее архитектуры, но детерминированные слои модели не видят</a:t>
+                      </a:r>
+                    </a:p>
+                  </a:txBody>
+                  <a:tcPr/>
+                </a:tc>
+                <a:tc>
+                  <a:txBody>
+                    <a:bodyPr/>
+                    <a:lstStyle/>
+                    <a:p>
+                      <a:pPr>
+                        <a:defRPr sz="1100"/>
+                      </a:pPr>
+                      <a:r>
+                        <a:t>лестница</a:t>
+                      </a:r>
+                    </a:p>
+                  </a:txBody>
+                  <a:tcPr/>
+                </a:tc>
+              </a:tr>
+            </a:tbl>
+          </a:graphicData>
+        </a:graphic>
+      </p:graphicFrame>
     </p:spTree>
   </p:cSld>
   <p:clrMapOvr>
@@ -4685,8 +8478,8 @@
         </p:nvSpPr>
         <p:spPr>
           <a:xfrm>
-            <a:off x="548640" y="320040"/>
-            <a:ext cx="10972800" cy="822960"/>
+            <a:off x="548640" y="274320"/>
+            <a:ext cx="11155680" cy="822960"/>
           </a:xfrm>
           <a:prstGeom prst="rect">
             <a:avLst/>
@@ -4700,300 +8493,77 @@
           <a:lstStyle/>
           <a:p>
             <a:pPr>
-              <a:defRPr sz="2800" b="1">
-                <a:solidFill>
-                  <a:srgbClr val="1F2328"/>
-                </a:solidFill>
-              </a:defRPr>
-            </a:pPr>
-            <a:r>
-              <a:t>Выполненные этапы</a:t>
-            </a:r>
-          </a:p>
-        </p:txBody>
-      </p:sp>
-      <p:graphicFrame>
-        <p:nvGraphicFramePr>
-          <p:cNvPr id="3" name="Table 2"/>
-          <p:cNvGraphicFramePr>
-            <a:graphicFrameLocks noGrp="1"/>
-          </p:cNvGraphicFramePr>
-          <p:nvPr/>
-        </p:nvGraphicFramePr>
-        <p:xfrm>
-          <a:off x="548640" y="1280160"/>
-          <a:ext cx="11064240" cy="2926080"/>
-        </p:xfrm>
-        <a:graphic>
-          <a:graphicData uri="http://schemas.openxmlformats.org/drawingml/2006/table">
-            <a:tbl>
-              <a:tblPr firstRow="1" bandRow="1">
-                <a:tableStyleId>{5C22544A-7EE6-4342-B048-85BDC9FD1C3A}</a:tableStyleId>
-              </a:tblPr>
-              <a:tblGrid>
-                <a:gridCol w="8503920"/>
-                <a:gridCol w="2560320"/>
-              </a:tblGrid>
-              <a:tr h="365760">
-                <a:tc>
-                  <a:txBody>
-                    <a:bodyPr/>
-                    <a:lstStyle/>
-                    <a:p>
-                      <a:pPr>
-                        <a:defRPr sz="1300" b="1"/>
-                      </a:pPr>
-                      <a:r>
-                        <a:t>Этап</a:t>
-                      </a:r>
-                    </a:p>
-                  </a:txBody>
-                  <a:tcPr/>
-                </a:tc>
-                <a:tc>
-                  <a:txBody>
-                    <a:bodyPr/>
-                    <a:lstStyle/>
-                    <a:p>
-                      <a:pPr>
-                        <a:defRPr sz="1300" b="1"/>
-                      </a:pPr>
-                      <a:r>
-                        <a:t>Состояние</a:t>
-                      </a:r>
-                    </a:p>
-                  </a:txBody>
-                  <a:tcPr/>
-                </a:tc>
-              </a:tr>
-              <a:tr h="365760">
-                <a:tc>
-                  <a:txBody>
-                    <a:bodyPr/>
-                    <a:lstStyle/>
-                    <a:p>
-                      <a:pPr>
-                        <a:defRPr sz="1300"/>
-                      </a:pPr>
-                      <a:r>
-                        <a:t>Рисёрч: академия RE, коммерческие ревьюеры кода/требований, таксономия дефектов (35 кодов)</a:t>
-                      </a:r>
-                    </a:p>
-                  </a:txBody>
-                  <a:tcPr/>
-                </a:tc>
-                <a:tc>
-                  <a:txBody>
-                    <a:bodyPr/>
-                    <a:lstStyle/>
-                    <a:p>
-                      <a:pPr>
-                        <a:defRPr sz="1300"/>
-                      </a:pPr>
-                      <a:r>
-                        <a:t>готово</a:t>
-                      </a:r>
-                    </a:p>
-                  </a:txBody>
-                  <a:tcPr/>
-                </a:tc>
-              </a:tr>
-              <a:tr h="365760">
-                <a:tc>
-                  <a:txBody>
-                    <a:bodyPr/>
-                    <a:lstStyle/>
-                    <a:p>
-                      <a:pPr>
-                        <a:defRPr sz="1300"/>
-                      </a:pPr>
-                      <a:r>
-                        <a:t>Конвейер tz_review, 7 проходов, 46 юнит-тестов</a:t>
-                      </a:r>
-                    </a:p>
-                  </a:txBody>
-                  <a:tcPr/>
-                </a:tc>
-                <a:tc>
-                  <a:txBody>
-                    <a:bodyPr/>
-                    <a:lstStyle/>
-                    <a:p>
-                      <a:pPr>
-                        <a:defRPr sz="1300"/>
-                      </a:pPr>
-                      <a:r>
-                        <a:t>готово, main</a:t>
-                      </a:r>
-                    </a:p>
-                  </a:txBody>
-                  <a:tcPr/>
-                </a:tc>
-              </a:tr>
-              <a:tr h="365760">
-                <a:tc>
-                  <a:txBody>
-                    <a:bodyPr/>
-                    <a:lstStyle/>
-                    <a:p>
-                      <a:pPr>
-                        <a:defRPr sz="1300"/>
-                      </a:pPr>
-                      <a:r>
-                        <a:t>Официальная рубрика МТС: шаблон 20 разделов + 8 пунктов как слоты</a:t>
-                      </a:r>
-                    </a:p>
-                  </a:txBody>
-                  <a:tcPr/>
-                </a:tc>
-                <a:tc>
-                  <a:txBody>
-                    <a:bodyPr/>
-                    <a:lstStyle/>
-                    <a:p>
-                      <a:pPr>
-                        <a:defRPr sz="1300"/>
-                      </a:pPr>
-                      <a:r>
-                        <a:t>готово</a:t>
-                      </a:r>
-                    </a:p>
-                  </a:txBody>
-                  <a:tcPr/>
-                </a:tc>
-              </a:tr>
-              <a:tr h="365760">
-                <a:tc>
-                  <a:txBody>
-                    <a:bodyPr/>
-                    <a:lstStyle/>
-                    <a:p>
-                      <a:pPr>
-                        <a:defRPr sz="1300"/>
-                      </a:pPr>
-                      <a:r>
-                        <a:t>Голды документов МТС (36 дефектов) + фабрика синтетики (33 инъекции, 7 итераций)</a:t>
-                      </a:r>
-                    </a:p>
-                  </a:txBody>
-                  <a:tcPr/>
-                </a:tc>
-                <a:tc>
-                  <a:txBody>
-                    <a:bodyPr/>
-                    <a:lstStyle/>
-                    <a:p>
-                      <a:pPr>
-                        <a:defRPr sz="1300"/>
-                      </a:pPr>
-                      <a:r>
-                        <a:t>готово, разметка черновая</a:t>
-                      </a:r>
-                    </a:p>
-                  </a:txBody>
-                  <a:tcPr/>
-                </a:tc>
-              </a:tr>
-              <a:tr h="365760">
-                <a:tc>
-                  <a:txBody>
-                    <a:bodyPr/>
-                    <a:lstStyle/>
-                    <a:p>
-                      <a:pPr>
-                        <a:defRPr sz="1300"/>
-                      </a:pPr>
-                      <a:r>
-                        <a:t>Бенч, матрица ошибок «вариант × класс», канарейка, журнал 16 экспериментов</a:t>
-                      </a:r>
-                    </a:p>
-                  </a:txBody>
-                  <a:tcPr/>
-                </a:tc>
-                <a:tc>
-                  <a:txBody>
-                    <a:bodyPr/>
-                    <a:lstStyle/>
-                    <a:p>
-                      <a:pPr>
-                        <a:defRPr sz="1300"/>
-                      </a:pPr>
-                      <a:r>
-                        <a:t>готово</a:t>
-                      </a:r>
-                    </a:p>
-                  </a:txBody>
-                  <a:tcPr/>
-                </a:tc>
-              </a:tr>
-              <a:tr h="365760">
-                <a:tc>
-                  <a:txBody>
-                    <a:bodyPr/>
-                    <a:lstStyle/>
-                    <a:p>
-                      <a:pPr>
-                        <a:defRPr sz="1300"/>
-                      </a:pPr>
-                      <a:r>
-                        <a:t>Compose-контур: api + UI, docs, RabbitMQ, worker, Postgres, Prometheus, Grafana</a:t>
-                      </a:r>
-                    </a:p>
-                  </a:txBody>
-                  <a:tcPr/>
-                </a:tc>
-                <a:tc>
-                  <a:txBody>
-                    <a:bodyPr/>
-                    <a:lstStyle/>
-                    <a:p>
-                      <a:pPr>
-                        <a:defRPr sz="1300"/>
-                      </a:pPr>
-                      <a:r>
-                        <a:t>работает</a:t>
-                      </a:r>
-                    </a:p>
-                  </a:txBody>
-                  <a:tcPr/>
-                </a:tc>
-              </a:tr>
-              <a:tr h="365760">
-                <a:tc>
-                  <a:txBody>
-                    <a:bodyPr/>
-                    <a:lstStyle/>
-                    <a:p>
-                      <a:pPr>
-                        <a:defRPr sz="1300"/>
-                      </a:pPr>
-                      <a:r>
-                        <a:t>Self-hosted gpt-oss-120b (RunPod H100); сквозной сценарий PDF → отчёт</a:t>
-                      </a:r>
-                    </a:p>
-                  </a:txBody>
-                  <a:tcPr/>
-                </a:tc>
-                <a:tc>
-                  <a:txBody>
-                    <a:bodyPr/>
-                    <a:lstStyle/>
-                    <a:p>
-                      <a:pPr>
-                        <a:defRPr sz="1300"/>
-                      </a:pPr>
-                      <a:r>
-                        <a:t>работает; vLLM — план</a:t>
-                      </a:r>
-                    </a:p>
-                  </a:txBody>
-                  <a:tcPr/>
-                </a:tc>
-              </a:tr>
-            </a:tbl>
-          </a:graphicData>
-        </a:graphic>
-      </p:graphicFrame>
+              <a:defRPr sz="2600" b="1">
+                <a:solidFill>
+                  <a:srgbClr val="1F2328"/>
+                </a:solidFill>
+              </a:defRPr>
+            </a:pPr>
+            <a:r>
+              <a:t>Почему не «один промпт»: лестница и три дыры, найденные бенчем</a:t>
+            </a:r>
+          </a:p>
+        </p:txBody>
+      </p:sp>
+      <p:pic>
+        <p:nvPicPr>
+          <p:cNvPr id="3" name="Picture 2" descr="fixes.png"/>
+          <p:cNvPicPr>
+            <a:picLocks noChangeAspect="1"/>
+          </p:cNvPicPr>
+          <p:nvPr/>
+        </p:nvPicPr>
+        <p:blipFill>
+          <a:blip r:embed="rId2"/>
+          <a:stretch>
+            <a:fillRect/>
+          </a:stretch>
+        </p:blipFill>
+        <p:spPr>
+          <a:xfrm>
+            <a:off x="335127" y="1143000"/>
+            <a:ext cx="11521440" cy="3144883"/>
+          </a:xfrm>
+          <a:prstGeom prst="rect">
+            <a:avLst/>
+          </a:prstGeom>
+        </p:spPr>
+      </p:pic>
+      <p:sp>
+        <p:nvSpPr>
+          <p:cNvPr id="4" name="TextBox 3"/>
+          <p:cNvSpPr txBox="1"/>
+          <p:nvPr/>
+        </p:nvSpPr>
+        <p:spPr>
+          <a:xfrm>
+            <a:off x="548640" y="6263640"/>
+            <a:ext cx="11155680" cy="457200"/>
+          </a:xfrm>
+          <a:prstGeom prst="rect">
+            <a:avLst/>
+          </a:prstGeom>
+          <a:noFill/>
+        </p:spPr>
+        <p:txBody>
+          <a:bodyPr wrap="square">
+            <a:spAutoFit/>
+          </a:bodyPr>
+          <a:lstStyle/>
+          <a:p>
+            <a:pPr>
+              <a:defRPr sz="1100">
+                <a:solidFill>
+                  <a:srgbClr val="6B7280"/>
+                </a:solidFill>
+              </a:defRPr>
+            </a:pPr>
+            <a:r>
+              <a:t>Промпт-бейзлайн GPT-5.5: слеп к официальному шаблону (0 из 6) и промахивает лёгкое (3 из 9). Три дыры EXP-13: критик резал верные находки по пунктам МТС (score 0), треть слотов чеклиста терялась молча, табличные цитаты не верифицировались.</a:t>
+            </a:r>
+          </a:p>
+        </p:txBody>
+      </p:sp>
     </p:spTree>
   </p:cSld>
   <p:clrMapOvr>
@@ -5020,8 +8590,8 @@
         </p:nvSpPr>
         <p:spPr>
           <a:xfrm>
-            <a:off x="548640" y="320040"/>
-            <a:ext cx="10972800" cy="822960"/>
+            <a:off x="548640" y="274320"/>
+            <a:ext cx="11155680" cy="822960"/>
           </a:xfrm>
           <a:prstGeom prst="rect">
             <a:avLst/>
@@ -5035,692 +8605,42 @@
           <a:lstStyle/>
           <a:p>
             <a:pPr>
-              <a:defRPr sz="2800" b="1">
-                <a:solidFill>
-                  <a:srgbClr val="1F2328"/>
-                </a:solidFill>
-              </a:defRPr>
-            </a:pPr>
-            <a:r>
-              <a:t>Первые результаты: recall по размеченным дефектам</a:t>
-            </a:r>
-          </a:p>
-        </p:txBody>
-      </p:sp>
-      <p:graphicFrame>
-        <p:nvGraphicFramePr>
-          <p:cNvPr id="3" name="Table 2"/>
-          <p:cNvGraphicFramePr>
-            <a:graphicFrameLocks noGrp="1"/>
-          </p:cNvGraphicFramePr>
-          <p:nvPr/>
-        </p:nvGraphicFramePr>
-        <p:xfrm>
-          <a:off x="548640" y="1280160"/>
-          <a:ext cx="10881360" cy="2560320"/>
-        </p:xfrm>
-        <a:graphic>
-          <a:graphicData uri="http://schemas.openxmlformats.org/drawingml/2006/table">
-            <a:tbl>
-              <a:tblPr firstRow="1" bandRow="1">
-                <a:tableStyleId>{5C22544A-7EE6-4342-B048-85BDC9FD1C3A}</a:tableStyleId>
-              </a:tblPr>
-              <a:tblGrid>
-                <a:gridCol w="3291840"/>
-                <a:gridCol w="1554480"/>
-                <a:gridCol w="1920240"/>
-                <a:gridCol w="1371600"/>
-                <a:gridCol w="1280160"/>
-                <a:gridCol w="1463040"/>
-              </a:tblGrid>
-              <a:tr h="365760">
-                <a:tc>
-                  <a:txBody>
-                    <a:bodyPr/>
-                    <a:lstStyle/>
-                    <a:p>
-                      <a:pPr>
-                        <a:defRPr sz="1300" b="1"/>
-                      </a:pPr>
-                      <a:r>
-                        <a:t>Вариант</a:t>
-                      </a:r>
-                    </a:p>
-                  </a:txBody>
-                  <a:tcPr/>
-                </a:tc>
-                <a:tc>
-                  <a:txBody>
-                    <a:bodyPr/>
-                    <a:lstStyle/>
-                    <a:p>
-                      <a:pPr>
-                        <a:defRPr sz="1300" b="1"/>
-                      </a:pPr>
-                      <a:r>
-                        <a:t>doc3 витрина (16)</a:t>
-                      </a:r>
-                    </a:p>
-                  </a:txBody>
-                  <a:tcPr/>
-                </a:tc>
-                <a:tc>
-                  <a:txBody>
-                    <a:bodyPr/>
-                    <a:lstStyle/>
-                    <a:p>
-                      <a:pPr>
-                        <a:defRPr sz="1300" b="1"/>
-                      </a:pPr>
-                      <a:r>
-                        <a:t>пункты МТС, synth (13)</a:t>
-                      </a:r>
-                    </a:p>
-                  </a:txBody>
-                  <a:tcPr/>
-                </a:tc>
-                <a:tc>
-                  <a:txBody>
-                    <a:bodyPr/>
-                    <a:lstStyle/>
-                    <a:p>
-                      <a:pPr>
-                        <a:defRPr sz="1300" b="1"/>
-                      </a:pPr>
-                      <a:r>
-                        <a:t>synth v1 (12)</a:t>
-                      </a:r>
-                    </a:p>
-                  </a:txBody>
-                  <a:tcPr/>
-                </a:tc>
-                <a:tc>
-                  <a:txBody>
-                    <a:bodyPr/>
-                    <a:lstStyle/>
-                    <a:p>
-                      <a:pPr>
-                        <a:defRPr sz="1300" b="1"/>
-                      </a:pPr>
-                      <a:r>
-                        <a:t>v2hard (8)</a:t>
-                      </a:r>
-                    </a:p>
-                  </a:txBody>
-                  <a:tcPr/>
-                </a:tc>
-                <a:tc>
-                  <a:txBody>
-                    <a:bodyPr/>
-                    <a:lstStyle/>
-                    <a:p>
-                      <a:pPr>
-                        <a:defRPr sz="1300" b="1"/>
-                      </a:pPr>
-                      <a:r>
-                        <a:t>шум на чистом</a:t>
-                      </a:r>
-                    </a:p>
-                  </a:txBody>
-                  <a:tcPr/>
-                </a:tc>
-              </a:tr>
-              <a:tr h="365760">
-                <a:tc>
-                  <a:txBody>
-                    <a:bodyPr/>
-                    <a:lstStyle/>
-                    <a:p>
-                      <a:pPr>
-                        <a:defRPr sz="1300"/>
-                      </a:pPr>
-                      <a:r>
-                        <a:t>Детерминированный слой</a:t>
-                      </a:r>
-                    </a:p>
-                  </a:txBody>
-                  <a:tcPr/>
-                </a:tc>
-                <a:tc>
-                  <a:txBody>
-                    <a:bodyPr/>
-                    <a:lstStyle/>
-                    <a:p>
-                      <a:pPr>
-                        <a:defRPr sz="1300"/>
-                      </a:pPr>
-                      <a:r>
-                        <a:t>3</a:t>
-                      </a:r>
-                    </a:p>
-                  </a:txBody>
-                  <a:tcPr/>
-                </a:tc>
-                <a:tc>
-                  <a:txBody>
-                    <a:bodyPr/>
-                    <a:lstStyle/>
-                    <a:p>
-                      <a:pPr>
-                        <a:defRPr sz="1300"/>
-                      </a:pPr>
-                      <a:r>
-                        <a:t>3</a:t>
-                      </a:r>
-                    </a:p>
-                  </a:txBody>
-                  <a:tcPr/>
-                </a:tc>
-                <a:tc>
-                  <a:txBody>
-                    <a:bodyPr/>
-                    <a:lstStyle/>
-                    <a:p>
-                      <a:pPr>
-                        <a:defRPr sz="1300"/>
-                      </a:pPr>
-                      <a:r>
-                        <a:t>6</a:t>
-                      </a:r>
-                    </a:p>
-                  </a:txBody>
-                  <a:tcPr/>
-                </a:tc>
-                <a:tc>
-                  <a:txBody>
-                    <a:bodyPr/>
-                    <a:lstStyle/>
-                    <a:p>
-                      <a:pPr>
-                        <a:defRPr sz="1300"/>
-                      </a:pPr>
-                      <a:r>
-                        <a:t>0</a:t>
-                      </a:r>
-                    </a:p>
-                  </a:txBody>
-                  <a:tcPr/>
-                </a:tc>
-                <a:tc>
-                  <a:txBody>
-                    <a:bodyPr/>
-                    <a:lstStyle/>
-                    <a:p>
-                      <a:pPr>
-                        <a:defRPr sz="1300"/>
-                      </a:pPr>
-                      <a:r>
-                        <a:t>0</a:t>
-                      </a:r>
-                    </a:p>
-                  </a:txBody>
-                  <a:tcPr/>
-                </a:tc>
-              </a:tr>
-              <a:tr h="365760">
-                <a:tc>
-                  <a:txBody>
-                    <a:bodyPr/>
-                    <a:lstStyle/>
-                    <a:p>
-                      <a:pPr>
-                        <a:defRPr sz="1300"/>
-                      </a:pPr>
-                      <a:r>
-                        <a:t>Промпт-бейзлайн GPT-5.5</a:t>
-                      </a:r>
-                    </a:p>
-                  </a:txBody>
-                  <a:tcPr/>
-                </a:tc>
-                <a:tc>
-                  <a:txBody>
-                    <a:bodyPr/>
-                    <a:lstStyle/>
-                    <a:p>
-                      <a:pPr>
-                        <a:defRPr sz="1300"/>
-                      </a:pPr>
-                      <a:r>
-                        <a:t>11</a:t>
-                      </a:r>
-                    </a:p>
-                  </a:txBody>
-                  <a:tcPr/>
-                </a:tc>
-                <a:tc>
-                  <a:txBody>
-                    <a:bodyPr/>
-                    <a:lstStyle/>
-                    <a:p>
-                      <a:pPr>
-                        <a:defRPr sz="1300"/>
-                      </a:pPr>
-                      <a:r>
-                        <a:t>6</a:t>
-                      </a:r>
-                    </a:p>
-                  </a:txBody>
-                  <a:tcPr/>
-                </a:tc>
-                <a:tc>
-                  <a:txBody>
-                    <a:bodyPr/>
-                    <a:lstStyle/>
-                    <a:p>
-                      <a:pPr>
-                        <a:defRPr sz="1300"/>
-                      </a:pPr>
-                      <a:r>
-                        <a:t>10</a:t>
-                      </a:r>
-                    </a:p>
-                  </a:txBody>
-                  <a:tcPr/>
-                </a:tc>
-                <a:tc>
-                  <a:txBody>
-                    <a:bodyPr/>
-                    <a:lstStyle/>
-                    <a:p>
-                      <a:pPr>
-                        <a:defRPr sz="1300"/>
-                      </a:pPr>
-                      <a:r>
-                        <a:t>8</a:t>
-                      </a:r>
-                    </a:p>
-                  </a:txBody>
-                  <a:tcPr/>
-                </a:tc>
-                <a:tc>
-                  <a:txBody>
-                    <a:bodyPr/>
-                    <a:lstStyle/>
-                    <a:p>
-                      <a:pPr>
-                        <a:defRPr sz="1300"/>
-                      </a:pPr>
-                      <a:r>
-                        <a:t>15</a:t>
-                      </a:r>
-                    </a:p>
-                  </a:txBody>
-                  <a:tcPr/>
-                </a:tc>
-              </a:tr>
-              <a:tr h="365760">
-                <a:tc>
-                  <a:txBody>
-                    <a:bodyPr/>
-                    <a:lstStyle/>
-                    <a:p>
-                      <a:pPr>
-                        <a:defRPr sz="1300"/>
-                      </a:pPr>
-                      <a:r>
-                        <a:t>Конвейер GPT-5.5 (v2g)</a:t>
-                      </a:r>
-                    </a:p>
-                  </a:txBody>
-                  <a:tcPr/>
-                </a:tc>
-                <a:tc>
-                  <a:txBody>
-                    <a:bodyPr/>
-                    <a:lstStyle/>
-                    <a:p>
-                      <a:pPr>
-                        <a:defRPr sz="1300"/>
-                      </a:pPr>
-                      <a:r>
-                        <a:t>14–16</a:t>
-                      </a:r>
-                    </a:p>
-                  </a:txBody>
-                  <a:tcPr/>
-                </a:tc>
-                <a:tc>
-                  <a:txBody>
-                    <a:bodyPr/>
-                    <a:lstStyle/>
-                    <a:p>
-                      <a:pPr>
-                        <a:defRPr sz="1300"/>
-                      </a:pPr>
-                      <a:r>
-                        <a:t>12</a:t>
-                      </a:r>
-                    </a:p>
-                  </a:txBody>
-                  <a:tcPr/>
-                </a:tc>
-                <a:tc>
-                  <a:txBody>
-                    <a:bodyPr/>
-                    <a:lstStyle/>
-                    <a:p>
-                      <a:pPr>
-                        <a:defRPr sz="1300"/>
-                      </a:pPr>
-                      <a:r>
-                        <a:t>7–9</a:t>
-                      </a:r>
-                    </a:p>
-                  </a:txBody>
-                  <a:tcPr/>
-                </a:tc>
-                <a:tc>
-                  <a:txBody>
-                    <a:bodyPr/>
-                    <a:lstStyle/>
-                    <a:p>
-                      <a:pPr>
-                        <a:defRPr sz="1300"/>
-                      </a:pPr>
-                      <a:r>
-                        <a:t>7</a:t>
-                      </a:r>
-                    </a:p>
-                  </a:txBody>
-                  <a:tcPr/>
-                </a:tc>
-                <a:tc>
-                  <a:txBody>
-                    <a:bodyPr/>
-                    <a:lstStyle/>
-                    <a:p>
-                      <a:pPr>
-                        <a:defRPr sz="1300"/>
-                      </a:pPr>
-                      <a:r>
-                        <a:t>9</a:t>
-                      </a:r>
-                    </a:p>
-                  </a:txBody>
-                  <a:tcPr/>
-                </a:tc>
-              </a:tr>
-              <a:tr h="365760">
-                <a:tc>
-                  <a:txBody>
-                    <a:bodyPr/>
-                    <a:lstStyle/>
-                    <a:p>
-                      <a:pPr>
-                        <a:defRPr sz="1300"/>
-                      </a:pPr>
-                      <a:r>
-                        <a:t>Конвейер + энтропия (v2e)</a:t>
-                      </a:r>
-                    </a:p>
-                  </a:txBody>
-                  <a:tcPr/>
-                </a:tc>
-                <a:tc>
-                  <a:txBody>
-                    <a:bodyPr/>
-                    <a:lstStyle/>
-                    <a:p>
-                      <a:pPr>
-                        <a:defRPr sz="1300"/>
-                      </a:pPr>
-                      <a:r>
-                        <a:t>16</a:t>
-                      </a:r>
-                    </a:p>
-                  </a:txBody>
-                  <a:tcPr/>
-                </a:tc>
-                <a:tc>
-                  <a:txBody>
-                    <a:bodyPr/>
-                    <a:lstStyle/>
-                    <a:p>
-                      <a:pPr>
-                        <a:defRPr sz="1300"/>
-                      </a:pPr>
-                      <a:r>
-                        <a:t>12</a:t>
-                      </a:r>
-                    </a:p>
-                  </a:txBody>
-                  <a:tcPr/>
-                </a:tc>
-                <a:tc>
-                  <a:txBody>
-                    <a:bodyPr/>
-                    <a:lstStyle/>
-                    <a:p>
-                      <a:pPr>
-                        <a:defRPr sz="1300"/>
-                      </a:pPr>
-                      <a:r>
-                        <a:t>10</a:t>
-                      </a:r>
-                    </a:p>
-                  </a:txBody>
-                  <a:tcPr/>
-                </a:tc>
-                <a:tc>
-                  <a:txBody>
-                    <a:bodyPr/>
-                    <a:lstStyle/>
-                    <a:p>
-                      <a:pPr>
-                        <a:defRPr sz="1300"/>
-                      </a:pPr>
-                      <a:r>
-                        <a:t>7</a:t>
-                      </a:r>
-                    </a:p>
-                  </a:txBody>
-                  <a:tcPr/>
-                </a:tc>
-                <a:tc>
-                  <a:txBody>
-                    <a:bodyPr/>
-                    <a:lstStyle/>
-                    <a:p>
-                      <a:pPr>
-                        <a:defRPr sz="1300"/>
-                      </a:pPr>
-                      <a:r>
-                        <a:t>7</a:t>
-                      </a:r>
-                    </a:p>
-                  </a:txBody>
-                  <a:tcPr/>
-                </a:tc>
-              </a:tr>
-              <a:tr h="365760">
-                <a:tc>
-                  <a:txBody>
-                    <a:bodyPr/>
-                    <a:lstStyle/>
-                    <a:p>
-                      <a:pPr>
-                        <a:defRPr sz="1300"/>
-                      </a:pPr>
-                      <a:r>
-                        <a:t>Конвейер + логит-зонд (v2l)</a:t>
-                      </a:r>
-                    </a:p>
-                  </a:txBody>
-                  <a:tcPr/>
-                </a:tc>
-                <a:tc>
-                  <a:txBody>
-                    <a:bodyPr/>
-                    <a:lstStyle/>
-                    <a:p>
-                      <a:pPr>
-                        <a:defRPr sz="1300"/>
-                      </a:pPr>
-                      <a:r>
-                        <a:t>16</a:t>
-                      </a:r>
-                    </a:p>
-                  </a:txBody>
-                  <a:tcPr/>
-                </a:tc>
-                <a:tc>
-                  <a:txBody>
-                    <a:bodyPr/>
-                    <a:lstStyle/>
-                    <a:p>
-                      <a:pPr>
-                        <a:defRPr sz="1300"/>
-                      </a:pPr>
-                      <a:r>
-                        <a:t>12</a:t>
-                      </a:r>
-                    </a:p>
-                  </a:txBody>
-                  <a:tcPr/>
-                </a:tc>
-                <a:tc>
-                  <a:txBody>
-                    <a:bodyPr/>
-                    <a:lstStyle/>
-                    <a:p>
-                      <a:pPr>
-                        <a:defRPr sz="1300"/>
-                      </a:pPr>
-                      <a:r>
-                        <a:t>7</a:t>
-                      </a:r>
-                    </a:p>
-                  </a:txBody>
-                  <a:tcPr/>
-                </a:tc>
-                <a:tc>
-                  <a:txBody>
-                    <a:bodyPr/>
-                    <a:lstStyle/>
-                    <a:p>
-                      <a:pPr>
-                        <a:defRPr sz="1300"/>
-                      </a:pPr>
-                      <a:r>
-                        <a:t>7</a:t>
-                      </a:r>
-                    </a:p>
-                  </a:txBody>
-                  <a:tcPr/>
-                </a:tc>
-                <a:tc>
-                  <a:txBody>
-                    <a:bodyPr/>
-                    <a:lstStyle/>
-                    <a:p>
-                      <a:pPr>
-                        <a:defRPr sz="1300"/>
-                      </a:pPr>
-                      <a:r>
-                        <a:t>7</a:t>
-                      </a:r>
-                    </a:p>
-                  </a:txBody>
-                  <a:tcPr/>
-                </a:tc>
-              </a:tr>
-              <a:tr h="365760">
-                <a:tc>
-                  <a:txBody>
-                    <a:bodyPr/>
-                    <a:lstStyle/>
-                    <a:p>
-                      <a:pPr>
-                        <a:defRPr sz="1300"/>
-                      </a:pPr>
-                      <a:r>
-                        <a:t>Конвейер gpt-oss-120b (self-hosted)</a:t>
-                      </a:r>
-                    </a:p>
-                  </a:txBody>
-                  <a:tcPr/>
-                </a:tc>
-                <a:tc>
-                  <a:txBody>
-                    <a:bodyPr/>
-                    <a:lstStyle/>
-                    <a:p>
-                      <a:pPr>
-                        <a:defRPr sz="1300"/>
-                      </a:pPr>
-                      <a:r>
-                        <a:t>12–14</a:t>
-                      </a:r>
-                    </a:p>
-                  </a:txBody>
-                  <a:tcPr/>
-                </a:tc>
-                <a:tc>
-                  <a:txBody>
-                    <a:bodyPr/>
-                    <a:lstStyle/>
-                    <a:p>
-                      <a:pPr>
-                        <a:defRPr sz="1300"/>
-                      </a:pPr>
-                      <a:r>
-                        <a:t>11</a:t>
-                      </a:r>
-                    </a:p>
-                  </a:txBody>
-                  <a:tcPr/>
-                </a:tc>
-                <a:tc>
-                  <a:txBody>
-                    <a:bodyPr/>
-                    <a:lstStyle/>
-                    <a:p>
-                      <a:pPr>
-                        <a:defRPr sz="1300"/>
-                      </a:pPr>
-                      <a:r>
-                        <a:t>9</a:t>
-                      </a:r>
-                    </a:p>
-                  </a:txBody>
-                  <a:tcPr/>
-                </a:tc>
-                <a:tc>
-                  <a:txBody>
-                    <a:bodyPr/>
-                    <a:lstStyle/>
-                    <a:p>
-                      <a:pPr>
-                        <a:defRPr sz="1300"/>
-                      </a:pPr>
-                      <a:r>
-                        <a:t>7</a:t>
-                      </a:r>
-                    </a:p>
-                  </a:txBody>
-                  <a:tcPr/>
-                </a:tc>
-                <a:tc>
-                  <a:txBody>
-                    <a:bodyPr/>
-                    <a:lstStyle/>
-                    <a:p>
-                      <a:pPr>
-                        <a:defRPr sz="1300"/>
-                      </a:pPr>
-                      <a:r>
-                        <a:t>11</a:t>
-                      </a:r>
-                    </a:p>
-                  </a:txBody>
-                  <a:tcPr/>
-                </a:tc>
-              </a:tr>
-            </a:tbl>
-          </a:graphicData>
-        </a:graphic>
-      </p:graphicFrame>
+              <a:defRPr sz="2600" b="1">
+                <a:solidFill>
+                  <a:srgbClr val="1F2328"/>
+                </a:solidFill>
+              </a:defRPr>
+            </a:pPr>
+            <a:r>
+              <a:t>Конвейер: восемь этапов и что каждый доказал</a:t>
+            </a:r>
+          </a:p>
+        </p:txBody>
+      </p:sp>
+      <p:pic>
+        <p:nvPicPr>
+          <p:cNvPr id="3" name="Picture 2" descr="pipeline.png"/>
+          <p:cNvPicPr>
+            <a:picLocks noChangeAspect="1"/>
+          </p:cNvPicPr>
+          <p:nvPr/>
+        </p:nvPicPr>
+        <p:blipFill>
+          <a:blip r:embed="rId2"/>
+          <a:stretch>
+            <a:fillRect/>
+          </a:stretch>
+        </p:blipFill>
+        <p:spPr>
+          <a:xfrm>
+            <a:off x="243687" y="1463040"/>
+            <a:ext cx="11704320" cy="3140478"/>
+          </a:xfrm>
+          <a:prstGeom prst="rect">
+            <a:avLst/>
+          </a:prstGeom>
+        </p:spPr>
+      </p:pic>
       <p:sp>
         <p:nvSpPr>
           <p:cNvPr id="4" name="TextBox 3"/>
@@ -5729,8 +8649,8 @@
         </p:nvSpPr>
         <p:spPr>
           <a:xfrm>
-            <a:off x="548640" y="6126480"/>
-            <a:ext cx="10972800" cy="548640"/>
+            <a:off x="548640" y="6263640"/>
+            <a:ext cx="11155680" cy="457200"/>
           </a:xfrm>
           <a:prstGeom prst="rect">
             <a:avLst/>
@@ -5751,7 +8671,7 @@
               </a:defRPr>
             </a:pPr>
             <a:r>
-              <a:t>Промпт слеп к шаблону (0/6) и промахивает лёгкое; конвейер закрывает все 8 пунктов МТС. Разброс GPT между прогонами ±2 → консенсус двух прогонов. Источник: experiments/EXP-13…16.</a:t>
+              <a:t>Серые этапы — без LLM. Дальше — по слайду на этап: что делает, зачем, чем доказано, пример находки.</a:t>
             </a:r>
           </a:p>
         </p:txBody>
@@ -5782,8 +8702,8 @@
         </p:nvSpPr>
         <p:spPr>
           <a:xfrm>
-            <a:off x="548640" y="320040"/>
-            <a:ext cx="10972800" cy="822960"/>
+            <a:off x="548640" y="274320"/>
+            <a:ext cx="11155680" cy="822960"/>
           </a:xfrm>
           <a:prstGeom prst="rect">
             <a:avLst/>
@@ -5797,14 +8717,14 @@
           <a:lstStyle/>
           <a:p>
             <a:pPr>
-              <a:defRPr sz="2800" b="1">
-                <a:solidFill>
-                  <a:srgbClr val="1F2328"/>
-                </a:solidFill>
-              </a:defRPr>
-            </a:pPr>
-            <a:r>
-              <a:t>Что показали эксперименты (и что починили по ним)</a:t>
+              <a:defRPr sz="2600" b="1">
+                <a:solidFill>
+                  <a:srgbClr val="1F2328"/>
+                </a:solidFill>
+              </a:defRPr>
+            </a:pPr>
+            <a:r>
+              <a:t>Этап 1. Детерминированный слой</a:t>
             </a:r>
           </a:p>
         </p:txBody>
@@ -5817,8 +8737,43 @@
         </p:nvSpPr>
         <p:spPr>
           <a:xfrm>
-            <a:off x="640080" y="1234440"/>
-            <a:ext cx="10881360" cy="4937760"/>
+            <a:off x="548640" y="1143000"/>
+            <a:ext cx="3566160" cy="365760"/>
+          </a:xfrm>
+          <a:prstGeom prst="rect">
+            <a:avLst/>
+          </a:prstGeom>
+          <a:noFill/>
+        </p:spPr>
+        <p:txBody>
+          <a:bodyPr wrap="none">
+            <a:spAutoFit/>
+          </a:bodyPr>
+          <a:lstStyle/>
+          <a:p>
+            <a:pPr>
+              <a:defRPr sz="1400" b="1">
+                <a:solidFill>
+                  <a:srgbClr val="2563EB"/>
+                </a:solidFill>
+              </a:defRPr>
+            </a:pPr>
+            <a:r>
+              <a:t>Что делает</a:t>
+            </a:r>
+          </a:p>
+        </p:txBody>
+      </p:sp>
+      <p:sp>
+        <p:nvSpPr>
+          <p:cNvPr id="4" name="TextBox 3"/>
+          <p:cNvSpPr txBox="1"/>
+          <p:nvPr/>
+        </p:nvSpPr>
+        <p:spPr>
+          <a:xfrm>
+            <a:off x="548640" y="1508760"/>
+            <a:ext cx="3566160" cy="2926080"/>
           </a:xfrm>
           <a:prstGeom prst="rect">
             <a:avLst/>
@@ -5833,76 +8788,302 @@
           <a:p>
             <a:pPr>
               <a:spcAft>
-                <a:spcPts val="600"/>
-              </a:spcAft>
-              <a:defRPr sz="1800">
-                <a:solidFill>
-                  <a:srgbClr val="1F2328"/>
-                </a:solidFill>
-              </a:defRPr>
-            </a:pPr>
-            <a:r>
-              <a:t>• Критик резал правду: верным замечаниям по Data Catalog, кластеру Kafka, типовым фильтрам ставил 0 → официальные слоты не подлежат порогу (3/7 → 7/7)</a:t>
-            </a:r>
-          </a:p>
-          <a:p>
-            <a:pPr>
-              <a:spcAft>
-                <a:spcPts val="600"/>
-              </a:spcAft>
-              <a:defRPr sz="1800">
-                <a:solidFill>
-                  <a:srgbClr val="1F2328"/>
-                </a:solidFill>
-              </a:defRPr>
-            </a:pPr>
-            <a:r>
-              <a:t>• Треть слотов чеклиста терялась молча из-за схемы ответа → починено; зонды получили свои слоты: doc3 14/16 → 16/16</a:t>
-            </a:r>
-          </a:p>
-          <a:p>
-            <a:pPr>
-              <a:spcAft>
-                <a:spcPts val="600"/>
-              </a:spcAft>
-              <a:defRPr sz="1800">
-                <a:solidFill>
-                  <a:srgbClr val="1F2328"/>
-                </a:solidFill>
-              </a:defRPr>
-            </a:pPr>
-            <a:r>
-              <a:t>• «Шум» на чистой синтетике трижды оказывался реальными дефектами базы → правило: читать сырые выводы глазами</a:t>
-            </a:r>
-          </a:p>
-          <a:p>
-            <a:pPr>
-              <a:spcAft>
-                <a:spcPts val="600"/>
-              </a:spcAft>
-              <a:defRPr sz="1800">
-                <a:solidFill>
-                  <a:srgbClr val="1F2328"/>
-                </a:solidFill>
-              </a:defRPr>
-            </a:pPr>
-            <a:r>
-              <a:t>• Разрыв self-hosted 120b и GPT-5.5 — 4 «выводных» дефекта целевого документа; у GPT их добирают зонды → путь: vLLM + логиты на 120b</a:t>
-            </a:r>
-          </a:p>
-          <a:p>
-            <a:pPr>
-              <a:spcAft>
-                <a:spcPts val="600"/>
-              </a:spcAft>
-              <a:defRPr sz="1800">
-                <a:solidFill>
-                  <a:srgbClr val="1F2328"/>
-                </a:solidFill>
-              </a:defRPr>
-            </a:pPr>
-            <a:r>
-              <a:t>• Демо на документах МТС через контур: doc3 14/16, doc1 12/12 на 120b</a:t>
+                <a:spcPts val="500"/>
+              </a:spcAft>
+              <a:defRPr sz="1300">
+                <a:solidFill>
+                  <a:srgbClr val="1F2328"/>
+                </a:solidFill>
+              </a:defRPr>
+            </a:pPr>
+            <a:r>
+              <a:t>• Проверка официального шаблона МТС: 20 разделов на месте, пустой раздел допустим только с «не применимо»</a:t>
+            </a:r>
+          </a:p>
+          <a:p>
+            <a:pPr>
+              <a:spcAft>
+                <a:spcPts val="500"/>
+              </a:spcAft>
+              <a:defRPr sz="1300">
+                <a:solidFill>
+                  <a:srgbClr val="1F2328"/>
+                </a:solidFill>
+              </a:defRPr>
+            </a:pPr>
+            <a:r>
+              <a:t>• Языковые паттерны: TBD, «и т. д.», «при необходимости», «оперативно»</a:t>
+            </a:r>
+          </a:p>
+          <a:p>
+            <a:pPr>
+              <a:spcAft>
+                <a:spcPts val="500"/>
+              </a:spcAft>
+              <a:defRPr sz="1300">
+                <a:solidFill>
+                  <a:srgbClr val="1F2328"/>
+                </a:solidFill>
+              </a:defRPr>
+            </a:pPr>
+            <a:r>
+              <a:t>• Обязательные разделы (источник, структура, алгоритм, регламент, контроль качества)</a:t>
+            </a:r>
+          </a:p>
+        </p:txBody>
+      </p:sp>
+      <p:sp>
+        <p:nvSpPr>
+          <p:cNvPr id="5" name="TextBox 4"/>
+          <p:cNvSpPr txBox="1"/>
+          <p:nvPr/>
+        </p:nvSpPr>
+        <p:spPr>
+          <a:xfrm>
+            <a:off x="4297680" y="1143000"/>
+            <a:ext cx="3566160" cy="365760"/>
+          </a:xfrm>
+          <a:prstGeom prst="rect">
+            <a:avLst/>
+          </a:prstGeom>
+          <a:noFill/>
+        </p:spPr>
+        <p:txBody>
+          <a:bodyPr wrap="none">
+            <a:spAutoFit/>
+          </a:bodyPr>
+          <a:lstStyle/>
+          <a:p>
+            <a:pPr>
+              <a:defRPr sz="1400" b="1">
+                <a:solidFill>
+                  <a:srgbClr val="2563EB"/>
+                </a:solidFill>
+              </a:defRPr>
+            </a:pPr>
+            <a:r>
+              <a:t>Зачем</a:t>
+            </a:r>
+          </a:p>
+        </p:txBody>
+      </p:sp>
+      <p:sp>
+        <p:nvSpPr>
+          <p:cNvPr id="6" name="TextBox 5"/>
+          <p:cNvSpPr txBox="1"/>
+          <p:nvPr/>
+        </p:nvSpPr>
+        <p:spPr>
+          <a:xfrm>
+            <a:off x="4297680" y="1508760"/>
+            <a:ext cx="3566160" cy="2926080"/>
+          </a:xfrm>
+          <a:prstGeom prst="rect">
+            <a:avLst/>
+          </a:prstGeom>
+          <a:noFill/>
+        </p:spPr>
+        <p:txBody>
+          <a:bodyPr wrap="square">
+            <a:spAutoFit/>
+          </a:bodyPr>
+          <a:lstStyle/>
+          <a:p>
+            <a:pPr>
+              <a:spcAft>
+                <a:spcPts val="500"/>
+              </a:spcAft>
+              <a:defRPr sz="1300">
+                <a:solidFill>
+                  <a:srgbClr val="1F2328"/>
+                </a:solidFill>
+              </a:defRPr>
+            </a:pPr>
+            <a:r>
+              <a:t>• Бесплатно, precision ≈ 1: работает до модели и без модели</a:t>
+            </a:r>
+          </a:p>
+          <a:p>
+            <a:pPr>
+              <a:spcAft>
+                <a:spcPts val="500"/>
+              </a:spcAft>
+              <a:defRPr sz="1300">
+                <a:solidFill>
+                  <a:srgbClr val="1F2328"/>
+                </a:solidFill>
+              </a:defRPr>
+            </a:pPr>
+            <a:r>
+              <a:t>• Даёт гарантированный пол качества на любой модели заказчика</a:t>
+            </a:r>
+          </a:p>
+          <a:p>
+            <a:pPr>
+              <a:spcAft>
+                <a:spcPts val="500"/>
+              </a:spcAft>
+              <a:defRPr sz="1300">
+                <a:solidFill>
+                  <a:srgbClr val="1F2328"/>
+                </a:solidFill>
+              </a:defRPr>
+            </a:pPr>
+            <a:r>
+              <a:t>• Официальное правило кейсодателя (п.5) проверяется буквально</a:t>
+            </a:r>
+          </a:p>
+        </p:txBody>
+      </p:sp>
+      <p:sp>
+        <p:nvSpPr>
+          <p:cNvPr id="7" name="TextBox 6"/>
+          <p:cNvSpPr txBox="1"/>
+          <p:nvPr/>
+        </p:nvSpPr>
+        <p:spPr>
+          <a:xfrm>
+            <a:off x="8046720" y="1143000"/>
+            <a:ext cx="3566160" cy="365760"/>
+          </a:xfrm>
+          <a:prstGeom prst="rect">
+            <a:avLst/>
+          </a:prstGeom>
+          <a:noFill/>
+        </p:spPr>
+        <p:txBody>
+          <a:bodyPr wrap="none">
+            <a:spAutoFit/>
+          </a:bodyPr>
+          <a:lstStyle/>
+          <a:p>
+            <a:pPr>
+              <a:defRPr sz="1400" b="1">
+                <a:solidFill>
+                  <a:srgbClr val="2563EB"/>
+                </a:solidFill>
+              </a:defRPr>
+            </a:pPr>
+            <a:r>
+              <a:t>Чем доказано</a:t>
+            </a:r>
+          </a:p>
+        </p:txBody>
+      </p:sp>
+      <p:sp>
+        <p:nvSpPr>
+          <p:cNvPr id="8" name="TextBox 7"/>
+          <p:cNvSpPr txBox="1"/>
+          <p:nvPr/>
+        </p:nvSpPr>
+        <p:spPr>
+          <a:xfrm>
+            <a:off x="8046720" y="1508760"/>
+            <a:ext cx="3566160" cy="2926080"/>
+          </a:xfrm>
+          <a:prstGeom prst="rect">
+            <a:avLst/>
+          </a:prstGeom>
+          <a:noFill/>
+        </p:spPr>
+        <p:txBody>
+          <a:bodyPr wrap="square">
+            <a:spAutoFit/>
+          </a:bodyPr>
+          <a:lstStyle/>
+          <a:p>
+            <a:pPr>
+              <a:spcAft>
+                <a:spcPts val="500"/>
+              </a:spcAft>
+              <a:defRPr sz="1300">
+                <a:solidFill>
+                  <a:srgbClr val="1F2328"/>
+                </a:solidFill>
+              </a:defRPr>
+            </a:pPr>
+            <a:r>
+              <a:t>• F-класс (шаблон) 6/6 при шуме 0 (EXP-13, EXP-14)</a:t>
+            </a:r>
+          </a:p>
+          <a:p>
+            <a:pPr>
+              <a:spcAft>
+                <a:spcPts val="500"/>
+              </a:spcAft>
+              <a:defRPr sz="1300">
+                <a:solidFill>
+                  <a:srgbClr val="1F2328"/>
+                </a:solidFill>
+              </a:defRPr>
+            </a:pPr>
+            <a:r>
+              <a:t>• Промпт-бейзлайн на тех же дефектах — 0/6</a:t>
+            </a:r>
+          </a:p>
+          <a:p>
+            <a:pPr>
+              <a:spcAft>
+                <a:spcPts val="500"/>
+              </a:spcAft>
+              <a:defRPr sz="1300">
+                <a:solidFill>
+                  <a:srgbClr val="1F2328"/>
+                </a:solidFill>
+              </a:defRPr>
+            </a:pPr>
+            <a:r>
+              <a:t>• Не отдаётся критику: его находки нельзя срезать</a:t>
+            </a:r>
+          </a:p>
+        </p:txBody>
+      </p:sp>
+      <p:sp>
+        <p:nvSpPr>
+          <p:cNvPr id="9" name="TextBox 8"/>
+          <p:cNvSpPr txBox="1"/>
+          <p:nvPr/>
+        </p:nvSpPr>
+        <p:spPr>
+          <a:xfrm>
+            <a:off x="548640" y="4526280"/>
+            <a:ext cx="11064240" cy="1600200"/>
+          </a:xfrm>
+          <a:prstGeom prst="rect">
+            <a:avLst/>
+          </a:prstGeom>
+          <a:noFill/>
+        </p:spPr>
+        <p:txBody>
+          <a:bodyPr wrap="square">
+            <a:spAutoFit/>
+          </a:bodyPr>
+          <a:lstStyle/>
+          <a:p>
+            <a:pPr>
+              <a:defRPr sz="1300" b="1">
+                <a:solidFill>
+                  <a:srgbClr val="2563EB"/>
+                </a:solidFill>
+              </a:defRPr>
+            </a:pPr>
+            <a:r>
+              <a:t>Пример находки на документах МТС</a:t>
+            </a:r>
+          </a:p>
+          <a:p>
+            <a:pPr>
+              <a:spcAft>
+                <a:spcPts val="300"/>
+              </a:spcAft>
+              <a:defRPr sz="1250">
+                <a:solidFill>
+                  <a:srgbClr val="1F2328"/>
+                </a:solidFill>
+              </a:defRPr>
+            </a:pPr>
+            <a:r>
+              <a:t>template:official_missing (doc3): отсутствуют разделы Решаемая проблема, Data Catalog, DDL, Пример данных, FAQ, История изменений — по правилам кейсодателя разделы сохраняются или помечаются «не применимо».</a:t>
             </a:r>
           </a:p>
         </p:txBody>
@@ -5933,8 +9114,8 @@
         </p:nvSpPr>
         <p:spPr>
           <a:xfrm>
-            <a:off x="548640" y="320040"/>
-            <a:ext cx="10972800" cy="822960"/>
+            <a:off x="548640" y="274320"/>
+            <a:ext cx="11155680" cy="822960"/>
           </a:xfrm>
           <a:prstGeom prst="rect">
             <a:avLst/>
@@ -5948,14 +9129,14 @@
           <a:lstStyle/>
           <a:p>
             <a:pPr>
-              <a:defRPr sz="2800" b="1">
-                <a:solidFill>
-                  <a:srgbClr val="1F2328"/>
-                </a:solidFill>
-              </a:defRPr>
-            </a:pPr>
-            <a:r>
-              <a:t>Демонстрация: сквозной сценарий</a:t>
+              <a:defRPr sz="2600" b="1">
+                <a:solidFill>
+                  <a:srgbClr val="1F2328"/>
+                </a:solidFill>
+              </a:defRPr>
+            </a:pPr>
+            <a:r>
+              <a:t>Этап 2. Граф сущностей (H1)</a:t>
             </a:r>
           </a:p>
         </p:txBody>
@@ -5968,8 +9149,43 @@
         </p:nvSpPr>
         <p:spPr>
           <a:xfrm>
-            <a:off x="640080" y="1234440"/>
-            <a:ext cx="10881360" cy="4937760"/>
+            <a:off x="548640" y="1143000"/>
+            <a:ext cx="3566160" cy="365760"/>
+          </a:xfrm>
+          <a:prstGeom prst="rect">
+            <a:avLst/>
+          </a:prstGeom>
+          <a:noFill/>
+        </p:spPr>
+        <p:txBody>
+          <a:bodyPr wrap="none">
+            <a:spAutoFit/>
+          </a:bodyPr>
+          <a:lstStyle/>
+          <a:p>
+            <a:pPr>
+              <a:defRPr sz="1400" b="1">
+                <a:solidFill>
+                  <a:srgbClr val="2563EB"/>
+                </a:solidFill>
+              </a:defRPr>
+            </a:pPr>
+            <a:r>
+              <a:t>Что делает</a:t>
+            </a:r>
+          </a:p>
+        </p:txBody>
+      </p:sp>
+      <p:sp>
+        <p:nvSpPr>
+          <p:cNvPr id="4" name="TextBox 3"/>
+          <p:cNvSpPr txBox="1"/>
+          <p:nvPr/>
+        </p:nvSpPr>
+        <p:spPr>
+          <a:xfrm>
+            <a:off x="548640" y="1508760"/>
+            <a:ext cx="3566160" cy="2926080"/>
           </a:xfrm>
           <a:prstGeom prst="rect">
             <a:avLst/>
@@ -5984,91 +9200,302 @@
           <a:p>
             <a:pPr>
               <a:spcAft>
-                <a:spcPts val="600"/>
-              </a:spcAft>
-              <a:defRPr sz="1800">
-                <a:solidFill>
-                  <a:srgbClr val="1F2328"/>
-                </a:solidFill>
-              </a:defRPr>
-            </a:pPr>
-            <a:r>
-              <a:t>• PDF выгрузки Confluence → сервис документов: секции и таблицы восстановлены (doc1 11, doc2 8, doc3 14 секций)</a:t>
-            </a:r>
-          </a:p>
-          <a:p>
-            <a:pPr>
-              <a:spcAft>
-                <a:spcPts val="600"/>
-              </a:spcAft>
-              <a:defRPr sz="1800">
-                <a:solidFill>
-                  <a:srgbClr val="1F2328"/>
-                </a:solidFill>
-              </a:defRPr>
-            </a:pPr>
-            <a:r>
-              <a:t>• Загрузка в UI → очередь → воркер: прогресс по этапам, кандидаты, вызовы, токены, оценка остатка</a:t>
-            </a:r>
-          </a:p>
-          <a:p>
-            <a:pPr>
-              <a:spcAft>
-                <a:spcPts val="600"/>
-              </a:spcAft>
-              <a:defRPr sz="1800">
-                <a:solidFill>
-                  <a:srgbClr val="1F2328"/>
-                </a:solidFill>
-              </a:defRPr>
-            </a:pPr>
-            <a:r>
-              <a:t>• Отчёт: светофор, покрытие чеклиста, находки по разделам с цитатой / почему / что уточнить</a:t>
-            </a:r>
-          </a:p>
-          <a:p>
-            <a:pPr>
-              <a:spcAft>
-                <a:spcPts val="600"/>
-              </a:spcAft>
-              <a:defRPr sz="1800">
-                <a:solidFill>
-                  <a:srgbClr val="1F2328"/>
-                </a:solidFill>
-              </a:defRPr>
-            </a:pPr>
-            <a:r>
-              <a:t>• История версий документа: что закрылось между версиями; 👍/👎 по каждой находке</a:t>
-            </a:r>
-          </a:p>
-          <a:p>
-            <a:pPr>
-              <a:spcAft>
-                <a:spcPts val="600"/>
-              </a:spcAft>
-              <a:defRPr sz="1800">
-                <a:solidFill>
-                  <a:srgbClr val="1F2328"/>
-                </a:solidFill>
-              </a:defRPr>
-            </a:pPr>
-            <a:r>
-              <a:t>• Мониторинг: RabbitMQ (очередь, DLQ), Grafana (длительность, вызовы, находки по классам, UNKNOWN)</a:t>
-            </a:r>
-          </a:p>
-          <a:p>
-            <a:pPr>
-              <a:spcAft>
-                <a:spcPts val="600"/>
-              </a:spcAft>
-              <a:defRPr sz="1800">
-                <a:solidFill>
-                  <a:srgbClr val="1F2328"/>
-                </a:solidFill>
-              </a:defRPr>
-            </a:pPr>
-            <a:r>
-              <a:t>• Сверка с разметкой одним скриптом: recall и список «лишних» для разметки</a:t>
+                <a:spcPts val="500"/>
+              </a:spcAft>
+              <a:defRPr sz="1300">
+                <a:solidFill>
+                  <a:srgbClr val="1F2328"/>
+                </a:solidFill>
+              </a:defRPr>
+            </a:pPr>
+            <a:r>
+              <a:t>• Обезличивание = бесплатная разметка: TABLE_*, FIELD_*, DAG_* — сущности</a:t>
+            </a:r>
+          </a:p>
+          <a:p>
+            <a:pPr>
+              <a:spcAft>
+                <a:spcPts val="500"/>
+              </a:spcAft>
+              <a:defRPr sz="1300">
+                <a:solidFill>
+                  <a:srgbClr val="1F2328"/>
+                </a:solidFill>
+              </a:defRPr>
+            </a:pPr>
+            <a:r>
+              <a:t>• Поля-фантомы: используются в алгоритме, но не описаны ни в одной структуре</a:t>
+            </a:r>
+          </a:p>
+          <a:p>
+            <a:pPr>
+              <a:spcAft>
+                <a:spcPts val="500"/>
+              </a:spcAft>
+              <a:defRPr sz="1300">
+                <a:solidFill>
+                  <a:srgbClr val="1F2328"/>
+                </a:solidFill>
+              </a:defRPr>
+            </a:pPr>
+            <a:r>
+              <a:t>• Дрейф имён (TABLE_AGG_LOAD_LOG ↔ TABLE_AGG_LOG_LOAD), битые ссылки «см. раздел N»</a:t>
+            </a:r>
+          </a:p>
+        </p:txBody>
+      </p:sp>
+      <p:sp>
+        <p:nvSpPr>
+          <p:cNvPr id="5" name="TextBox 4"/>
+          <p:cNvSpPr txBox="1"/>
+          <p:nvPr/>
+        </p:nvSpPr>
+        <p:spPr>
+          <a:xfrm>
+            <a:off x="4297680" y="1143000"/>
+            <a:ext cx="3566160" cy="365760"/>
+          </a:xfrm>
+          <a:prstGeom prst="rect">
+            <a:avLst/>
+          </a:prstGeom>
+          <a:noFill/>
+        </p:spPr>
+        <p:txBody>
+          <a:bodyPr wrap="none">
+            <a:spAutoFit/>
+          </a:bodyPr>
+          <a:lstStyle/>
+          <a:p>
+            <a:pPr>
+              <a:defRPr sz="1400" b="1">
+                <a:solidFill>
+                  <a:srgbClr val="2563EB"/>
+                </a:solidFill>
+              </a:defRPr>
+            </a:pPr>
+            <a:r>
+              <a:t>Зачем</a:t>
+            </a:r>
+          </a:p>
+        </p:txBody>
+      </p:sp>
+      <p:sp>
+        <p:nvSpPr>
+          <p:cNvPr id="6" name="TextBox 5"/>
+          <p:cNvSpPr txBox="1"/>
+          <p:nvPr/>
+        </p:nvSpPr>
+        <p:spPr>
+          <a:xfrm>
+            <a:off x="4297680" y="1508760"/>
+            <a:ext cx="3566160" cy="2926080"/>
+          </a:xfrm>
+          <a:prstGeom prst="rect">
+            <a:avLst/>
+          </a:prstGeom>
+          <a:noFill/>
+        </p:spPr>
+        <p:txBody>
+          <a:bodyPr wrap="square">
+            <a:spAutoFit/>
+          </a:bodyPr>
+          <a:lstStyle/>
+          <a:p>
+            <a:pPr>
+              <a:spcAft>
+                <a:spcPts val="500"/>
+              </a:spcAft>
+              <a:defRPr sz="1300">
+                <a:solidFill>
+                  <a:srgbClr val="1F2328"/>
+                </a:solidFill>
+              </a:defRPr>
+            </a:pPr>
+            <a:r>
+              <a:t>• Класс C (ссылки в пустоту) LLM ловит нестабильно, граф — всегда</a:t>
+            </a:r>
+          </a:p>
+          <a:p>
+            <a:pPr>
+              <a:spcAft>
+                <a:spcPts val="500"/>
+              </a:spcAft>
+              <a:defRPr sz="1300">
+                <a:solidFill>
+                  <a:srgbClr val="1F2328"/>
+                </a:solidFill>
+              </a:defRPr>
+            </a:pPr>
+            <a:r>
+              <a:t>• 0 вызовов модели, не зависит от длины документа</a:t>
+            </a:r>
+          </a:p>
+          <a:p>
+            <a:pPr>
+              <a:spcAft>
+                <a:spcPts val="500"/>
+              </a:spcAft>
+              <a:defRPr sz="1300">
+                <a:solidFill>
+                  <a:srgbClr val="1F2328"/>
+                </a:solidFill>
+              </a:defRPr>
+            </a:pPr>
+            <a:r>
+              <a:t>• Даёт критичные находки там, где человек не сверит 5 таблиц</a:t>
+            </a:r>
+          </a:p>
+        </p:txBody>
+      </p:sp>
+      <p:sp>
+        <p:nvSpPr>
+          <p:cNvPr id="7" name="TextBox 6"/>
+          <p:cNvSpPr txBox="1"/>
+          <p:nvPr/>
+        </p:nvSpPr>
+        <p:spPr>
+          <a:xfrm>
+            <a:off x="8046720" y="1143000"/>
+            <a:ext cx="3566160" cy="365760"/>
+          </a:xfrm>
+          <a:prstGeom prst="rect">
+            <a:avLst/>
+          </a:prstGeom>
+          <a:noFill/>
+        </p:spPr>
+        <p:txBody>
+          <a:bodyPr wrap="none">
+            <a:spAutoFit/>
+          </a:bodyPr>
+          <a:lstStyle/>
+          <a:p>
+            <a:pPr>
+              <a:defRPr sz="1400" b="1">
+                <a:solidFill>
+                  <a:srgbClr val="2563EB"/>
+                </a:solidFill>
+              </a:defRPr>
+            </a:pPr>
+            <a:r>
+              <a:t>Чем доказано</a:t>
+            </a:r>
+          </a:p>
+        </p:txBody>
+      </p:sp>
+      <p:sp>
+        <p:nvSpPr>
+          <p:cNvPr id="8" name="TextBox 7"/>
+          <p:cNvSpPr txBox="1"/>
+          <p:nvPr/>
+        </p:nvSpPr>
+        <p:spPr>
+          <a:xfrm>
+            <a:off x="8046720" y="1508760"/>
+            <a:ext cx="3566160" cy="2926080"/>
+          </a:xfrm>
+          <a:prstGeom prst="rect">
+            <a:avLst/>
+          </a:prstGeom>
+          <a:noFill/>
+        </p:spPr>
+        <p:txBody>
+          <a:bodyPr wrap="square">
+            <a:spAutoFit/>
+          </a:bodyPr>
+          <a:lstStyle/>
+          <a:p>
+            <a:pPr>
+              <a:spcAft>
+                <a:spcPts val="500"/>
+              </a:spcAft>
+              <a:defRPr sz="1300">
+                <a:solidFill>
+                  <a:srgbClr val="1F2328"/>
+                </a:solidFill>
+              </a:defRPr>
+            </a:pPr>
+            <a:r>
+              <a:t>• EXP-01: synth 2/12 → 5/12, doc3 +1 critical, 0 ложных</a:t>
+            </a:r>
+          </a:p>
+          <a:p>
+            <a:pPr>
+              <a:spcAft>
+                <a:spcPts val="500"/>
+              </a:spcAft>
+              <a:defRPr sz="1300">
+                <a:solidFill>
+                  <a:srgbClr val="1F2328"/>
+                </a:solidFill>
+              </a:defRPr>
+            </a:pPr>
+            <a:r>
+              <a:t>• EXP-13: единственный, кто держит C-класс на всех моделях</a:t>
+            </a:r>
+          </a:p>
+          <a:p>
+            <a:pPr>
+              <a:spcAft>
+                <a:spcPts val="500"/>
+              </a:spcAft>
+              <a:defRPr sz="1300">
+                <a:solidFill>
+                  <a:srgbClr val="1F2328"/>
+                </a:solidFill>
+              </a:defRPr>
+            </a:pPr>
+            <a:r>
+              <a:t>• EXP-14: критик резал граф-находку → граф выведен из-под критика</a:t>
+            </a:r>
+          </a:p>
+        </p:txBody>
+      </p:sp>
+      <p:sp>
+        <p:nvSpPr>
+          <p:cNvPr id="9" name="TextBox 8"/>
+          <p:cNvSpPr txBox="1"/>
+          <p:nvPr/>
+        </p:nvSpPr>
+        <p:spPr>
+          <a:xfrm>
+            <a:off x="548640" y="4526280"/>
+            <a:ext cx="11064240" cy="1600200"/>
+          </a:xfrm>
+          <a:prstGeom prst="rect">
+            <a:avLst/>
+          </a:prstGeom>
+          <a:noFill/>
+        </p:spPr>
+        <p:txBody>
+          <a:bodyPr wrap="square">
+            <a:spAutoFit/>
+          </a:bodyPr>
+          <a:lstStyle/>
+          <a:p>
+            <a:pPr>
+              <a:defRPr sz="1300" b="1">
+                <a:solidFill>
+                  <a:srgbClr val="2563EB"/>
+                </a:solidFill>
+              </a:defRPr>
+            </a:pPr>
+            <a:r>
+              <a:t>Пример находки на документах МТС</a:t>
+            </a:r>
+          </a:p>
+          <a:p>
+            <a:pPr>
+              <a:spcAft>
+                <a:spcPts val="300"/>
+              </a:spcAft>
+              <a:defRPr sz="1250">
+                <a:solidFill>
+                  <a:srgbClr val="1F2328"/>
+                </a:solidFill>
+              </a:defRPr>
+            </a:pPr>
+            <a:r>
+              <a:t>graph:undefined_field (doc3, critical): поля FIELD_CELL_GEN, FIELD_CELL_ID, FIELD_IMEI, FIELD_IMSI, FIELD_LAC, FIELD_TIME_STAMP используются в алгоритме, но не описаны ни в одной структуре данных документа.</a:t>
             </a:r>
           </a:p>
         </p:txBody>

--- a/deliverables/interim/TZ_Review_interim.pptx
+++ b/deliverables/interim/TZ_Review_interim.pptx
@@ -7108,6 +7108,10 @@
                       </a:pPr>
                       <a:r>
                         <a:t>Коротков Леонид (@fDAFX)</a:t>
+                      </a:r>
+                      <a:br/>
+                      <a:r>
+                        <a:t>магистрант ИТМО, программа «Искусственный интеллект» (AI Talent Hub)</a:t>
                       </a:r>
                     </a:p>
                   </a:txBody>

--- a/deliverables/interim/TZ_Review_interim.pptx
+++ b/deliverables/interim/TZ_Review_interim.pptx
@@ -7107,11 +7107,7 @@
                         <a:defRPr sz="1200"/>
                       </a:pPr>
                       <a:r>
-                        <a:t>Коротков Леонид (@fDAFX)</a:t>
-                      </a:r>
-                      <a:br/>
-                      <a:r>
-                        <a:t>магистрант ИТМО, программа «Искусственный интеллект» (AI Talent Hub)</a:t>
+                        <a:t>Коротков Леонид (@fDAFX), магистрант ИТМО, программа «Искусственный интеллект» (AI Talent Hub)</a:t>
                       </a:r>
                     </a:p>
                   </a:txBody>
